--- a/docs/presentations/X-Market-Sui-Overview.zh.pptx
+++ b/docs/presentations/X-Market-Sui-Overview.zh.pptx
@@ -6,6 +6,7 @@
   </p:sldMasterIdLst>
   <p:sldIdLst>
     <p:sldId id="256" r:id="rId2"/>
+    <p:sldId id="272" r:id="rId23"/>
     <p:sldId id="257" r:id="rId3"/>
     <p:sldId id="258" r:id="rId4"/>
     <p:sldId id="259" r:id="rId5"/>
@@ -20,6 +21,7 @@
     <p:sldId id="268" r:id="rId14"/>
     <p:sldId id="269" r:id="rId15"/>
     <p:sldId id="270" r:id="rId16"/>
+    <p:sldId id="273" r:id="rId24"/>
     <p:sldId id="271" r:id="rId17"/>
   </p:sldIdLst>
   <p:notesMasterIdLst>
@@ -1173,6 +1175,321 @@
     <a:masterClrMapping/>
   </p:clrMapOvr>
 </p:notes>
+</file>
+
+<file path=ppt/notesSlides/notesSlide18.xml><?xml version="1.0" encoding="utf-8"?>
+<p:notes xmlns:a="http://schemas.openxmlformats.org/drawingml/2006/main" xmlns:r="http://schemas.openxmlformats.org/officeDocument/2006/relationships" xmlns:p="http://schemas.openxmlformats.org/presentationml/2006/main">
+  
+  
+  <p:cSld>
+    
+    
+    <p:spTree>
+      
+      
+      <p:nvGrpSpPr>
+        
+        
+        <p:cNvPr id="1" name=""/>
+        
+        
+        <p:cNvGrpSpPr/>
+        
+        
+        <p:nvPr/>
+        
+      
+      </p:nvGrpSpPr>
+      
+      
+      <p:grpSpPr>
+        
+        
+        <a:xfrm>
+          
+          
+          <a:off x="0" y="0"/>
+          
+          
+          <a:ext cx="0" cy="0"/>
+          
+          
+          <a:chOff x="0" y="0"/>
+          
+          
+          <a:chExt cx="0" cy="0"/>
+          
+        
+        </a:xfrm>
+        
+      
+      </p:grpSpPr>
+      
+      
+      <p:sp>
+        
+        
+        <p:nvSpPr>
+          
+          
+          <p:cNvPr id="2" name="Slide Image Placeholder 1"/>
+          
+          
+          <p:cNvSpPr>
+            
+            
+            <a:spLocks noGrp="1" noRot="1" noChangeAspect="1"/>
+            
+          
+          </p:cNvSpPr>
+          
+          
+          <p:nvPr>
+            
+            
+            <p:ph type="sldImg"/>
+            
+          
+          </p:nvPr>
+          
+        
+        </p:nvSpPr>
+        
+        
+        <p:spPr/>
+        
+      
+      </p:sp>
+      
+      
+      <p:sp>
+        
+        
+        <p:nvSpPr>
+          
+          
+          <p:cNvPr id="3" name="Notes Placeholder 2"/>
+          
+          
+          <p:cNvSpPr>
+            
+            
+            <a:spLocks noGrp="1"/>
+            
+          
+          </p:cNvSpPr>
+          
+          
+          <p:nvPr>
+            
+            
+            <p:ph type="body" idx="1"/>
+            
+          
+          </p:nvPr>
+          
+        
+        </p:nvSpPr>
+        
+        
+        <p:spPr/>
+        
+        
+        <p:txBody>
+          
+          
+          <a:bodyPr/>
+          
+          
+          <a:lstStyle/>
+          
+          
+          <a:p>
+            <a:r>
+              <a:rPr lang="zh-CN" dirty="0"/>
+              <a:t>口播稿（约 75 秒）</a:t>
+            </a:r>
+            <a:endParaRPr lang="zh-CN" dirty="0"/>
+          </a:p>
+          <a:p>
+            <a:r>
+              <a:rPr lang="zh-CN" dirty="0"/>
+              <a:t></a:t>
+            </a:r>
+            <a:endParaRPr lang="zh-CN" dirty="0"/>
+          </a:p>
+          <a:p>
+            <a:r>
+              <a:rPr lang="zh-CN" dirty="0"/>
+              <a:t>走完整套架构之后，我们用「结论与展望」来收束。</a:t>
+            </a:r>
+            <a:endParaRPr lang="zh-CN" dirty="0"/>
+          </a:p>
+          <a:p>
+            <a:r>
+              <a:rPr lang="zh-CN" dirty="0"/>
+              <a:t></a:t>
+            </a:r>
+            <a:endParaRPr lang="zh-CN" dirty="0"/>
+          </a:p>
+          <a:p>
+            <a:r>
+              <a:rPr lang="zh-CN" dirty="0"/>
+              <a:t>结论上，X-Market 要回答的不是「再做一个预测市场」，而是把预测从 Yes/No 博彩升级为 PDF 概率衍生品。博弈模块与 SuiProphet 共用 EventRoot 和统一 Oracle，同一事件的下注、解锁和结算指向同一个真相源。链上 PDF 定价加上 Seal 强制审计，让交易者、LP、预言家和协议四方都能在一个可持续的生态里获利。Testnet v2 已经全栈跑通——这不是概念，是已验证的产品。</a:t>
+            </a:r>
+            <a:endParaRPr lang="zh-CN" dirty="0"/>
+          </a:p>
+          <a:p>
+            <a:r>
+              <a:rPr lang="zh-CN" dirty="0"/>
+              <a:t></a:t>
+            </a:r>
+            <a:endParaRPr lang="zh-CN" dirty="0"/>
+          </a:p>
+          <a:p>
+            <a:r>
+              <a:rPr lang="zh-CN" dirty="0"/>
+              <a:t>展望上，短期我们聚焦 Phase 3 收尾：Variance Swap、Slash 治理，以及 ZK Attestation 冷路径从 mock 走向 live 监督线——Brevis Prover 登记 proof_hash，3600 秒挑战窗口，不阻塞 buy_* 热路径。PDF 侧，Beta 分布覆盖得票率、独立双池联合概率、更多垂直市场并行扩展。外部审计通过后推进 Mainnet；Circle USDC 主网结算同步落地。GeoBlock 只是前端按 IP 限制 Web 访问的合规配套，不替代 KYC，也不阻止直接链上交互。</a:t>
+            </a:r>
+            <a:endParaRPr lang="zh-CN" dirty="0"/>
+          </a:p>
+          <a:p>
+            <a:r>
+              <a:rPr lang="zh-CN" dirty="0"/>
+              <a:t></a:t>
+            </a:r>
+            <a:endParaRPr lang="zh-CN" dirty="0"/>
+          </a:p>
+          <a:p>
+            <a:r>
+              <a:rPr lang="zh-CN" dirty="0"/>
+              <a:t>长期，我们要成为 Sui 链上概率分布衍生品与链上知识付费的基础设施层，服务零售、LP、专业预言家和量化机构；EventRoot 全量迁移，SDK 和 Quant API 对外开放。用链上 PDF 取代碎片化 Yes/No，用强制审计取代虚假带单——这就是我们看到的终局。</a:t>
+            </a:r>
+            <a:endParaRPr lang="zh-CN" dirty="0"/>
+          </a:p>
+          <a:p>
+            <a:r>
+              <a:rPr lang="zh-CN" dirty="0"/>
+              <a:t></a:t>
+            </a:r>
+            <a:endParaRPr lang="zh-CN" dirty="0"/>
+          </a:p>
+          <a:p>
+            <a:r>
+              <a:rPr lang="zh-CN" dirty="0"/>
+              <a:t>转场：翻到「谢谢」页，开放 Q&A。</a:t>
+            </a:r>
+            <a:endParaRPr lang="zh-CN" dirty="0"/>
+          </a:p>
+          
+        
+        </p:txBody>
+        
+      
+      </p:sp>
+      
+      
+      <p:sp>
+        
+        
+        <p:nvSpPr>
+          
+          
+          <p:cNvPr id="4" name="Slide Number Placeholder 3"/>
+          
+          
+          <p:cNvSpPr>
+            
+            
+            <a:spLocks noGrp="1"/>
+            
+          
+          </p:cNvSpPr>
+          
+          
+          <p:nvPr>
+            
+            
+            <p:ph type="sldNum" sz="quarter" idx="10"/>
+            
+          
+          </p:nvPr>
+          
+        
+        </p:nvSpPr>
+        
+        
+        <p:spPr/>
+        
+        
+        <p:txBody>
+          
+          
+          <a:bodyPr/>
+          
+          
+          <a:lstStyle/>
+          
+          
+          <a:p>
+            
+            
+            <a:fld id="{F7021451-1387-4CA6-816F-3879F97B5CBC}" type="slidenum">
+              
+              
+              <a:rPr lang="en-US"/>
+              
+              
+              <a:t>17</a:t>
+              
+            
+            </a:fld>
+            
+            
+            <a:endParaRPr lang="en-US"/>
+            
+          
+          </a:p>
+          
+        
+        </p:txBody>
+        
+      
+      </p:sp>
+      
+    
+    </p:spTree>
+    
+    
+    <p:extLst>
+      
+      
+      <p:ext uri="{BB962C8B-B14F-4D97-AF65-F5344CB8AC3E}">
+        
+        
+        <p14:creationId xmlns:p14="http://schemas.microsoft.com/office/powerpoint/2010/main" val="1024086991"/>
+        
+      
+      </p:ext>
+      
+    
+    </p:extLst>
+    
+  
+  </p:cSld>
+  
+  
+  <p:clrMapOvr>
+    
+    
+    <a:masterClrMapping/>
+    
+  
+  </p:clrMapOvr>
+  
+
+</p:notes>
+
 </file>
 
 <file path=ppt/notesSlides/notesSlide2.xml><?xml version="1.0" encoding="utf-8"?>
@@ -9920,6 +10237,1643 @@
 </p:sld>
 </file>
 
+<file path=ppt/slides/slide17.xml><?xml version="1.0" encoding="utf-8"?>
+<p:sld xmlns:a="http://schemas.openxmlformats.org/drawingml/2006/main" xmlns:r="http://schemas.openxmlformats.org/officeDocument/2006/relationships" xmlns:p="http://schemas.openxmlformats.org/presentationml/2006/main">
+  <p:cSld name="Slide 17">
+    <p:bg>
+      <p:bgPr>
+        <a:solidFill>
+          <a:srgbClr val="F0F7FA"/>
+        </a:solidFill>
+      </p:bgPr>
+    </p:bg>
+    <p:spTree>
+      <p:nvGrpSpPr>
+        <p:cNvPr id="1" name=""/>
+        <p:cNvGrpSpPr/>
+        <p:nvPr/>
+      </p:nvGrpSpPr>
+      <p:grpSpPr>
+        <a:xfrm>
+          <a:off x="0" y="0"/>
+          <a:ext cx="0" cy="0"/>
+          <a:chOff x="0" y="0"/>
+          <a:chExt cx="0" cy="0"/>
+        </a:xfrm>
+      </p:grpSpPr>
+      <p:sp>
+        <p:nvSpPr>
+          <p:cNvPr id="2" name="Shape 0"/>
+          <p:cNvSpPr/>
+          <p:nvPr/>
+        </p:nvSpPr>
+        <p:spPr>
+          <a:xfrm>
+            <a:off x="0" y="0"/>
+            <a:ext cx="9144000" cy="960120"/>
+          </a:xfrm>
+          <a:prstGeom prst="rect">
+            <a:avLst/>
+          </a:prstGeom>
+          <a:solidFill>
+            <a:srgbClr val="065A82"/>
+          </a:solidFill>
+          <a:ln/>
+        </p:spPr>
+      </p:sp>
+      <p:sp>
+        <p:nvSpPr>
+          <p:cNvPr id="3" name="Shape 1"/>
+          <p:cNvSpPr/>
+          <p:nvPr/>
+        </p:nvSpPr>
+        <p:spPr>
+          <a:xfrm>
+            <a:off x="0" y="960120"/>
+            <a:ext cx="9144000" cy="54864"/>
+          </a:xfrm>
+          <a:prstGeom prst="rect">
+            <a:avLst/>
+          </a:prstGeom>
+          <a:solidFill>
+            <a:srgbClr val="02C39A"/>
+          </a:solidFill>
+          <a:ln/>
+        </p:spPr>
+      </p:sp>
+      <p:sp>
+        <p:nvSpPr>
+          <p:cNvPr id="4" name="Text 2"/>
+          <p:cNvSpPr/>
+          <p:nvPr/>
+        </p:nvSpPr>
+        <p:spPr>
+          <a:xfrm>
+            <a:off x="457200" y="164592"/>
+            <a:ext cx="8229600" cy="502920"/>
+          </a:xfrm>
+          <a:prstGeom prst="rect">
+            <a:avLst/>
+          </a:prstGeom>
+          <a:noFill/>
+          <a:ln/>
+        </p:spPr>
+        <p:txBody>
+          <a:bodyPr wrap="square" lIns="0" tIns="0" rIns="0" bIns="0" rtlCol="0" anchor="ctr"/>
+          <a:lstStyle/>
+          <a:p>
+            <a:pPr indent="0" marL="0">
+              <a:buNone/>
+            </a:pPr>
+            <a:r>
+              <a:rPr lang="en-US" sz="2800" b="1" dirty="0">
+                <a:solidFill>
+                  <a:srgbClr val="FFFFFF"/>
+                </a:solidFill>
+                <a:latin typeface="Arial" pitchFamily="34" charset="0"/>
+                <a:ea typeface="Arial" pitchFamily="34" charset="-122"/>
+                <a:cs typeface="Arial" pitchFamily="34" charset="-120"/>
+              </a:rPr>
+              <a:t>问题概览</a:t>
+            </a:r>
+            <a:endParaRPr lang="en-US" sz="2800" dirty="0"/>
+          </a:p>
+        </p:txBody>
+      </p:sp>
+      <p:sp>
+        <p:nvSpPr>
+          <p:cNvPr id="5" name="Text 3"/>
+          <p:cNvSpPr/>
+          <p:nvPr/>
+        </p:nvSpPr>
+        <p:spPr>
+          <a:xfrm>
+            <a:off x="457200" y="621792"/>
+            <a:ext cx="8229600" cy="274320"/>
+          </a:xfrm>
+          <a:prstGeom prst="rect">
+            <a:avLst/>
+          </a:prstGeom>
+          <a:noFill/>
+          <a:ln/>
+        </p:spPr>
+        <p:txBody>
+          <a:bodyPr wrap="square" lIns="0" tIns="0" rIns="0" bIns="0" rtlCol="0" anchor="ctr"/>
+          <a:lstStyle/>
+          <a:p>
+            <a:pPr indent="0" marL="0">
+              <a:buNone/>
+            </a:pPr>
+            <a:r>
+              <a:rPr lang="en-US" sz="1200" dirty="0">
+                <a:solidFill>
+                  <a:srgbClr val="CADCFC"/>
+                </a:solidFill>
+                <a:latin typeface="Arial" pitchFamily="34" charset="0"/>
+                <a:ea typeface="Arial" pitchFamily="34" charset="-122"/>
+                <a:cs typeface="Arial" pitchFamily="34" charset="-120"/>
+              </a:rPr>
+              <a:t>预测市场无法成为真正金融基础设施的三大缺口 · 约 30–60 秒</a:t>
+            </a:r>
+            <a:endParaRPr lang="en-US" sz="1200" dirty="0"/>
+          </a:p>
+        </p:txBody>
+      </p:sp>
+      <p:sp>
+        <p:nvSpPr>
+          <p:cNvPr id="6" name="Shape 4"/>
+          <p:cNvSpPr/>
+          <p:nvPr/>
+        </p:nvSpPr>
+        <p:spPr>
+          <a:xfrm>
+            <a:off x="365760" y="1234440"/>
+            <a:ext cx="73152" cy="914400"/>
+          </a:xfrm>
+          <a:prstGeom prst="rect">
+            <a:avLst/>
+          </a:prstGeom>
+          <a:solidFill>
+            <a:srgbClr val="F96167"/>
+          </a:solidFill>
+          <a:ln/>
+        </p:spPr>
+      </p:sp>
+      <p:sp>
+        <p:nvSpPr>
+          <p:cNvPr id="7" name="Text 5"/>
+          <p:cNvSpPr/>
+          <p:nvPr/>
+        </p:nvSpPr>
+        <p:spPr>
+          <a:xfrm>
+            <a:off x="594360" y="1280160"/>
+            <a:ext cx="8046720" cy="320040"/>
+          </a:xfrm>
+          <a:prstGeom prst="rect">
+            <a:avLst/>
+          </a:prstGeom>
+          <a:noFill/>
+          <a:ln/>
+        </p:spPr>
+        <p:txBody>
+          <a:bodyPr wrap="square" lIns="0" tIns="0" rIns="0" bIns="0" rtlCol="0" anchor="ctr"/>
+          <a:lstStyle/>
+          <a:p>
+            <a:pPr indent="0" marL="0">
+              <a:buNone/>
+            </a:pPr>
+            <a:r>
+              <a:rPr lang="en-US" sz="1400" b="1" dirty="0">
+                <a:solidFill>
+                  <a:srgbClr val="065A82"/>
+                </a:solidFill>
+                <a:latin typeface="Arial" pitchFamily="34" charset="0"/>
+                <a:ea typeface="Arial" pitchFamily="34" charset="-122"/>
+                <a:cs typeface="Arial" pitchFamily="34" charset="-120"/>
+              </a:rPr>
+              <a:t>二元碎片化 — 无法表达连续概率</a:t>
+            </a:r>
+            <a:endParaRPr lang="en-US" sz="1400" dirty="0"/>
+          </a:p>
+        </p:txBody>
+      </p:sp>
+      <p:sp>
+        <p:nvSpPr>
+          <p:cNvPr id="8" name="Text 6"/>
+          <p:cNvSpPr/>
+          <p:nvPr/>
+        </p:nvSpPr>
+        <p:spPr>
+          <a:xfrm>
+            <a:off x="594360" y="1618488"/>
+            <a:ext cx="8046720" cy="502920"/>
+          </a:xfrm>
+          <a:prstGeom prst="rect">
+            <a:avLst/>
+          </a:prstGeom>
+          <a:noFill/>
+          <a:ln/>
+        </p:spPr>
+        <p:txBody>
+          <a:bodyPr wrap="square" lIns="0" tIns="0" rIns="0" bIns="0" rtlCol="0" anchor="ctr"/>
+          <a:lstStyle/>
+          <a:p>
+            <a:pPr indent="0" marL="0">
+              <a:buNone/>
+            </a:pPr>
+            <a:r>
+              <a:rPr lang="en-US" sz="1100" dirty="0">
+                <a:solidFill>
+                  <a:srgbClr val="1E293B"/>
+                </a:solidFill>
+                <a:latin typeface="Arial" pitchFamily="34" charset="0"/>
+                <a:ea typeface="Arial" pitchFamily="34" charset="-122"/>
+                <a:cs typeface="Arial" pitchFamily="34" charset="-120"/>
+              </a:rPr>
+              <a:t>Yes/No 无法为 CPI 区间、选举份额、进球数定价 — 机构无法对冲区间风险</a:t>
+            </a:r>
+            <a:endParaRPr lang="en-US" sz="1100" dirty="0"/>
+          </a:p>
+        </p:txBody>
+      </p:sp>
+      <p:sp>
+        <p:nvSpPr>
+          <p:cNvPr id="9" name="Shape 7"/>
+          <p:cNvSpPr/>
+          <p:nvPr/>
+        </p:nvSpPr>
+        <p:spPr>
+          <a:xfrm>
+            <a:off x="365760" y="2377440"/>
+            <a:ext cx="73152" cy="914400"/>
+          </a:xfrm>
+          <a:prstGeom prst="rect">
+            <a:avLst/>
+          </a:prstGeom>
+          <a:solidFill>
+            <a:srgbClr val="F96167"/>
+          </a:solidFill>
+          <a:ln/>
+        </p:spPr>
+      </p:sp>
+      <p:sp>
+        <p:nvSpPr>
+          <p:cNvPr id="10" name="Text 8"/>
+          <p:cNvSpPr/>
+          <p:nvPr/>
+        </p:nvSpPr>
+        <p:spPr>
+          <a:xfrm>
+            <a:off x="594360" y="2423160"/>
+            <a:ext cx="8046720" cy="320040"/>
+          </a:xfrm>
+          <a:prstGeom prst="rect">
+            <a:avLst/>
+          </a:prstGeom>
+          <a:noFill/>
+          <a:ln/>
+        </p:spPr>
+        <p:txBody>
+          <a:bodyPr wrap="square" lIns="0" tIns="0" rIns="0" bIns="0" rtlCol="0" anchor="ctr"/>
+          <a:lstStyle/>
+          <a:p>
+            <a:pPr indent="0" marL="0">
+              <a:buNone/>
+            </a:pPr>
+            <a:r>
+              <a:rPr lang="en-US" sz="1400" b="1" dirty="0">
+                <a:solidFill>
+                  <a:srgbClr val="065A82"/>
+                </a:solidFill>
+                <a:latin typeface="Arial" pitchFamily="34" charset="0"/>
+                <a:ea typeface="Arial" pitchFamily="34" charset="-122"/>
+                <a:cs typeface="Arial" pitchFamily="34" charset="-120"/>
+              </a:rPr>
+              <a:t>带单无审计 — KOL 战绩可伪造</a:t>
+            </a:r>
+            <a:endParaRPr lang="en-US" sz="1400" dirty="0"/>
+          </a:p>
+        </p:txBody>
+      </p:sp>
+      <p:sp>
+        <p:nvSpPr>
+          <p:cNvPr id="11" name="Text 9"/>
+          <p:cNvSpPr/>
+          <p:nvPr/>
+        </p:nvSpPr>
+        <p:spPr>
+          <a:xfrm>
+            <a:off x="594360" y="2761488"/>
+            <a:ext cx="8046720" cy="502920"/>
+          </a:xfrm>
+          <a:prstGeom prst="rect">
+            <a:avLst/>
+          </a:prstGeom>
+          <a:noFill/>
+          <a:ln/>
+        </p:spPr>
+        <p:txBody>
+          <a:bodyPr wrap="square" lIns="0" tIns="0" rIns="0" bIns="0" rtlCol="0" anchor="ctr"/>
+          <a:lstStyle/>
+          <a:p>
+            <a:pPr indent="0" marL="0">
+              <a:buNone/>
+            </a:pPr>
+            <a:r>
+              <a:rPr lang="en-US" sz="1100" dirty="0">
+                <a:solidFill>
+                  <a:srgbClr val="1E293B"/>
+                </a:solidFill>
+                <a:latin typeface="Arial" pitchFamily="34" charset="0"/>
+                <a:ea typeface="Arial" pitchFamily="34" charset="-122"/>
+                <a:cs typeface="Arial" pitchFamily="34" charset="-120"/>
+              </a:rPr>
+              <a:t>KOL 战绩可伪造 — 订阅者无法事后验证付费信号</a:t>
+            </a:r>
+            <a:endParaRPr lang="en-US" sz="1100" dirty="0"/>
+          </a:p>
+        </p:txBody>
+      </p:sp>
+      <p:sp>
+        <p:nvSpPr>
+          <p:cNvPr id="12" name="Shape 10"/>
+          <p:cNvSpPr/>
+          <p:nvPr/>
+        </p:nvSpPr>
+        <p:spPr>
+          <a:xfrm>
+            <a:off x="365760" y="3520440"/>
+            <a:ext cx="73152" cy="914400"/>
+          </a:xfrm>
+          <a:prstGeom prst="rect">
+            <a:avLst/>
+          </a:prstGeom>
+          <a:solidFill>
+            <a:srgbClr val="F96167"/>
+          </a:solidFill>
+          <a:ln/>
+        </p:spPr>
+      </p:sp>
+      <p:sp>
+        <p:nvSpPr>
+          <p:cNvPr id="13" name="Text 11"/>
+          <p:cNvSpPr/>
+          <p:nvPr/>
+        </p:nvSpPr>
+        <p:spPr>
+          <a:xfrm>
+            <a:off x="594360" y="3566160"/>
+            <a:ext cx="8046720" cy="320040"/>
+          </a:xfrm>
+          <a:prstGeom prst="rect">
+            <a:avLst/>
+          </a:prstGeom>
+          <a:noFill/>
+          <a:ln/>
+        </p:spPr>
+        <p:txBody>
+          <a:bodyPr wrap="square" lIns="0" tIns="0" rIns="0" bIns="0" rtlCol="0" anchor="ctr"/>
+          <a:lstStyle/>
+          <a:p>
+            <a:pPr indent="0" marL="0">
+              <a:buNone/>
+            </a:pPr>
+            <a:r>
+              <a:rPr lang="en-US" sz="1400" b="1" dirty="0">
+                <a:solidFill>
+                  <a:srgbClr val="065A82"/>
+                </a:solidFill>
+                <a:latin typeface="Arial" pitchFamily="34" charset="0"/>
+                <a:ea typeface="Arial" pitchFamily="34" charset="-122"/>
+                <a:cs typeface="Arial" pitchFamily="34" charset="-120"/>
+              </a:rPr>
+              <a:t>结算割裂 — 博弈与洞察缺乏单一真相源</a:t>
+            </a:r>
+            <a:endParaRPr lang="en-US" sz="1400" dirty="0"/>
+          </a:p>
+        </p:txBody>
+      </p:sp>
+      <p:sp>
+        <p:nvSpPr>
+          <p:cNvPr id="14" name="Text 12"/>
+          <p:cNvSpPr/>
+          <p:nvPr/>
+        </p:nvSpPr>
+        <p:spPr>
+          <a:xfrm>
+            <a:off x="594360" y="3904488"/>
+            <a:ext cx="8046720" cy="502920"/>
+          </a:xfrm>
+          <a:prstGeom prst="rect">
+            <a:avLst/>
+          </a:prstGeom>
+          <a:noFill/>
+          <a:ln/>
+        </p:spPr>
+        <p:txBody>
+          <a:bodyPr wrap="square" lIns="0" tIns="0" rIns="0" bIns="0" rtlCol="0" anchor="ctr"/>
+          <a:lstStyle/>
+          <a:p>
+            <a:pPr indent="0" marL="0">
+              <a:buNone/>
+            </a:pPr>
+            <a:r>
+              <a:rPr lang="en-US" sz="1100" dirty="0">
+                <a:solidFill>
+                  <a:srgbClr val="1E293B"/>
+                </a:solidFill>
+                <a:latin typeface="Arial" pitchFamily="34" charset="0"/>
+                <a:ea typeface="Arial" pitchFamily="34" charset="-122"/>
+                <a:cs typeface="Arial" pitchFamily="34" charset="-120"/>
+              </a:rPr>
+              <a:t>下注与付费分析使用不同 Oracle — 同一事件无法聚合到单一根节点</a:t>
+            </a:r>
+            <a:endParaRPr lang="en-US" sz="1100" dirty="0"/>
+          </a:p>
+        </p:txBody>
+      </p:sp>
+      <p:sp>
+        <p:nvSpPr>
+          <p:cNvPr id="15" name="Shape 13"/>
+          <p:cNvSpPr/>
+          <p:nvPr/>
+        </p:nvSpPr>
+        <p:spPr>
+          <a:xfrm>
+            <a:off x="365760" y="4663440"/>
+            <a:ext cx="73152" cy="914400"/>
+          </a:xfrm>
+          <a:prstGeom prst="rect">
+            <a:avLst/>
+          </a:prstGeom>
+          <a:solidFill>
+            <a:srgbClr val="F96167">
+              <a:alpha val="0"/>
+            </a:srgbClr>
+          </a:solidFill>
+          <a:ln/>
+        </p:spPr>
+      </p:sp>
+      <p:sp>
+        <p:nvSpPr>
+          <p:cNvPr id="16" name="Text 14"/>
+          <p:cNvSpPr/>
+          <p:nvPr/>
+        </p:nvSpPr>
+        <p:spPr>
+          <a:xfrm>
+            <a:off x="594360" y="4709160"/>
+            <a:ext cx="8046720" cy="320040"/>
+          </a:xfrm>
+          <a:prstGeom prst="rect">
+            <a:avLst/>
+          </a:prstGeom>
+          <a:noFill/>
+          <a:ln/>
+        </p:spPr>
+        <p:txBody>
+          <a:bodyPr wrap="square" lIns="0" tIns="0" rIns="0" bIns="0" rtlCol="0" anchor="ctr"/>
+          <a:lstStyle/>
+          <a:p>
+            <a:pPr indent="0" marL="0">
+              <a:buNone/>
+            </a:pPr>
+            <a:r>
+              <a:rPr lang="en-US" sz="1400" b="1" dirty="0">
+                <a:solidFill>
+                  <a:srgbClr val="065A82"/>
+                </a:solidFill>
+                <a:latin typeface="Arial" pitchFamily="34" charset="0"/>
+                <a:ea typeface="Arial" pitchFamily="34" charset="-122"/>
+                <a:cs typeface="Arial" pitchFamily="34" charset="-120"/>
+              </a:rPr>
+              <a:t/>
+            </a:r>
+            <a:endParaRPr lang="en-US" sz="1400" dirty="0"/>
+          </a:p>
+        </p:txBody>
+      </p:sp>
+      <p:sp>
+        <p:nvSpPr>
+          <p:cNvPr id="17" name="Text 15"/>
+          <p:cNvSpPr/>
+          <p:nvPr/>
+        </p:nvSpPr>
+        <p:spPr>
+          <a:xfrm>
+            <a:off x="594360" y="5047488"/>
+            <a:ext cx="8046720" cy="502920"/>
+          </a:xfrm>
+          <a:prstGeom prst="rect">
+            <a:avLst/>
+          </a:prstGeom>
+          <a:noFill/>
+          <a:ln/>
+        </p:spPr>
+        <p:txBody>
+          <a:bodyPr wrap="square" lIns="0" tIns="0" rIns="0" bIns="0" rtlCol="0" anchor="ctr"/>
+          <a:lstStyle/>
+          <a:p>
+            <a:pPr indent="0" marL="0">
+              <a:buNone/>
+            </a:pPr>
+            <a:r>
+              <a:rPr lang="en-US" sz="1100" dirty="0">
+                <a:solidFill>
+                  <a:srgbClr val="1E293B"/>
+                </a:solidFill>
+                <a:latin typeface="Arial" pitchFamily="34" charset="0"/>
+                <a:ea typeface="Arial" pitchFamily="34" charset="-122"/>
+                <a:cs typeface="Arial" pitchFamily="34" charset="-120"/>
+              </a:rPr>
+              <a:t/>
+            </a:r>
+            <a:endParaRPr lang="en-US" sz="1100" dirty="0"/>
+          </a:p>
+        </p:txBody>
+      </p:sp>
+      <p:sp>
+        <p:nvSpPr>
+          <p:cNvPr id="18" name="Shape 16"/>
+          <p:cNvSpPr/>
+          <p:nvPr/>
+        </p:nvSpPr>
+        <p:spPr>
+          <a:xfrm>
+            <a:off x="365760" y="4434840"/>
+            <a:ext cx="8412480" cy="502920"/>
+          </a:xfrm>
+          <a:prstGeom prst="rect">
+            <a:avLst/>
+          </a:prstGeom>
+          <a:solidFill>
+            <a:srgbClr val="21295C"/>
+          </a:solidFill>
+          <a:ln/>
+        </p:spPr>
+      </p:sp>
+      <p:sp>
+        <p:nvSpPr>
+          <p:cNvPr id="19" name="Text 17"/>
+          <p:cNvSpPr/>
+          <p:nvPr/>
+        </p:nvSpPr>
+        <p:spPr>
+          <a:xfrm>
+            <a:off x="502920" y="4526280"/>
+            <a:ext cx="8138160" cy="365760"/>
+          </a:xfrm>
+          <a:prstGeom prst="rect">
+            <a:avLst/>
+          </a:prstGeom>
+          <a:noFill/>
+          <a:ln/>
+        </p:spPr>
+        <p:txBody>
+          <a:bodyPr wrap="square" lIns="0" tIns="0" rIns="0" bIns="0" rtlCol="0" anchor="ctr"/>
+          <a:lstStyle/>
+          <a:p>
+            <a:pPr indent="0" marL="0">
+              <a:buNone/>
+            </a:pPr>
+            <a:r>
+              <a:rPr lang="en-US" sz="1100" b="1" dirty="0">
+                <a:solidFill>
+                  <a:srgbClr val="02C39A"/>
+                </a:solidFill>
+                <a:latin typeface="Arial" pitchFamily="34" charset="0"/>
+                <a:ea typeface="Arial" pitchFamily="34" charset="-122"/>
+                <a:cs typeface="Arial" pitchFamily="34" charset="-120"/>
+              </a:rPr>
+              <a:t>视频引导：预测市场需从「结果博彩」升级为「概率分布衍生品」— X-Market 在 Sui 上重建这一范式</a:t>
+            </a:r>
+            <a:endParaRPr lang="en-US" sz="1100" dirty="0"/>
+          </a:p>
+        </p:txBody>
+      </p:sp>
+    </p:spTree>
+  </p:cSld>
+  <p:clrMapOvr>
+    <a:masterClrMapping/>
+  </p:clrMapOvr>
+</p:sld>
+</file>
+
+<file path=ppt/slides/slide18.xml><?xml version="1.0" encoding="utf-8"?>
+<p:sld xmlns:a="http://schemas.openxmlformats.org/drawingml/2006/main" xmlns:r="http://schemas.openxmlformats.org/officeDocument/2006/relationships" xmlns:p="http://schemas.openxmlformats.org/presentationml/2006/main">
+  <p:cSld name="Slide 13">
+    <p:bg>
+      <p:bgPr>
+        <a:solidFill>
+          <a:srgbClr val="F0F7FA"/>
+        </a:solidFill>
+      </p:bgPr>
+    </p:bg>
+    <p:spTree>
+      <p:nvGrpSpPr>
+        <p:cNvPr id="1" name=""/>
+        <p:cNvGrpSpPr/>
+        <p:nvPr/>
+      </p:nvGrpSpPr>
+      <p:grpSpPr>
+        <a:xfrm>
+          <a:off x="0" y="0"/>
+          <a:ext cx="0" cy="0"/>
+          <a:chOff x="0" y="0"/>
+          <a:chExt cx="0" cy="0"/>
+        </a:xfrm>
+      </p:grpSpPr>
+      <p:sp>
+        <p:nvSpPr>
+          <p:cNvPr id="2" name="Shape 0"/>
+          <p:cNvSpPr/>
+          <p:nvPr/>
+        </p:nvSpPr>
+        <p:spPr>
+          <a:xfrm>
+            <a:off x="0" y="0"/>
+            <a:ext cx="9144000" cy="960120"/>
+          </a:xfrm>
+          <a:prstGeom prst="rect">
+            <a:avLst/>
+          </a:prstGeom>
+          <a:solidFill>
+            <a:srgbClr val="065A82"/>
+          </a:solidFill>
+          <a:ln/>
+        </p:spPr>
+      </p:sp>
+      <p:sp>
+        <p:nvSpPr>
+          <p:cNvPr id="3" name="Shape 1"/>
+          <p:cNvSpPr/>
+          <p:nvPr/>
+        </p:nvSpPr>
+        <p:spPr>
+          <a:xfrm>
+            <a:off x="0" y="960120"/>
+            <a:ext cx="9144000" cy="54864"/>
+          </a:xfrm>
+          <a:prstGeom prst="rect">
+            <a:avLst/>
+          </a:prstGeom>
+          <a:solidFill>
+            <a:srgbClr val="02C39A"/>
+          </a:solidFill>
+          <a:ln/>
+        </p:spPr>
+      </p:sp>
+      <p:sp>
+        <p:nvSpPr>
+          <p:cNvPr id="4" name="Text 2"/>
+          <p:cNvSpPr/>
+          <p:nvPr/>
+        </p:nvSpPr>
+        <p:spPr>
+          <a:xfrm>
+            <a:off x="457200" y="164592"/>
+            <a:ext cx="8229600" cy="502920"/>
+          </a:xfrm>
+          <a:prstGeom prst="rect">
+            <a:avLst/>
+          </a:prstGeom>
+          <a:noFill/>
+          <a:ln/>
+        </p:spPr>
+        <p:txBody>
+          <a:bodyPr wrap="square" lIns="0" tIns="0" rIns="0" bIns="0" rtlCol="0" anchor="ctr"/>
+          <a:lstStyle/>
+          <a:p>
+            <a:pPr indent="0" marL="0">
+              <a:buNone/>
+            </a:pPr>
+            <a:r>
+              <a:rPr lang="en-US" sz="2800" b="1" dirty="0">
+                <a:solidFill>
+                  <a:srgbClr val="FFFFFF"/>
+                </a:solidFill>
+                <a:latin typeface="Arial" pitchFamily="34" charset="0"/>
+                <a:ea typeface="Arial" pitchFamily="34" charset="-122"/>
+                <a:cs typeface="Arial" pitchFamily="34" charset="-120"/>
+              </a:rPr>
+              <a:t>结论与展望</a:t>
+            </a:r>
+            <a:endParaRPr lang="en-US" sz="2800" dirty="0"/>
+          </a:p>
+        </p:txBody>
+      </p:sp>
+      <p:sp>
+        <p:nvSpPr>
+          <p:cNvPr id="5" name="Text 3"/>
+          <p:cNvSpPr/>
+          <p:nvPr/>
+        </p:nvSpPr>
+        <p:spPr>
+          <a:xfrm>
+            <a:off x="457200" y="621792"/>
+            <a:ext cx="8229600" cy="274320"/>
+          </a:xfrm>
+          <a:prstGeom prst="rect">
+            <a:avLst/>
+          </a:prstGeom>
+          <a:noFill/>
+          <a:ln/>
+        </p:spPr>
+        <p:txBody>
+          <a:bodyPr wrap="square" lIns="0" tIns="0" rIns="0" bIns="0" rtlCol="0" anchor="ctr"/>
+          <a:lstStyle/>
+          <a:p>
+            <a:pPr indent="0" marL="0">
+              <a:buNone/>
+            </a:pPr>
+            <a:r>
+              <a:rPr lang="en-US" sz="1200" dirty="0">
+                <a:solidFill>
+                  <a:srgbClr val="CADCFC"/>
+                </a:solidFill>
+                <a:latin typeface="Arial" pitchFamily="34" charset="0"/>
+                <a:ea typeface="Arial" pitchFamily="34" charset="-122"/>
+                <a:cs typeface="Arial" pitchFamily="34" charset="-120"/>
+              </a:rPr>
+              <a:t>从 Testnet 验证到主网基础设施 · 约 60–90 秒</a:t>
+            </a:r>
+            <a:endParaRPr lang="en-US" sz="1200" dirty="0"/>
+          </a:p>
+        </p:txBody>
+      </p:sp>
+      <p:sp>
+        <p:nvSpPr>
+          <p:cNvPr id="6" name="Shape 4"/>
+          <p:cNvSpPr/>
+          <p:nvPr/>
+        </p:nvSpPr>
+        <p:spPr>
+          <a:xfrm>
+            <a:off x="365760" y="1188720"/>
+            <a:ext cx="4023360" cy="1691640"/>
+          </a:xfrm>
+          <a:prstGeom prst="rect">
+            <a:avLst/>
+          </a:prstGeom>
+          <a:solidFill>
+            <a:srgbClr val="FFFFFF"/>
+          </a:solidFill>
+          <a:ln w="12700">
+            <a:solidFill>
+              <a:srgbClr val="E2E8F0"/>
+            </a:solidFill>
+            <a:prstDash val="solid"/>
+          </a:ln>
+          <a:effectLst>
+            <a:outerShdw sx="100000" sy="100000" kx="0" ky="0" algn="bl" rotWithShape="0" blurRad="50800" dist="25400" dir="8100000">
+              <a:srgbClr val="000000">
+                <a:alpha val="12000"/>
+              </a:srgbClr>
+            </a:outerShdw>
+          </a:effectLst>
+        </p:spPr>
+      </p:sp>
+      <p:sp>
+        <p:nvSpPr>
+          <p:cNvPr id="7" name="Shape 5"/>
+          <p:cNvSpPr/>
+          <p:nvPr/>
+        </p:nvSpPr>
+        <p:spPr>
+          <a:xfrm>
+            <a:off x="548640" y="1371600"/>
+            <a:ext cx="502920" cy="502920"/>
+          </a:xfrm>
+          <a:prstGeom prst="ellipse">
+            <a:avLst/>
+          </a:prstGeom>
+          <a:solidFill>
+            <a:srgbClr val="02C39A"/>
+          </a:solidFill>
+          <a:ln/>
+        </p:spPr>
+      </p:sp>
+      <p:sp>
+        <p:nvSpPr>
+          <p:cNvPr id="8" name="Text 6"/>
+          <p:cNvSpPr/>
+          <p:nvPr/>
+        </p:nvSpPr>
+        <p:spPr>
+          <a:xfrm>
+            <a:off x="548640" y="1371600"/>
+            <a:ext cx="502920" cy="502920"/>
+          </a:xfrm>
+          <a:prstGeom prst="rect">
+            <a:avLst/>
+          </a:prstGeom>
+          <a:noFill/>
+          <a:ln/>
+        </p:spPr>
+        <p:txBody>
+          <a:bodyPr wrap="square" lIns="0" tIns="0" rIns="0" bIns="0" rtlCol="0" anchor="ctr"/>
+          <a:lstStyle/>
+          <a:p>
+            <a:pPr algn="ctr" indent="0" marL="0">
+              <a:buNone/>
+            </a:pPr>
+            <a:r>
+              <a:rPr lang="en-US" sz="1600" dirty="0">
+                <a:solidFill>
+                  <a:srgbClr val="000000"/>
+                </a:solidFill>
+              </a:rPr>
+              <a:t>✅</a:t>
+            </a:r>
+            <a:endParaRPr lang="en-US" sz="1600" dirty="0"/>
+          </a:p>
+        </p:txBody>
+      </p:sp>
+      <p:sp>
+        <p:nvSpPr>
+          <p:cNvPr id="9" name="Text 7"/>
+          <p:cNvSpPr/>
+          <p:nvPr/>
+        </p:nvSpPr>
+        <p:spPr>
+          <a:xfrm>
+            <a:off x="1143000" y="1353312"/>
+            <a:ext cx="3108960" cy="365760"/>
+          </a:xfrm>
+          <a:prstGeom prst="rect">
+            <a:avLst/>
+          </a:prstGeom>
+          <a:noFill/>
+          <a:ln/>
+        </p:spPr>
+        <p:txBody>
+          <a:bodyPr wrap="square" lIns="0" tIns="0" rIns="0" bIns="0" rtlCol="0" anchor="ctr"/>
+          <a:lstStyle/>
+          <a:p>
+            <a:pPr indent="0" marL="0">
+              <a:buNone/>
+            </a:pPr>
+            <a:r>
+              <a:rPr lang="en-US" sz="1400" b="1" dirty="0">
+                <a:solidFill>
+                  <a:srgbClr val="065A82"/>
+                </a:solidFill>
+                <a:latin typeface="Arial" pitchFamily="34" charset="0"/>
+                <a:ea typeface="Arial" pitchFamily="34" charset="-122"/>
+                <a:cs typeface="Arial" pitchFamily="34" charset="-120"/>
+              </a:rPr>
+              <a:t>核心结论</a:t>
+            </a:r>
+            <a:endParaRPr lang="en-US" sz="1400" dirty="0"/>
+          </a:p>
+        </p:txBody>
+      </p:sp>
+      <p:sp>
+        <p:nvSpPr>
+          <p:cNvPr id="10" name="Text 8"/>
+          <p:cNvSpPr/>
+          <p:nvPr/>
+        </p:nvSpPr>
+        <p:spPr>
+          <a:xfrm>
+            <a:off x="548640" y="1874520"/>
+            <a:ext cx="3657600" cy="914400"/>
+          </a:xfrm>
+          <a:prstGeom prst="rect">
+            <a:avLst/>
+          </a:prstGeom>
+          <a:noFill/>
+          <a:ln/>
+        </p:spPr>
+        <p:txBody>
+          <a:bodyPr wrap="square" rtlCol="0" anchor="t"/>
+          <a:lstStyle/>
+          <a:p>
+            <a:pPr marL="342900" indent="-342900">
+              <a:buSzPct val="100000"/>
+              <a:buChar char="•"/>
+            </a:pPr>
+            <a:r>
+              <a:rPr lang="en-US" sz="1000" dirty="0">
+                <a:solidFill>
+                  <a:srgbClr val="1E293B"/>
+                </a:solidFill>
+                <a:latin typeface="Arial" pitchFamily="34" charset="0"/>
+                <a:ea typeface="Arial" pitchFamily="34" charset="-122"/>
+                <a:cs typeface="Arial" pitchFamily="34" charset="-120"/>
+              </a:rPr>
+              <a:t>预测市场需从博彩升级为 PDF 概率衍生品</a:t>
+            </a:r>
+            <a:endParaRPr lang="en-US" sz="1000" dirty="0"/>
+          </a:p>
+          <a:p>
+            <a:pPr marL="342900" indent="-342900">
+              <a:buSzPct val="100000"/>
+              <a:buChar char="•"/>
+            </a:pPr>
+            <a:r>
+              <a:rPr lang="en-US" sz="1000" dirty="0">
+                <a:solidFill>
+                  <a:srgbClr val="1E293B"/>
+                </a:solidFill>
+                <a:latin typeface="Arial" pitchFamily="34" charset="0"/>
+                <a:ea typeface="Arial" pitchFamily="34" charset="-122"/>
+                <a:cs typeface="Arial" pitchFamily="34" charset="-120"/>
+              </a:rPr>
+              <a:t>双模块共用 EventRoot · 统一 Oracle 结算真相</a:t>
+            </a:r>
+            <a:endParaRPr lang="en-US" sz="1000" dirty="0"/>
+          </a:p>
+          <a:p>
+            <a:pPr marL="342900" indent="-342900">
+              <a:buSzPct val="100000"/>
+              <a:buChar char="•"/>
+            </a:pPr>
+            <a:r>
+              <a:rPr lang="en-US" sz="1000" dirty="0">
+                <a:solidFill>
+                  <a:srgbClr val="1E293B"/>
+                </a:solidFill>
+                <a:latin typeface="Arial" pitchFamily="34" charset="0"/>
+                <a:ea typeface="Arial" pitchFamily="34" charset="-122"/>
+                <a:cs typeface="Arial" pitchFamily="34" charset="-120"/>
+              </a:rPr>
+              <a:t>链上 PDF 定价 + Seal 强制审计 · 四方共赢生态</a:t>
+            </a:r>
+            <a:endParaRPr lang="en-US" sz="1000" dirty="0"/>
+          </a:p>
+          <a:p>
+            <a:pPr marL="342900" indent="-342900">
+              <a:buSzPct val="100000"/>
+              <a:buChar char="•"/>
+            </a:pPr>
+            <a:r>
+              <a:rPr lang="en-US" sz="1000" dirty="0">
+                <a:solidFill>
+                  <a:srgbClr val="1E293B"/>
+                </a:solidFill>
+                <a:latin typeface="Arial" pitchFamily="34" charset="0"/>
+                <a:ea typeface="Arial" pitchFamily="34" charset="-122"/>
+                <a:cs typeface="Arial" pitchFamily="34" charset="-120"/>
+              </a:rPr>
+              <a:t>Testnet v2 全栈已验证，非概念阶段</a:t>
+            </a:r>
+            <a:endParaRPr lang="en-US" sz="1000" dirty="0"/>
+          </a:p>
+        </p:txBody>
+      </p:sp>
+      <p:sp>
+        <p:nvSpPr>
+          <p:cNvPr id="11" name="Shape 9"/>
+          <p:cNvSpPr/>
+          <p:nvPr/>
+        </p:nvSpPr>
+        <p:spPr>
+          <a:xfrm>
+            <a:off x="4754880" y="1188720"/>
+            <a:ext cx="4023360" cy="1691640"/>
+          </a:xfrm>
+          <a:prstGeom prst="rect">
+            <a:avLst/>
+          </a:prstGeom>
+          <a:solidFill>
+            <a:srgbClr val="FFFFFF"/>
+          </a:solidFill>
+          <a:ln w="12700">
+            <a:solidFill>
+              <a:srgbClr val="E2E8F0"/>
+            </a:solidFill>
+            <a:prstDash val="solid"/>
+          </a:ln>
+          <a:effectLst>
+            <a:outerShdw sx="100000" sy="100000" kx="0" ky="0" algn="bl" rotWithShape="0" blurRad="50800" dist="25400" dir="8100000">
+              <a:srgbClr val="000000">
+                <a:alpha val="12000"/>
+              </a:srgbClr>
+            </a:outerShdw>
+          </a:effectLst>
+        </p:spPr>
+      </p:sp>
+      <p:sp>
+        <p:nvSpPr>
+          <p:cNvPr id="12" name="Shape 10"/>
+          <p:cNvSpPr/>
+          <p:nvPr/>
+        </p:nvSpPr>
+        <p:spPr>
+          <a:xfrm>
+            <a:off x="4937760" y="1371600"/>
+            <a:ext cx="502920" cy="502920"/>
+          </a:xfrm>
+          <a:prstGeom prst="ellipse">
+            <a:avLst/>
+          </a:prstGeom>
+          <a:solidFill>
+            <a:srgbClr val="1C7293"/>
+          </a:solidFill>
+          <a:ln/>
+        </p:spPr>
+      </p:sp>
+      <p:sp>
+        <p:nvSpPr>
+          <p:cNvPr id="13" name="Text 11"/>
+          <p:cNvSpPr/>
+          <p:nvPr/>
+        </p:nvSpPr>
+        <p:spPr>
+          <a:xfrm>
+            <a:off x="4937760" y="1371600"/>
+            <a:ext cx="502920" cy="502920"/>
+          </a:xfrm>
+          <a:prstGeom prst="rect">
+            <a:avLst/>
+          </a:prstGeom>
+          <a:noFill/>
+          <a:ln/>
+        </p:spPr>
+        <p:txBody>
+          <a:bodyPr wrap="square" lIns="0" tIns="0" rIns="0" bIns="0" rtlCol="0" anchor="ctr"/>
+          <a:lstStyle/>
+          <a:p>
+            <a:pPr algn="ctr" indent="0" marL="0">
+              <a:buNone/>
+            </a:pPr>
+            <a:r>
+              <a:rPr lang="en-US" sz="1600" dirty="0">
+                <a:solidFill>
+                  <a:srgbClr val="000000"/>
+                </a:solidFill>
+              </a:rPr>
+              <a:t>🔬</a:t>
+            </a:r>
+            <a:endParaRPr lang="en-US" sz="1600" dirty="0"/>
+          </a:p>
+        </p:txBody>
+      </p:sp>
+      <p:sp>
+        <p:nvSpPr>
+          <p:cNvPr id="14" name="Text 12"/>
+          <p:cNvSpPr/>
+          <p:nvPr/>
+        </p:nvSpPr>
+        <p:spPr>
+          <a:xfrm>
+            <a:off x="5532120" y="1353312"/>
+            <a:ext cx="3108960" cy="365760"/>
+          </a:xfrm>
+          <a:prstGeom prst="rect">
+            <a:avLst/>
+          </a:prstGeom>
+          <a:noFill/>
+          <a:ln/>
+        </p:spPr>
+        <p:txBody>
+          <a:bodyPr wrap="square" lIns="0" tIns="0" rIns="0" bIns="0" rtlCol="0" anchor="ctr"/>
+          <a:lstStyle/>
+          <a:p>
+            <a:pPr indent="0" marL="0">
+              <a:buNone/>
+            </a:pPr>
+            <a:r>
+              <a:rPr lang="en-US" sz="1400" b="1" dirty="0">
+                <a:solidFill>
+                  <a:srgbClr val="065A82"/>
+                </a:solidFill>
+                <a:latin typeface="Arial" pitchFamily="34" charset="0"/>
+                <a:ea typeface="Arial" pitchFamily="34" charset="-122"/>
+                <a:cs typeface="Arial" pitchFamily="34" charset="-120"/>
+              </a:rPr>
+              <a:t>已验证能力</a:t>
+            </a:r>
+            <a:endParaRPr lang="en-US" sz="1400" dirty="0"/>
+          </a:p>
+        </p:txBody>
+      </p:sp>
+      <p:sp>
+        <p:nvSpPr>
+          <p:cNvPr id="15" name="Text 13"/>
+          <p:cNvSpPr/>
+          <p:nvPr/>
+        </p:nvSpPr>
+        <p:spPr>
+          <a:xfrm>
+            <a:off x="4937760" y="1874520"/>
+            <a:ext cx="3657600" cy="914400"/>
+          </a:xfrm>
+          <a:prstGeom prst="rect">
+            <a:avLst/>
+          </a:prstGeom>
+          <a:noFill/>
+          <a:ln/>
+        </p:spPr>
+        <p:txBody>
+          <a:bodyPr wrap="square" rtlCol="0" anchor="t"/>
+          <a:lstStyle/>
+          <a:p>
+            <a:pPr marL="342900" indent="-342900">
+              <a:buSzPct val="100000"/>
+              <a:buChar char="•"/>
+            </a:pPr>
+            <a:r>
+              <a:rPr lang="en-US" sz="1000" dirty="0">
+                <a:solidFill>
+                  <a:srgbClr val="1E293B"/>
+                </a:solidFill>
+                <a:latin typeface="Arial" pitchFamily="34" charset="0"/>
+                <a:ea typeface="Arial" pitchFamily="34" charset="-122"/>
+                <a:cs typeface="Arial" pitchFamily="34" charset="-120"/>
+              </a:rPr>
+              <a:t>30+ Move 模块 · 三分布模板已部署</a:t>
+            </a:r>
+            <a:endParaRPr lang="en-US" sz="1000" dirty="0"/>
+          </a:p>
+          <a:p>
+            <a:pPr marL="342900" indent="-342900">
+              <a:buSzPct val="100000"/>
+              <a:buChar char="•"/>
+            </a:pPr>
+            <a:r>
+              <a:rPr lang="en-US" sz="1000" dirty="0">
+                <a:solidFill>
+                  <a:srgbClr val="1E293B"/>
+                </a:solidFill>
+                <a:latin typeface="Arial" pitchFamily="34" charset="0"/>
+                <a:ea typeface="Arial" pitchFamily="34" charset="-122"/>
+                <a:cs typeface="Arial" pitchFamily="34" charset="-120"/>
+              </a:rPr>
+              <a:t>Opening Auction 冷启动 · Max-Loss 全路径覆盖</a:t>
+            </a:r>
+            <a:endParaRPr lang="en-US" sz="1000" dirty="0"/>
+          </a:p>
+          <a:p>
+            <a:pPr marL="342900" indent="-342900">
+              <a:buSzPct val="100000"/>
+              <a:buChar char="•"/>
+            </a:pPr>
+            <a:r>
+              <a:rPr lang="en-US" sz="1000" dirty="0">
+                <a:solidFill>
+                  <a:srgbClr val="1E293B"/>
+                </a:solidFill>
+                <a:latin typeface="Arial" pitchFamily="34" charset="0"/>
+                <a:ea typeface="Arial" pitchFamily="34" charset="-122"/>
+                <a:cs typeface="Arial" pitchFamily="34" charset="-120"/>
+              </a:rPr>
+              <a:t>SuiProphet + Indexer + Flutter 端到端打通</a:t>
+            </a:r>
+            <a:endParaRPr lang="en-US" sz="1000" dirty="0"/>
+          </a:p>
+          <a:p>
+            <a:pPr marL="342900" indent="-342900">
+              <a:buSzPct val="100000"/>
+              <a:buChar char="•"/>
+            </a:pPr>
+            <a:r>
+              <a:rPr lang="en-US" sz="1000" dirty="0">
+                <a:solidFill>
+                  <a:srgbClr val="1E293B"/>
+                </a:solidFill>
+                <a:latin typeface="Arial" pitchFamily="34" charset="0"/>
+                <a:ea typeface="Arial" pitchFamily="34" charset="-122"/>
+                <a:cs typeface="Arial" pitchFamily="34" charset="-120"/>
+              </a:rPr>
+              <a:t>9+ 链下微服务 · Docker 编排生产就绪</a:t>
+            </a:r>
+            <a:endParaRPr lang="en-US" sz="1000" dirty="0"/>
+          </a:p>
+        </p:txBody>
+      </p:sp>
+      <p:sp>
+        <p:nvSpPr>
+          <p:cNvPr id="16" name="Shape 14"/>
+          <p:cNvSpPr/>
+          <p:nvPr/>
+        </p:nvSpPr>
+        <p:spPr>
+          <a:xfrm>
+            <a:off x="365760" y="3063240"/>
+            <a:ext cx="4023360" cy="1691640"/>
+          </a:xfrm>
+          <a:prstGeom prst="rect">
+            <a:avLst/>
+          </a:prstGeom>
+          <a:solidFill>
+            <a:srgbClr val="FFFFFF"/>
+          </a:solidFill>
+          <a:ln w="12700">
+            <a:solidFill>
+              <a:srgbClr val="E2E8F0"/>
+            </a:solidFill>
+            <a:prstDash val="solid"/>
+          </a:ln>
+          <a:effectLst>
+            <a:outerShdw sx="100000" sy="100000" kx="0" ky="0" algn="bl" rotWithShape="0" blurRad="50800" dist="25400" dir="8100000">
+              <a:srgbClr val="000000">
+                <a:alpha val="12000"/>
+              </a:srgbClr>
+            </a:outerShdw>
+          </a:effectLst>
+        </p:spPr>
+      </p:sp>
+      <p:sp>
+        <p:nvSpPr>
+          <p:cNvPr id="17" name="Shape 15"/>
+          <p:cNvSpPr/>
+          <p:nvPr/>
+        </p:nvSpPr>
+        <p:spPr>
+          <a:xfrm>
+            <a:off x="548640" y="3246120"/>
+            <a:ext cx="502920" cy="502920"/>
+          </a:xfrm>
+          <a:prstGeom prst="ellipse">
+            <a:avLst/>
+          </a:prstGeom>
+          <a:solidFill>
+            <a:srgbClr val="065A82"/>
+          </a:solidFill>
+          <a:ln/>
+        </p:spPr>
+      </p:sp>
+      <p:sp>
+        <p:nvSpPr>
+          <p:cNvPr id="18" name="Text 16"/>
+          <p:cNvSpPr/>
+          <p:nvPr/>
+        </p:nvSpPr>
+        <p:spPr>
+          <a:xfrm>
+            <a:off x="548640" y="3246120"/>
+            <a:ext cx="502920" cy="502920"/>
+          </a:xfrm>
+          <a:prstGeom prst="rect">
+            <a:avLst/>
+          </a:prstGeom>
+          <a:noFill/>
+          <a:ln/>
+        </p:spPr>
+        <p:txBody>
+          <a:bodyPr wrap="square" lIns="0" tIns="0" rIns="0" bIns="0" rtlCol="0" anchor="ctr"/>
+          <a:lstStyle/>
+          <a:p>
+            <a:pPr algn="ctr" indent="0" marL="0">
+              <a:buNone/>
+            </a:pPr>
+            <a:r>
+              <a:rPr lang="en-US" sz="1600" dirty="0">
+                <a:solidFill>
+                  <a:srgbClr val="000000"/>
+                </a:solidFill>
+              </a:rPr>
+              <a:t>🚀</a:t>
+            </a:r>
+            <a:endParaRPr lang="en-US" sz="1600" dirty="0"/>
+          </a:p>
+        </p:txBody>
+      </p:sp>
+      <p:sp>
+        <p:nvSpPr>
+          <p:cNvPr id="19" name="Text 17"/>
+          <p:cNvSpPr/>
+          <p:nvPr/>
+        </p:nvSpPr>
+        <p:spPr>
+          <a:xfrm>
+            <a:off x="1143000" y="3227832"/>
+            <a:ext cx="3108960" cy="365760"/>
+          </a:xfrm>
+          <a:prstGeom prst="rect">
+            <a:avLst/>
+          </a:prstGeom>
+          <a:noFill/>
+          <a:ln/>
+        </p:spPr>
+        <p:txBody>
+          <a:bodyPr wrap="square" lIns="0" tIns="0" rIns="0" bIns="0" rtlCol="0" anchor="ctr"/>
+          <a:lstStyle/>
+          <a:p>
+            <a:pPr indent="0" marL="0">
+              <a:buNone/>
+            </a:pPr>
+            <a:r>
+              <a:rPr lang="en-US" sz="1400" b="1" dirty="0">
+                <a:solidFill>
+                  <a:srgbClr val="065A82"/>
+                </a:solidFill>
+                <a:latin typeface="Arial" pitchFamily="34" charset="0"/>
+                <a:ea typeface="Arial" pitchFamily="34" charset="-122"/>
+                <a:cs typeface="Arial" pitchFamily="34" charset="-120"/>
+              </a:rPr>
+              <a:t>近期展望</a:t>
+            </a:r>
+            <a:endParaRPr lang="en-US" sz="1400" dirty="0"/>
+          </a:p>
+        </p:txBody>
+      </p:sp>
+      <p:sp>
+        <p:nvSpPr>
+          <p:cNvPr id="20" name="Text 18"/>
+          <p:cNvSpPr/>
+          <p:nvPr/>
+        </p:nvSpPr>
+        <p:spPr>
+          <a:xfrm>
+            <a:off x="548640" y="3749040"/>
+            <a:ext cx="3657600" cy="914400"/>
+          </a:xfrm>
+          <a:prstGeom prst="rect">
+            <a:avLst/>
+          </a:prstGeom>
+          <a:noFill/>
+          <a:ln/>
+        </p:spPr>
+        <p:txBody>
+          <a:bodyPr wrap="square" rtlCol="0" anchor="t"/>
+          <a:lstStyle/>
+          <a:p>
+            <a:pPr marL="342900" indent="-342900">
+              <a:buSzPct val="100000"/>
+              <a:buChar char="•"/>
+            </a:pPr>
+            <a:r>
+              <a:rPr lang="en-US" sz="1000" dirty="0">
+                <a:solidFill>
+                  <a:srgbClr val="1E293B"/>
+                </a:solidFill>
+                <a:latin typeface="Arial" pitchFamily="34" charset="0"/>
+                <a:ea typeface="Arial" pitchFamily="34" charset="-122"/>
+                <a:cs typeface="Arial" pitchFamily="34" charset="-120"/>
+              </a:rPr>
+              <a:t>Phase 3：Variance Swap · Slash 治理 · ZK 冷路径完善</a:t>
+            </a:r>
+            <a:endParaRPr lang="en-US" sz="1000" dirty="0"/>
+          </a:p>
+          <a:p>
+            <a:pPr marL="342900" indent="-342900">
+              <a:buSzPct val="100000"/>
+              <a:buChar char="•"/>
+            </a:pPr>
+            <a:r>
+              <a:rPr lang="en-US" sz="1000" dirty="0">
+                <a:solidFill>
+                  <a:srgbClr val="1E293B"/>
+                </a:solidFill>
+                <a:latin typeface="Arial" pitchFamily="34" charset="0"/>
+                <a:ea typeface="Arial" pitchFamily="34" charset="-122"/>
+                <a:cs typeface="Arial" pitchFamily="34" charset="-120"/>
+              </a:rPr>
+              <a:t>Beta 分布 · 独立双池联合概率 · 更多垂直 PDF 市场</a:t>
+            </a:r>
+            <a:endParaRPr lang="en-US" sz="1000" dirty="0"/>
+          </a:p>
+          <a:p>
+            <a:pPr marL="342900" indent="-342900">
+              <a:buSzPct val="100000"/>
+              <a:buChar char="•"/>
+            </a:pPr>
+            <a:r>
+              <a:rPr lang="en-US" sz="1000" dirty="0">
+                <a:solidFill>
+                  <a:srgbClr val="1E293B"/>
+                </a:solidFill>
+                <a:latin typeface="Arial" pitchFamily="34" charset="0"/>
+                <a:ea typeface="Arial" pitchFamily="34" charset="-122"/>
+                <a:cs typeface="Arial" pitchFamily="34" charset="-120"/>
+              </a:rPr>
+              <a:t>Attestation + Brevis Prover：mock → live 监督线</a:t>
+            </a:r>
+            <a:endParaRPr lang="en-US" sz="1000" dirty="0"/>
+          </a:p>
+          <a:p>
+            <a:pPr marL="342900" indent="-342900">
+              <a:buSzPct val="100000"/>
+              <a:buChar char="•"/>
+            </a:pPr>
+            <a:r>
+              <a:rPr lang="en-US" sz="1000" dirty="0">
+                <a:solidFill>
+                  <a:srgbClr val="1E293B"/>
+                </a:solidFill>
+                <a:latin typeface="Arial" pitchFamily="34" charset="0"/>
+                <a:ea typeface="Arial" pitchFamily="34" charset="-122"/>
+                <a:cs typeface="Arial" pitchFamily="34" charset="-120"/>
+              </a:rPr>
+              <a:t>外部审计 → Mainnet · Circle USDC · GeoBlock（前端合规）</a:t>
+            </a:r>
+            <a:endParaRPr lang="en-US" sz="1000" dirty="0"/>
+          </a:p>
+        </p:txBody>
+      </p:sp>
+      <p:sp>
+        <p:nvSpPr>
+          <p:cNvPr id="21" name="Shape 19"/>
+          <p:cNvSpPr/>
+          <p:nvPr/>
+        </p:nvSpPr>
+        <p:spPr>
+          <a:xfrm>
+            <a:off x="4754880" y="3063240"/>
+            <a:ext cx="4023360" cy="1691640"/>
+          </a:xfrm>
+          <a:prstGeom prst="rect">
+            <a:avLst/>
+          </a:prstGeom>
+          <a:solidFill>
+            <a:srgbClr val="FFFFFF"/>
+          </a:solidFill>
+          <a:ln w="12700">
+            <a:solidFill>
+              <a:srgbClr val="E2E8F0"/>
+            </a:solidFill>
+            <a:prstDash val="solid"/>
+          </a:ln>
+          <a:effectLst>
+            <a:outerShdw sx="100000" sy="100000" kx="0" ky="0" algn="bl" rotWithShape="0" blurRad="50800" dist="25400" dir="8100000">
+              <a:srgbClr val="000000">
+                <a:alpha val="12000"/>
+              </a:srgbClr>
+            </a:outerShdw>
+          </a:effectLst>
+        </p:spPr>
+      </p:sp>
+      <p:sp>
+        <p:nvSpPr>
+          <p:cNvPr id="22" name="Shape 20"/>
+          <p:cNvSpPr/>
+          <p:nvPr/>
+        </p:nvSpPr>
+        <p:spPr>
+          <a:xfrm>
+            <a:off x="4937760" y="3246120"/>
+            <a:ext cx="502920" cy="502920"/>
+          </a:xfrm>
+          <a:prstGeom prst="ellipse">
+            <a:avLst/>
+          </a:prstGeom>
+          <a:solidFill>
+            <a:srgbClr val="21295C"/>
+          </a:solidFill>
+          <a:ln/>
+        </p:spPr>
+      </p:sp>
+      <p:sp>
+        <p:nvSpPr>
+          <p:cNvPr id="23" name="Text 21"/>
+          <p:cNvSpPr/>
+          <p:nvPr/>
+        </p:nvSpPr>
+        <p:spPr>
+          <a:xfrm>
+            <a:off x="4937760" y="3246120"/>
+            <a:ext cx="502920" cy="502920"/>
+          </a:xfrm>
+          <a:prstGeom prst="rect">
+            <a:avLst/>
+          </a:prstGeom>
+          <a:noFill/>
+          <a:ln/>
+        </p:spPr>
+        <p:txBody>
+          <a:bodyPr wrap="square" lIns="0" tIns="0" rIns="0" bIns="0" rtlCol="0" anchor="ctr"/>
+          <a:lstStyle/>
+          <a:p>
+            <a:pPr algn="ctr" indent="0" marL="0">
+              <a:buNone/>
+            </a:pPr>
+            <a:r>
+              <a:rPr lang="en-US" sz="1600" dirty="0">
+                <a:solidFill>
+                  <a:srgbClr val="000000"/>
+                </a:solidFill>
+              </a:rPr>
+              <a:t>🎯</a:t>
+            </a:r>
+            <a:endParaRPr lang="en-US" sz="1600" dirty="0"/>
+          </a:p>
+        </p:txBody>
+      </p:sp>
+      <p:sp>
+        <p:nvSpPr>
+          <p:cNvPr id="24" name="Text 22"/>
+          <p:cNvSpPr/>
+          <p:nvPr/>
+        </p:nvSpPr>
+        <p:spPr>
+          <a:xfrm>
+            <a:off x="5532120" y="3227832"/>
+            <a:ext cx="3108960" cy="365760"/>
+          </a:xfrm>
+          <a:prstGeom prst="rect">
+            <a:avLst/>
+          </a:prstGeom>
+          <a:noFill/>
+          <a:ln/>
+        </p:spPr>
+        <p:txBody>
+          <a:bodyPr wrap="square" lIns="0" tIns="0" rIns="0" bIns="0" rtlCol="0" anchor="ctr"/>
+          <a:lstStyle/>
+          <a:p>
+            <a:pPr indent="0" marL="0">
+              <a:buNone/>
+            </a:pPr>
+            <a:r>
+              <a:rPr lang="en-US" sz="1400" b="1" dirty="0">
+                <a:solidFill>
+                  <a:srgbClr val="065A82"/>
+                </a:solidFill>
+                <a:latin typeface="Arial" pitchFamily="34" charset="0"/>
+                <a:ea typeface="Arial" pitchFamily="34" charset="-122"/>
+                <a:cs typeface="Arial" pitchFamily="34" charset="-120"/>
+              </a:rPr>
+              <a:t>长期愿景</a:t>
+            </a:r>
+            <a:endParaRPr lang="en-US" sz="1400" dirty="0"/>
+          </a:p>
+        </p:txBody>
+      </p:sp>
+      <p:sp>
+        <p:nvSpPr>
+          <p:cNvPr id="25" name="Text 23"/>
+          <p:cNvSpPr/>
+          <p:nvPr/>
+        </p:nvSpPr>
+        <p:spPr>
+          <a:xfrm>
+            <a:off x="4937760" y="3749040"/>
+            <a:ext cx="3657600" cy="914400"/>
+          </a:xfrm>
+          <a:prstGeom prst="rect">
+            <a:avLst/>
+          </a:prstGeom>
+          <a:noFill/>
+          <a:ln/>
+        </p:spPr>
+        <p:txBody>
+          <a:bodyPr wrap="square" rtlCol="0" anchor="t"/>
+          <a:lstStyle/>
+          <a:p>
+            <a:pPr marL="342900" indent="-342900">
+              <a:buSzPct val="100000"/>
+              <a:buChar char="•"/>
+            </a:pPr>
+            <a:r>
+              <a:rPr lang="en-US" sz="1000" dirty="0">
+                <a:solidFill>
+                  <a:srgbClr val="1E293B"/>
+                </a:solidFill>
+                <a:latin typeface="Arial" pitchFamily="34" charset="0"/>
+                <a:ea typeface="Arial" pitchFamily="34" charset="-122"/>
+                <a:cs typeface="Arial" pitchFamily="34" charset="-120"/>
+              </a:rPr>
+              <a:t>成为 Sui 链上「概率衍生品 + 知识付费」基础设施层</a:t>
+            </a:r>
+            <a:endParaRPr lang="en-US" sz="1000" dirty="0"/>
+          </a:p>
+          <a:p>
+            <a:pPr marL="342900" indent="-342900">
+              <a:buSzPct val="100000"/>
+              <a:buChar char="•"/>
+            </a:pPr>
+            <a:r>
+              <a:rPr lang="en-US" sz="1000" dirty="0">
+                <a:solidFill>
+                  <a:srgbClr val="1E293B"/>
+                </a:solidFill>
+                <a:latin typeface="Arial" pitchFamily="34" charset="0"/>
+                <a:ea typeface="Arial" pitchFamily="34" charset="-122"/>
+                <a:cs typeface="Arial" pitchFamily="34" charset="-120"/>
+              </a:rPr>
+              <a:t>服务零售交易者、LP、预言家与量化机构四类参与者</a:t>
+            </a:r>
+            <a:endParaRPr lang="en-US" sz="1000" dirty="0"/>
+          </a:p>
+          <a:p>
+            <a:pPr marL="342900" indent="-342900">
+              <a:buSzPct val="100000"/>
+              <a:buChar char="•"/>
+            </a:pPr>
+            <a:r>
+              <a:rPr lang="en-US" sz="1000" dirty="0">
+                <a:solidFill>
+                  <a:srgbClr val="1E293B"/>
+                </a:solidFill>
+                <a:latin typeface="Arial" pitchFamily="34" charset="0"/>
+                <a:ea typeface="Arial" pitchFamily="34" charset="-122"/>
+                <a:cs typeface="Arial" pitchFamily="34" charset="-120"/>
+              </a:rPr>
+              <a:t>EventRoot 全量迁移 · SDK / Quant API 开放</a:t>
+            </a:r>
+            <a:endParaRPr lang="en-US" sz="1000" dirty="0"/>
+          </a:p>
+          <a:p>
+            <a:pPr marL="342900" indent="-342900">
+              <a:buSzPct val="100000"/>
+              <a:buChar char="•"/>
+            </a:pPr>
+            <a:r>
+              <a:rPr lang="en-US" sz="1000" dirty="0">
+                <a:solidFill>
+                  <a:srgbClr val="1E293B"/>
+                </a:solidFill>
+                <a:latin typeface="Arial" pitchFamily="34" charset="0"/>
+                <a:ea typeface="Arial" pitchFamily="34" charset="-122"/>
+                <a:cs typeface="Arial" pitchFamily="34" charset="-120"/>
+              </a:rPr>
+              <a:t>以链上 PDF 定价取代碎片化 Yes/No · 以强制审计取代虚假带单</a:t>
+            </a:r>
+            <a:endParaRPr lang="en-US" sz="1000" dirty="0"/>
+          </a:p>
+        </p:txBody>
+      </p:sp>
+    </p:spTree>
+  </p:cSld>
+  <p:clrMapOvr>
+    <a:masterClrMapping/>
+  </p:clrMapOvr>
+</p:sld>
+</file>
+
 <file path=ppt/slides/slide2.xml><?xml version="1.0" encoding="utf-8"?>
 <p:sld xmlns:a="http://schemas.openxmlformats.org/drawingml/2006/main" xmlns:r="http://schemas.openxmlformats.org/officeDocument/2006/relationships" xmlns:p="http://schemas.openxmlformats.org/presentationml/2006/main">
   <p:cSld name="Slide 2">

--- a/docs/presentations/X-Market-Sui-Overview.zh.pptx
+++ b/docs/presentations/X-Market-Sui-Overview.zh.pptx
@@ -3072,7 +3072,7 @@
                 <a:ea typeface="Arial" pitchFamily="34" charset="-122"/>
                 <a:cs typeface="Arial" pitchFamily="34" charset="-120"/>
               </a:rPr>
-              <a:t>降低用户认知门槛，专注交易本身</a:t>
+              <a:t>链上提交由钱包自付 SUI Gas</a:t>
             </a:r>
             <a:endParaRPr lang="en-US" sz="1000" dirty="0"/>
           </a:p>
@@ -4900,7 +4900,7 @@
                 <a:ea typeface="Arial" pitchFamily="34" charset="-122"/>
                 <a:cs typeface="Arial" pitchFamily="34" charset="-120"/>
               </a:rPr>
-              <a:t>9+</a:t>
+              <a:t>8+</a:t>
             </a:r>
             <a:endParaRPr lang="en-US" sz="2800" dirty="0"/>
           </a:p>
@@ -11418,7 +11418,7 @@
                 <a:ea typeface="Arial" pitchFamily="34" charset="-122"/>
                 <a:cs typeface="Arial" pitchFamily="34" charset="-120"/>
               </a:rPr>
-              <a:t>9+ 链下微服务 · Docker 编排生产就绪</a:t>
+              <a:t>8+ 链下微服务 · Docker 编排生产就绪</a:t>
             </a:r>
             <a:endParaRPr lang="en-US" sz="1000" dirty="0"/>
           </a:p>

--- a/docs/presentations/X-Market-Sui-Overview.zh.pptx
+++ b/docs/presentations/X-Market-Sui-Overview.zh.pptx
@@ -6,7 +6,6 @@
   </p:sldMasterIdLst>
   <p:sldIdLst>
     <p:sldId id="256" r:id="rId2"/>
-    <p:sldId id="272" r:id="rId23"/>
     <p:sldId id="257" r:id="rId3"/>
     <p:sldId id="258" r:id="rId4"/>
     <p:sldId id="259" r:id="rId5"/>
@@ -21,7 +20,6 @@
     <p:sldId id="268" r:id="rId14"/>
     <p:sldId id="269" r:id="rId15"/>
     <p:sldId id="270" r:id="rId16"/>
-    <p:sldId id="273" r:id="rId24"/>
     <p:sldId id="271" r:id="rId17"/>
   </p:sldIdLst>
   <p:notesMasterIdLst>
@@ -1175,321 +1173,6 @@
     <a:masterClrMapping/>
   </p:clrMapOvr>
 </p:notes>
-</file>
-
-<file path=ppt/notesSlides/notesSlide18.xml><?xml version="1.0" encoding="utf-8"?>
-<p:notes xmlns:a="http://schemas.openxmlformats.org/drawingml/2006/main" xmlns:r="http://schemas.openxmlformats.org/officeDocument/2006/relationships" xmlns:p="http://schemas.openxmlformats.org/presentationml/2006/main">
-  
-  
-  <p:cSld>
-    
-    
-    <p:spTree>
-      
-      
-      <p:nvGrpSpPr>
-        
-        
-        <p:cNvPr id="1" name=""/>
-        
-        
-        <p:cNvGrpSpPr/>
-        
-        
-        <p:nvPr/>
-        
-      
-      </p:nvGrpSpPr>
-      
-      
-      <p:grpSpPr>
-        
-        
-        <a:xfrm>
-          
-          
-          <a:off x="0" y="0"/>
-          
-          
-          <a:ext cx="0" cy="0"/>
-          
-          
-          <a:chOff x="0" y="0"/>
-          
-          
-          <a:chExt cx="0" cy="0"/>
-          
-        
-        </a:xfrm>
-        
-      
-      </p:grpSpPr>
-      
-      
-      <p:sp>
-        
-        
-        <p:nvSpPr>
-          
-          
-          <p:cNvPr id="2" name="Slide Image Placeholder 1"/>
-          
-          
-          <p:cNvSpPr>
-            
-            
-            <a:spLocks noGrp="1" noRot="1" noChangeAspect="1"/>
-            
-          
-          </p:cNvSpPr>
-          
-          
-          <p:nvPr>
-            
-            
-            <p:ph type="sldImg"/>
-            
-          
-          </p:nvPr>
-          
-        
-        </p:nvSpPr>
-        
-        
-        <p:spPr/>
-        
-      
-      </p:sp>
-      
-      
-      <p:sp>
-        
-        
-        <p:nvSpPr>
-          
-          
-          <p:cNvPr id="3" name="Notes Placeholder 2"/>
-          
-          
-          <p:cNvSpPr>
-            
-            
-            <a:spLocks noGrp="1"/>
-            
-          
-          </p:cNvSpPr>
-          
-          
-          <p:nvPr>
-            
-            
-            <p:ph type="body" idx="1"/>
-            
-          
-          </p:nvPr>
-          
-        
-        </p:nvSpPr>
-        
-        
-        <p:spPr/>
-        
-        
-        <p:txBody>
-          
-          
-          <a:bodyPr/>
-          
-          
-          <a:lstStyle/>
-          
-          
-          <a:p>
-            <a:r>
-              <a:rPr lang="zh-CN" dirty="0"/>
-              <a:t>口播稿（约 75 秒）</a:t>
-            </a:r>
-            <a:endParaRPr lang="zh-CN" dirty="0"/>
-          </a:p>
-          <a:p>
-            <a:r>
-              <a:rPr lang="zh-CN" dirty="0"/>
-              <a:t></a:t>
-            </a:r>
-            <a:endParaRPr lang="zh-CN" dirty="0"/>
-          </a:p>
-          <a:p>
-            <a:r>
-              <a:rPr lang="zh-CN" dirty="0"/>
-              <a:t>走完整套架构之后，我们用「结论与展望」来收束。</a:t>
-            </a:r>
-            <a:endParaRPr lang="zh-CN" dirty="0"/>
-          </a:p>
-          <a:p>
-            <a:r>
-              <a:rPr lang="zh-CN" dirty="0"/>
-              <a:t></a:t>
-            </a:r>
-            <a:endParaRPr lang="zh-CN" dirty="0"/>
-          </a:p>
-          <a:p>
-            <a:r>
-              <a:rPr lang="zh-CN" dirty="0"/>
-              <a:t>结论上，X-Market 要回答的不是「再做一个预测市场」，而是把预测从 Yes/No 博彩升级为 PDF 概率衍生品。博弈模块与 SuiProphet 共用 EventRoot 和统一 Oracle，同一事件的下注、解锁和结算指向同一个真相源。链上 PDF 定价加上 Seal 强制审计，让交易者、LP、预言家和协议四方都能在一个可持续的生态里获利。Testnet v2 已经全栈跑通——这不是概念，是已验证的产品。</a:t>
-            </a:r>
-            <a:endParaRPr lang="zh-CN" dirty="0"/>
-          </a:p>
-          <a:p>
-            <a:r>
-              <a:rPr lang="zh-CN" dirty="0"/>
-              <a:t></a:t>
-            </a:r>
-            <a:endParaRPr lang="zh-CN" dirty="0"/>
-          </a:p>
-          <a:p>
-            <a:r>
-              <a:rPr lang="zh-CN" dirty="0"/>
-              <a:t>展望上，短期我们聚焦 Phase 3 收尾：Variance Swap、Slash 治理，以及 ZK Attestation 冷路径从 mock 走向 live 监督线——Brevis Prover 登记 proof_hash，3600 秒挑战窗口，不阻塞 buy_* 热路径。PDF 侧，Beta 分布覆盖得票率、独立双池联合概率、更多垂直市场并行扩展。外部审计通过后推进 Mainnet；Circle USDC 主网结算同步落地。GeoBlock 只是前端按 IP 限制 Web 访问的合规配套，不替代 KYC，也不阻止直接链上交互。</a:t>
-            </a:r>
-            <a:endParaRPr lang="zh-CN" dirty="0"/>
-          </a:p>
-          <a:p>
-            <a:r>
-              <a:rPr lang="zh-CN" dirty="0"/>
-              <a:t></a:t>
-            </a:r>
-            <a:endParaRPr lang="zh-CN" dirty="0"/>
-          </a:p>
-          <a:p>
-            <a:r>
-              <a:rPr lang="zh-CN" dirty="0"/>
-              <a:t>长期，我们要成为 Sui 链上概率分布衍生品与链上知识付费的基础设施层，服务零售、LP、专业预言家和量化机构；EventRoot 全量迁移，SDK 和 Quant API 对外开放。用链上 PDF 取代碎片化 Yes/No，用强制审计取代虚假带单——这就是我们看到的终局。</a:t>
-            </a:r>
-            <a:endParaRPr lang="zh-CN" dirty="0"/>
-          </a:p>
-          <a:p>
-            <a:r>
-              <a:rPr lang="zh-CN" dirty="0"/>
-              <a:t></a:t>
-            </a:r>
-            <a:endParaRPr lang="zh-CN" dirty="0"/>
-          </a:p>
-          <a:p>
-            <a:r>
-              <a:rPr lang="zh-CN" dirty="0"/>
-              <a:t>转场：翻到「谢谢」页，开放 Q&A。</a:t>
-            </a:r>
-            <a:endParaRPr lang="zh-CN" dirty="0"/>
-          </a:p>
-          
-        
-        </p:txBody>
-        
-      
-      </p:sp>
-      
-      
-      <p:sp>
-        
-        
-        <p:nvSpPr>
-          
-          
-          <p:cNvPr id="4" name="Slide Number Placeholder 3"/>
-          
-          
-          <p:cNvSpPr>
-            
-            
-            <a:spLocks noGrp="1"/>
-            
-          
-          </p:cNvSpPr>
-          
-          
-          <p:nvPr>
-            
-            
-            <p:ph type="sldNum" sz="quarter" idx="10"/>
-            
-          
-          </p:nvPr>
-          
-        
-        </p:nvSpPr>
-        
-        
-        <p:spPr/>
-        
-        
-        <p:txBody>
-          
-          
-          <a:bodyPr/>
-          
-          
-          <a:lstStyle/>
-          
-          
-          <a:p>
-            
-            
-            <a:fld id="{F7021451-1387-4CA6-816F-3879F97B5CBC}" type="slidenum">
-              
-              
-              <a:rPr lang="en-US"/>
-              
-              
-              <a:t>17</a:t>
-              
-            
-            </a:fld>
-            
-            
-            <a:endParaRPr lang="en-US"/>
-            
-          
-          </a:p>
-          
-        
-        </p:txBody>
-        
-      
-      </p:sp>
-      
-    
-    </p:spTree>
-    
-    
-    <p:extLst>
-      
-      
-      <p:ext uri="{BB962C8B-B14F-4D97-AF65-F5344CB8AC3E}">
-        
-        
-        <p14:creationId xmlns:p14="http://schemas.microsoft.com/office/powerpoint/2010/main" val="1024086991"/>
-        
-      
-      </p:ext>
-      
-    
-    </p:extLst>
-    
-  
-  </p:cSld>
-  
-  
-  <p:clrMapOvr>
-    
-    
-    <a:masterClrMapping/>
-    
-  
-  </p:clrMapOvr>
-  
-
-</p:notes>
-
 </file>
 
 <file path=ppt/notesSlides/notesSlide2.xml><?xml version="1.0" encoding="utf-8"?>
@@ -2883,8 +2566,8 @@
         </p:nvSpPr>
         <p:spPr>
           <a:xfrm>
-            <a:off x="365760" y="1188720"/>
-            <a:ext cx="4023360" cy="1691640"/>
+            <a:off x="365760" y="1078992"/>
+            <a:ext cx="4023360" cy="1940814"/>
           </a:xfrm>
           <a:prstGeom prst="rect">
             <a:avLst/>
@@ -2915,8 +2598,8 @@
         </p:nvSpPr>
         <p:spPr>
           <a:xfrm>
-            <a:off x="548640" y="1371600"/>
-            <a:ext cx="502920" cy="502920"/>
+            <a:off x="530352" y="1225296"/>
+            <a:ext cx="457200" cy="457200"/>
           </a:xfrm>
           <a:prstGeom prst="ellipse">
             <a:avLst/>
@@ -2935,8 +2618,8 @@
         </p:nvSpPr>
         <p:spPr>
           <a:xfrm>
-            <a:off x="548640" y="1371600"/>
-            <a:ext cx="502920" cy="502920"/>
+            <a:off x="530352" y="1225296"/>
+            <a:ext cx="457200" cy="457200"/>
           </a:xfrm>
           <a:prstGeom prst="rect">
             <a:avLst/>
@@ -2952,14 +2635,14 @@
               <a:buNone/>
             </a:pPr>
             <a:r>
-              <a:rPr lang="en-US" sz="1600" dirty="0">
+              <a:rPr lang="en-US" sz="1400" dirty="0">
                 <a:solidFill>
                   <a:srgbClr val="000000"/>
                 </a:solidFill>
               </a:rPr>
               <a:t>💵</a:t>
             </a:r>
-            <a:endParaRPr lang="en-US" sz="1600" dirty="0"/>
+            <a:endParaRPr lang="en-US" sz="1400" dirty="0"/>
           </a:p>
         </p:txBody>
       </p:sp>
@@ -2971,8 +2654,8 @@
         </p:nvSpPr>
         <p:spPr>
           <a:xfrm>
-            <a:off x="1143000" y="1353312"/>
-            <a:ext cx="3108960" cy="365760"/>
+            <a:off x="1078992" y="1188720"/>
+            <a:ext cx="3218688" cy="329184"/>
           </a:xfrm>
           <a:prstGeom prst="rect">
             <a:avLst/>
@@ -2981,7 +2664,7 @@
           <a:ln/>
         </p:spPr>
         <p:txBody>
-          <a:bodyPr wrap="square" lIns="0" tIns="0" rIns="0" bIns="0" rtlCol="0" anchor="ctr"/>
+          <a:bodyPr wrap="square" lIns="0" tIns="0" rIns="0" bIns="0" rtlCol="0" anchor="t"/>
           <a:lstStyle/>
           <a:p>
             <a:pPr indent="0" marL="0">
@@ -3010,8 +2693,8 @@
         </p:nvSpPr>
         <p:spPr>
           <a:xfrm>
-            <a:off x="548640" y="1874520"/>
-            <a:ext cx="3657600" cy="914400"/>
+            <a:off x="512064" y="1591056"/>
+            <a:ext cx="3767328" cy="1355598"/>
           </a:xfrm>
           <a:prstGeom prst="rect">
             <a:avLst/>
@@ -3020,7 +2703,7 @@
           <a:ln/>
         </p:spPr>
         <p:txBody>
-          <a:bodyPr wrap="square" rtlCol="0" anchor="t"/>
+          <a:bodyPr wrap="square" lIns="0" tIns="0" rIns="0" bIns="0" rtlCol="0" anchor="t"/>
           <a:lstStyle/>
           <a:p>
             <a:pPr marL="342900" indent="-342900">
@@ -3072,7 +2755,7 @@
                 <a:ea typeface="Arial" pitchFamily="34" charset="-122"/>
                 <a:cs typeface="Arial" pitchFamily="34" charset="-120"/>
               </a:rPr>
-              <a:t>链上提交由钱包自付 SUI Gas</a:t>
+              <a:t>降低用户认知门槛，专注交易本身</a:t>
             </a:r>
             <a:endParaRPr lang="en-US" sz="1000" dirty="0"/>
           </a:p>
@@ -3086,8 +2769,8 @@
         </p:nvSpPr>
         <p:spPr>
           <a:xfrm>
-            <a:off x="4754880" y="1188720"/>
-            <a:ext cx="4023360" cy="1691640"/>
+            <a:off x="4754880" y="1078992"/>
+            <a:ext cx="4023360" cy="1940814"/>
           </a:xfrm>
           <a:prstGeom prst="rect">
             <a:avLst/>
@@ -3118,8 +2801,8 @@
         </p:nvSpPr>
         <p:spPr>
           <a:xfrm>
-            <a:off x="4937760" y="1371600"/>
-            <a:ext cx="502920" cy="502920"/>
+            <a:off x="4919472" y="1225296"/>
+            <a:ext cx="457200" cy="457200"/>
           </a:xfrm>
           <a:prstGeom prst="ellipse">
             <a:avLst/>
@@ -3138,8 +2821,8 @@
         </p:nvSpPr>
         <p:spPr>
           <a:xfrm>
-            <a:off x="4937760" y="1371600"/>
-            <a:ext cx="502920" cy="502920"/>
+            <a:off x="4919472" y="1225296"/>
+            <a:ext cx="457200" cy="457200"/>
           </a:xfrm>
           <a:prstGeom prst="rect">
             <a:avLst/>
@@ -3155,14 +2838,14 @@
               <a:buNone/>
             </a:pPr>
             <a:r>
-              <a:rPr lang="en-US" sz="1600" dirty="0">
+              <a:rPr lang="en-US" sz="1400" dirty="0">
                 <a:solidFill>
                   <a:srgbClr val="000000"/>
                 </a:solidFill>
               </a:rPr>
               <a:t>📊</a:t>
             </a:r>
-            <a:endParaRPr lang="en-US" sz="1600" dirty="0"/>
+            <a:endParaRPr lang="en-US" sz="1400" dirty="0"/>
           </a:p>
         </p:txBody>
       </p:sp>
@@ -3174,8 +2857,8 @@
         </p:nvSpPr>
         <p:spPr>
           <a:xfrm>
-            <a:off x="5532120" y="1353312"/>
-            <a:ext cx="3108960" cy="365760"/>
+            <a:off x="5468112" y="1188720"/>
+            <a:ext cx="3218688" cy="329184"/>
           </a:xfrm>
           <a:prstGeom prst="rect">
             <a:avLst/>
@@ -3184,7 +2867,7 @@
           <a:ln/>
         </p:spPr>
         <p:txBody>
-          <a:bodyPr wrap="square" lIns="0" tIns="0" rIns="0" bIns="0" rtlCol="0" anchor="ctr"/>
+          <a:bodyPr wrap="square" lIns="0" tIns="0" rIns="0" bIns="0" rtlCol="0" anchor="t"/>
           <a:lstStyle/>
           <a:p>
             <a:pPr indent="0" marL="0">
@@ -3213,8 +2896,8 @@
         </p:nvSpPr>
         <p:spPr>
           <a:xfrm>
-            <a:off x="4937760" y="1874520"/>
-            <a:ext cx="3657600" cy="914400"/>
+            <a:off x="4901184" y="1591056"/>
+            <a:ext cx="3767328" cy="1355598"/>
           </a:xfrm>
           <a:prstGeom prst="rect">
             <a:avLst/>
@@ -3223,7 +2906,7 @@
           <a:ln/>
         </p:spPr>
         <p:txBody>
-          <a:bodyPr wrap="square" rtlCol="0" anchor="t"/>
+          <a:bodyPr wrap="square" lIns="0" tIns="0" rIns="0" bIns="0" rtlCol="0" anchor="t"/>
           <a:lstStyle/>
           <a:p>
             <a:pPr marL="342900" indent="-342900">
@@ -3289,8 +2972,8 @@
         </p:nvSpPr>
         <p:spPr>
           <a:xfrm>
-            <a:off x="365760" y="3063240"/>
-            <a:ext cx="4023360" cy="1691640"/>
+            <a:off x="365760" y="3092958"/>
+            <a:ext cx="4023360" cy="1940814"/>
           </a:xfrm>
           <a:prstGeom prst="rect">
             <a:avLst/>
@@ -3321,8 +3004,8 @@
         </p:nvSpPr>
         <p:spPr>
           <a:xfrm>
-            <a:off x="548640" y="3246120"/>
-            <a:ext cx="502920" cy="502920"/>
+            <a:off x="530352" y="3239262"/>
+            <a:ext cx="457200" cy="457200"/>
           </a:xfrm>
           <a:prstGeom prst="ellipse">
             <a:avLst/>
@@ -3341,8 +3024,8 @@
         </p:nvSpPr>
         <p:spPr>
           <a:xfrm>
-            <a:off x="548640" y="3246120"/>
-            <a:ext cx="502920" cy="502920"/>
+            <a:off x="530352" y="3239262"/>
+            <a:ext cx="457200" cy="457200"/>
           </a:xfrm>
           <a:prstGeom prst="rect">
             <a:avLst/>
@@ -3358,14 +3041,14 @@
               <a:buNone/>
             </a:pPr>
             <a:r>
-              <a:rPr lang="en-US" sz="1600" dirty="0">
+              <a:rPr lang="en-US" sz="1400" dirty="0">
                 <a:solidFill>
                   <a:srgbClr val="000000"/>
                 </a:solidFill>
               </a:rPr>
               <a:t>🌐</a:t>
             </a:r>
-            <a:endParaRPr lang="en-US" sz="1600" dirty="0"/>
+            <a:endParaRPr lang="en-US" sz="1400" dirty="0"/>
           </a:p>
         </p:txBody>
       </p:sp>
@@ -3377,8 +3060,8 @@
         </p:nvSpPr>
         <p:spPr>
           <a:xfrm>
-            <a:off x="1143000" y="3227832"/>
-            <a:ext cx="3108960" cy="365760"/>
+            <a:off x="1078992" y="3202686"/>
+            <a:ext cx="3218688" cy="329184"/>
           </a:xfrm>
           <a:prstGeom prst="rect">
             <a:avLst/>
@@ -3387,7 +3070,7 @@
           <a:ln/>
         </p:spPr>
         <p:txBody>
-          <a:bodyPr wrap="square" lIns="0" tIns="0" rIns="0" bIns="0" rtlCol="0" anchor="ctr"/>
+          <a:bodyPr wrap="square" lIns="0" tIns="0" rIns="0" bIns="0" rtlCol="0" anchor="t"/>
           <a:lstStyle/>
           <a:p>
             <a:pPr indent="0" marL="0">
@@ -3416,8 +3099,8 @@
         </p:nvSpPr>
         <p:spPr>
           <a:xfrm>
-            <a:off x="548640" y="3749040"/>
-            <a:ext cx="3657600" cy="914400"/>
+            <a:off x="512064" y="3605022"/>
+            <a:ext cx="3767328" cy="1355598"/>
           </a:xfrm>
           <a:prstGeom prst="rect">
             <a:avLst/>
@@ -3426,7 +3109,7 @@
           <a:ln/>
         </p:spPr>
         <p:txBody>
-          <a:bodyPr wrap="square" rtlCol="0" anchor="t"/>
+          <a:bodyPr wrap="square" lIns="0" tIns="0" rIns="0" bIns="0" rtlCol="0" anchor="t"/>
           <a:lstStyle/>
           <a:p>
             <a:pPr marL="342900" indent="-342900">
@@ -3492,8 +3175,8 @@
         </p:nvSpPr>
         <p:spPr>
           <a:xfrm>
-            <a:off x="4754880" y="3063240"/>
-            <a:ext cx="4023360" cy="1691640"/>
+            <a:off x="4754880" y="3092958"/>
+            <a:ext cx="4023360" cy="1940814"/>
           </a:xfrm>
           <a:prstGeom prst="rect">
             <a:avLst/>
@@ -3524,8 +3207,8 @@
         </p:nvSpPr>
         <p:spPr>
           <a:xfrm>
-            <a:off x="4937760" y="3246120"/>
-            <a:ext cx="502920" cy="502920"/>
+            <a:off x="4919472" y="3239262"/>
+            <a:ext cx="457200" cy="457200"/>
           </a:xfrm>
           <a:prstGeom prst="ellipse">
             <a:avLst/>
@@ -3544,8 +3227,8 @@
         </p:nvSpPr>
         <p:spPr>
           <a:xfrm>
-            <a:off x="4937760" y="3246120"/>
-            <a:ext cx="502920" cy="502920"/>
+            <a:off x="4919472" y="3239262"/>
+            <a:ext cx="457200" cy="457200"/>
           </a:xfrm>
           <a:prstGeom prst="rect">
             <a:avLst/>
@@ -3561,14 +3244,14 @@
               <a:buNone/>
             </a:pPr>
             <a:r>
-              <a:rPr lang="en-US" sz="1600" dirty="0">
+              <a:rPr lang="en-US" sz="1400" dirty="0">
                 <a:solidFill>
                   <a:srgbClr val="000000"/>
                 </a:solidFill>
               </a:rPr>
               <a:t>📖</a:t>
             </a:r>
-            <a:endParaRPr lang="en-US" sz="1600" dirty="0"/>
+            <a:endParaRPr lang="en-US" sz="1400" dirty="0"/>
           </a:p>
         </p:txBody>
       </p:sp>
@@ -3580,8 +3263,8 @@
         </p:nvSpPr>
         <p:spPr>
           <a:xfrm>
-            <a:off x="5532120" y="3227832"/>
-            <a:ext cx="3108960" cy="365760"/>
+            <a:off x="5468112" y="3202686"/>
+            <a:ext cx="3218688" cy="329184"/>
           </a:xfrm>
           <a:prstGeom prst="rect">
             <a:avLst/>
@@ -3590,7 +3273,7 @@
           <a:ln/>
         </p:spPr>
         <p:txBody>
-          <a:bodyPr wrap="square" lIns="0" tIns="0" rIns="0" bIns="0" rtlCol="0" anchor="ctr"/>
+          <a:bodyPr wrap="square" lIns="0" tIns="0" rIns="0" bIns="0" rtlCol="0" anchor="t"/>
           <a:lstStyle/>
           <a:p>
             <a:pPr indent="0" marL="0">
@@ -3619,8 +3302,8 @@
         </p:nvSpPr>
         <p:spPr>
           <a:xfrm>
-            <a:off x="4937760" y="3749040"/>
-            <a:ext cx="3657600" cy="914400"/>
+            <a:off x="4901184" y="3605022"/>
+            <a:ext cx="3767328" cy="1355598"/>
           </a:xfrm>
           <a:prstGeom prst="rect">
             <a:avLst/>
@@ -3629,7 +3312,7 @@
           <a:ln/>
         </p:spPr>
         <p:txBody>
-          <a:bodyPr wrap="square" rtlCol="0" anchor="t"/>
+          <a:bodyPr wrap="square" lIns="0" tIns="0" rIns="0" bIns="0" rtlCol="0" anchor="t"/>
           <a:lstStyle/>
           <a:p>
             <a:pPr marL="342900" indent="-342900">
@@ -4900,7 +4583,7 @@
                 <a:ea typeface="Arial" pitchFamily="34" charset="-122"/>
                 <a:cs typeface="Arial" pitchFamily="34" charset="-120"/>
               </a:rPr>
-              <a:t>8+</a:t>
+              <a:t>9+</a:t>
             </a:r>
             <a:endParaRPr lang="en-US" sz="2800" dirty="0"/>
           </a:p>
@@ -6335,8 +6018,8 @@
         </p:nvSpPr>
         <p:spPr>
           <a:xfrm>
-            <a:off x="365760" y="1188720"/>
-            <a:ext cx="4023360" cy="1691640"/>
+            <a:off x="365760" y="1078992"/>
+            <a:ext cx="4023360" cy="1940814"/>
           </a:xfrm>
           <a:prstGeom prst="rect">
             <a:avLst/>
@@ -6367,8 +6050,8 @@
         </p:nvSpPr>
         <p:spPr>
           <a:xfrm>
-            <a:off x="548640" y="1371600"/>
-            <a:ext cx="502920" cy="502920"/>
+            <a:off x="530352" y="1225296"/>
+            <a:ext cx="457200" cy="457200"/>
           </a:xfrm>
           <a:prstGeom prst="ellipse">
             <a:avLst/>
@@ -6387,8 +6070,8 @@
         </p:nvSpPr>
         <p:spPr>
           <a:xfrm>
-            <a:off x="548640" y="1371600"/>
-            <a:ext cx="502920" cy="502920"/>
+            <a:off x="530352" y="1225296"/>
+            <a:ext cx="457200" cy="457200"/>
           </a:xfrm>
           <a:prstGeom prst="rect">
             <a:avLst/>
@@ -6404,14 +6087,14 @@
               <a:buNone/>
             </a:pPr>
             <a:r>
-              <a:rPr lang="en-US" sz="1600" dirty="0">
+              <a:rPr lang="en-US" sz="1400" dirty="0">
                 <a:solidFill>
                   <a:srgbClr val="000000"/>
                 </a:solidFill>
               </a:rPr>
               <a:t>📈</a:t>
             </a:r>
-            <a:endParaRPr lang="en-US" sz="1600" dirty="0"/>
+            <a:endParaRPr lang="en-US" sz="1400" dirty="0"/>
           </a:p>
         </p:txBody>
       </p:sp>
@@ -6423,8 +6106,8 @@
         </p:nvSpPr>
         <p:spPr>
           <a:xfrm>
-            <a:off x="1143000" y="1353312"/>
-            <a:ext cx="3108960" cy="365760"/>
+            <a:off x="1078992" y="1188720"/>
+            <a:ext cx="3218688" cy="329184"/>
           </a:xfrm>
           <a:prstGeom prst="rect">
             <a:avLst/>
@@ -6433,7 +6116,7 @@
           <a:ln/>
         </p:spPr>
         <p:txBody>
-          <a:bodyPr wrap="square" lIns="0" tIns="0" rIns="0" bIns="0" rtlCol="0" anchor="ctr"/>
+          <a:bodyPr wrap="square" lIns="0" tIns="0" rIns="0" bIns="0" rtlCol="0" anchor="t"/>
           <a:lstStyle/>
           <a:p>
             <a:pPr indent="0" marL="0">
@@ -6462,8 +6145,8 @@
         </p:nvSpPr>
         <p:spPr>
           <a:xfrm>
-            <a:off x="548640" y="1874520"/>
-            <a:ext cx="3657600" cy="914400"/>
+            <a:off x="512064" y="1591056"/>
+            <a:ext cx="3767328" cy="1355598"/>
           </a:xfrm>
           <a:prstGeom prst="rect">
             <a:avLst/>
@@ -6472,7 +6155,7 @@
           <a:ln/>
         </p:spPr>
         <p:txBody>
-          <a:bodyPr wrap="square" rtlCol="0" anchor="t"/>
+          <a:bodyPr wrap="square" lIns="0" tIns="0" rIns="0" bIns="0" rtlCol="0" anchor="t"/>
           <a:lstStyle/>
           <a:p>
             <a:pPr marL="342900" indent="-342900">
@@ -6556,8 +6239,8 @@
         </p:nvSpPr>
         <p:spPr>
           <a:xfrm>
-            <a:off x="4754880" y="1188720"/>
-            <a:ext cx="4023360" cy="1691640"/>
+            <a:off x="4754880" y="1078992"/>
+            <a:ext cx="4023360" cy="1940814"/>
           </a:xfrm>
           <a:prstGeom prst="rect">
             <a:avLst/>
@@ -6588,8 +6271,8 @@
         </p:nvSpPr>
         <p:spPr>
           <a:xfrm>
-            <a:off x="4937760" y="1371600"/>
-            <a:ext cx="502920" cy="502920"/>
+            <a:off x="4919472" y="1225296"/>
+            <a:ext cx="457200" cy="457200"/>
           </a:xfrm>
           <a:prstGeom prst="ellipse">
             <a:avLst/>
@@ -6608,8 +6291,8 @@
         </p:nvSpPr>
         <p:spPr>
           <a:xfrm>
-            <a:off x="4937760" y="1371600"/>
-            <a:ext cx="502920" cy="502920"/>
+            <a:off x="4919472" y="1225296"/>
+            <a:ext cx="457200" cy="457200"/>
           </a:xfrm>
           <a:prstGeom prst="rect">
             <a:avLst/>
@@ -6625,14 +6308,14 @@
               <a:buNone/>
             </a:pPr>
             <a:r>
-              <a:rPr lang="en-US" sz="1600" dirty="0">
+              <a:rPr lang="en-US" sz="1400" dirty="0">
                 <a:solidFill>
                   <a:srgbClr val="000000"/>
                 </a:solidFill>
               </a:rPr>
               <a:t>🌐</a:t>
             </a:r>
-            <a:endParaRPr lang="en-US" sz="1600" dirty="0"/>
+            <a:endParaRPr lang="en-US" sz="1400" dirty="0"/>
           </a:p>
         </p:txBody>
       </p:sp>
@@ -6644,8 +6327,8 @@
         </p:nvSpPr>
         <p:spPr>
           <a:xfrm>
-            <a:off x="5532120" y="1353312"/>
-            <a:ext cx="3108960" cy="365760"/>
+            <a:off x="5468112" y="1188720"/>
+            <a:ext cx="3218688" cy="329184"/>
           </a:xfrm>
           <a:prstGeom prst="rect">
             <a:avLst/>
@@ -6654,7 +6337,7 @@
           <a:ln/>
         </p:spPr>
         <p:txBody>
-          <a:bodyPr wrap="square" lIns="0" tIns="0" rIns="0" bIns="0" rtlCol="0" anchor="ctr"/>
+          <a:bodyPr wrap="square" lIns="0" tIns="0" rIns="0" bIns="0" rtlCol="0" anchor="t"/>
           <a:lstStyle/>
           <a:p>
             <a:pPr indent="0" marL="0">
@@ -6683,8 +6366,8 @@
         </p:nvSpPr>
         <p:spPr>
           <a:xfrm>
-            <a:off x="4937760" y="1874520"/>
-            <a:ext cx="3657600" cy="914400"/>
+            <a:off x="4901184" y="1591056"/>
+            <a:ext cx="3767328" cy="1355598"/>
           </a:xfrm>
           <a:prstGeom prst="rect">
             <a:avLst/>
@@ -6693,7 +6376,7 @@
           <a:ln/>
         </p:spPr>
         <p:txBody>
-          <a:bodyPr wrap="square" rtlCol="0" anchor="t"/>
+          <a:bodyPr wrap="square" lIns="0" tIns="0" rIns="0" bIns="0" rtlCol="0" anchor="t"/>
           <a:lstStyle/>
           <a:p>
             <a:pPr marL="342900" indent="-342900">
@@ -6777,8 +6460,8 @@
         </p:nvSpPr>
         <p:spPr>
           <a:xfrm>
-            <a:off x="365760" y="3063240"/>
-            <a:ext cx="4023360" cy="1691640"/>
+            <a:off x="365760" y="3092958"/>
+            <a:ext cx="4023360" cy="1940814"/>
           </a:xfrm>
           <a:prstGeom prst="rect">
             <a:avLst/>
@@ -6809,8 +6492,8 @@
         </p:nvSpPr>
         <p:spPr>
           <a:xfrm>
-            <a:off x="548640" y="3246120"/>
-            <a:ext cx="502920" cy="502920"/>
+            <a:off x="530352" y="3239262"/>
+            <a:ext cx="457200" cy="457200"/>
           </a:xfrm>
           <a:prstGeom prst="ellipse">
             <a:avLst/>
@@ -6829,8 +6512,8 @@
         </p:nvSpPr>
         <p:spPr>
           <a:xfrm>
-            <a:off x="548640" y="3246120"/>
-            <a:ext cx="502920" cy="502920"/>
+            <a:off x="530352" y="3239262"/>
+            <a:ext cx="457200" cy="457200"/>
           </a:xfrm>
           <a:prstGeom prst="rect">
             <a:avLst/>
@@ -6846,14 +6529,14 @@
               <a:buNone/>
             </a:pPr>
             <a:r>
-              <a:rPr lang="en-US" sz="1600" dirty="0">
+              <a:rPr lang="en-US" sz="1400" dirty="0">
                 <a:solidFill>
                   <a:srgbClr val="000000"/>
                 </a:solidFill>
               </a:rPr>
               <a:t>🚀</a:t>
             </a:r>
-            <a:endParaRPr lang="en-US" sz="1600" dirty="0"/>
+            <a:endParaRPr lang="en-US" sz="1400" dirty="0"/>
           </a:p>
         </p:txBody>
       </p:sp>
@@ -6865,8 +6548,8 @@
         </p:nvSpPr>
         <p:spPr>
           <a:xfrm>
-            <a:off x="1143000" y="3227832"/>
-            <a:ext cx="3108960" cy="365760"/>
+            <a:off x="1078992" y="3202686"/>
+            <a:ext cx="3218688" cy="329184"/>
           </a:xfrm>
           <a:prstGeom prst="rect">
             <a:avLst/>
@@ -6875,7 +6558,7 @@
           <a:ln/>
         </p:spPr>
         <p:txBody>
-          <a:bodyPr wrap="square" lIns="0" tIns="0" rIns="0" bIns="0" rtlCol="0" anchor="ctr"/>
+          <a:bodyPr wrap="square" lIns="0" tIns="0" rIns="0" bIns="0" rtlCol="0" anchor="t"/>
           <a:lstStyle/>
           <a:p>
             <a:pPr indent="0" marL="0">
@@ -6904,8 +6587,8 @@
         </p:nvSpPr>
         <p:spPr>
           <a:xfrm>
-            <a:off x="548640" y="3749040"/>
-            <a:ext cx="3657600" cy="914400"/>
+            <a:off x="512064" y="3605022"/>
+            <a:ext cx="3767328" cy="1355598"/>
           </a:xfrm>
           <a:prstGeom prst="rect">
             <a:avLst/>
@@ -6914,7 +6597,7 @@
           <a:ln/>
         </p:spPr>
         <p:txBody>
-          <a:bodyPr wrap="square" rtlCol="0" anchor="t"/>
+          <a:bodyPr wrap="square" lIns="0" tIns="0" rIns="0" bIns="0" rtlCol="0" anchor="t"/>
           <a:lstStyle/>
           <a:p>
             <a:pPr marL="342900" indent="-342900">
@@ -6998,8 +6681,8 @@
         </p:nvSpPr>
         <p:spPr>
           <a:xfrm>
-            <a:off x="4754880" y="3063240"/>
-            <a:ext cx="4023360" cy="1691640"/>
+            <a:off x="4754880" y="3092958"/>
+            <a:ext cx="4023360" cy="1940814"/>
           </a:xfrm>
           <a:prstGeom prst="rect">
             <a:avLst/>
@@ -7030,8 +6713,8 @@
         </p:nvSpPr>
         <p:spPr>
           <a:xfrm>
-            <a:off x="4937760" y="3246120"/>
-            <a:ext cx="502920" cy="502920"/>
+            <a:off x="4919472" y="3239262"/>
+            <a:ext cx="457200" cy="457200"/>
           </a:xfrm>
           <a:prstGeom prst="ellipse">
             <a:avLst/>
@@ -7050,8 +6733,8 @@
         </p:nvSpPr>
         <p:spPr>
           <a:xfrm>
-            <a:off x="4937760" y="3246120"/>
-            <a:ext cx="502920" cy="502920"/>
+            <a:off x="4919472" y="3239262"/>
+            <a:ext cx="457200" cy="457200"/>
           </a:xfrm>
           <a:prstGeom prst="rect">
             <a:avLst/>
@@ -7067,14 +6750,14 @@
               <a:buNone/>
             </a:pPr>
             <a:r>
-              <a:rPr lang="en-US" sz="1600" dirty="0">
+              <a:rPr lang="en-US" sz="1400" dirty="0">
                 <a:solidFill>
                   <a:srgbClr val="000000"/>
                 </a:solidFill>
               </a:rPr>
               <a:t>⚙</a:t>
             </a:r>
-            <a:endParaRPr lang="en-US" sz="1600" dirty="0"/>
+            <a:endParaRPr lang="en-US" sz="1400" dirty="0"/>
           </a:p>
         </p:txBody>
       </p:sp>
@@ -7086,8 +6769,8 @@
         </p:nvSpPr>
         <p:spPr>
           <a:xfrm>
-            <a:off x="5532120" y="3227832"/>
-            <a:ext cx="3108960" cy="365760"/>
+            <a:off x="5468112" y="3202686"/>
+            <a:ext cx="3218688" cy="329184"/>
           </a:xfrm>
           <a:prstGeom prst="rect">
             <a:avLst/>
@@ -7096,7 +6779,7 @@
           <a:ln/>
         </p:spPr>
         <p:txBody>
-          <a:bodyPr wrap="square" lIns="0" tIns="0" rIns="0" bIns="0" rtlCol="0" anchor="ctr"/>
+          <a:bodyPr wrap="square" lIns="0" tIns="0" rIns="0" bIns="0" rtlCol="0" anchor="t"/>
           <a:lstStyle/>
           <a:p>
             <a:pPr indent="0" marL="0">
@@ -7125,8 +6808,8 @@
         </p:nvSpPr>
         <p:spPr>
           <a:xfrm>
-            <a:off x="4937760" y="3749040"/>
-            <a:ext cx="3657600" cy="914400"/>
+            <a:off x="4901184" y="3605022"/>
+            <a:ext cx="3767328" cy="1355598"/>
           </a:xfrm>
           <a:prstGeom prst="rect">
             <a:avLst/>
@@ -7135,7 +6818,7 @@
           <a:ln/>
         </p:spPr>
         <p:txBody>
-          <a:bodyPr wrap="square" rtlCol="0" anchor="t"/>
+          <a:bodyPr wrap="square" lIns="0" tIns="0" rIns="0" bIns="0" rtlCol="0" anchor="t"/>
           <a:lstStyle/>
           <a:p>
             <a:pPr marL="342900" indent="-342900">
@@ -7369,8 +7052,8 @@
         </p:nvSpPr>
         <p:spPr>
           <a:xfrm>
-            <a:off x="320040" y="1234440"/>
-            <a:ext cx="1965960" cy="3337560"/>
+            <a:off x="228600" y="1097280"/>
+            <a:ext cx="1678838" cy="3607308"/>
           </a:xfrm>
           <a:prstGeom prst="rect">
             <a:avLst/>
@@ -7401,8 +7084,8 @@
         </p:nvSpPr>
         <p:spPr>
           <a:xfrm>
-            <a:off x="320040" y="1371600"/>
-            <a:ext cx="1965960" cy="365760"/>
+            <a:off x="228600" y="1207008"/>
+            <a:ext cx="1678838" cy="292608"/>
           </a:xfrm>
           <a:prstGeom prst="rect">
             <a:avLst/>
@@ -7418,7 +7101,7 @@
               <a:buNone/>
             </a:pPr>
             <a:r>
-              <a:rPr lang="en-US" sz="1100" b="1" dirty="0">
+              <a:rPr lang="en-US" sz="900" b="1" dirty="0">
                 <a:solidFill>
                   <a:srgbClr val="065A82"/>
                 </a:solidFill>
@@ -7428,7 +7111,7 @@
               </a:rPr>
               <a:t>Phase 1</a:t>
             </a:r>
-            <a:endParaRPr lang="en-US" sz="1100" dirty="0"/>
+            <a:endParaRPr lang="en-US" sz="900" dirty="0"/>
           </a:p>
         </p:txBody>
       </p:sp>
@@ -7440,8 +7123,8 @@
         </p:nvSpPr>
         <p:spPr>
           <a:xfrm>
-            <a:off x="320040" y="1737360"/>
-            <a:ext cx="1965960" cy="274320"/>
+            <a:off x="228600" y="1481328"/>
+            <a:ext cx="1678838" cy="237744"/>
           </a:xfrm>
           <a:prstGeom prst="rect">
             <a:avLst/>
@@ -7457,7 +7140,7 @@
               <a:buNone/>
             </a:pPr>
             <a:r>
-              <a:rPr lang="en-US" sz="900" dirty="0">
+              <a:rPr lang="en-US" sz="750" dirty="0">
                 <a:solidFill>
                   <a:srgbClr val="16A34A"/>
                 </a:solidFill>
@@ -7467,7 +7150,7 @@
               </a:rPr>
               <a:t>✅ 已完成</a:t>
             </a:r>
-            <a:endParaRPr lang="en-US" sz="900" dirty="0"/>
+            <a:endParaRPr lang="en-US" sz="750" dirty="0"/>
           </a:p>
         </p:txBody>
       </p:sp>
@@ -7479,8 +7162,8 @@
         </p:nvSpPr>
         <p:spPr>
           <a:xfrm>
-            <a:off x="411480" y="2103120"/>
-            <a:ext cx="1783080" cy="2286000"/>
+            <a:off x="283464" y="1755648"/>
+            <a:ext cx="1569110" cy="2857500"/>
           </a:xfrm>
           <a:prstGeom prst="rect">
             <a:avLst/>
@@ -7489,7 +7172,7 @@
           <a:ln/>
         </p:spPr>
         <p:txBody>
-          <a:bodyPr wrap="square" rtlCol="0" anchor="t"/>
+          <a:bodyPr wrap="square" lIns="0" tIns="0" rIns="0" bIns="0" rtlCol="0" anchor="t"/>
           <a:lstStyle/>
           <a:p>
             <a:pPr marL="342900" indent="-342900">
@@ -7497,7 +7180,7 @@
               <a:buChar char="•"/>
             </a:pPr>
             <a:r>
-              <a:rPr lang="en-US" sz="800" dirty="0">
+              <a:rPr lang="en-US" sz="700" dirty="0">
                 <a:solidFill>
                   <a:srgbClr val="1E293B"/>
                 </a:solidFill>
@@ -7507,7 +7190,7 @@
               </a:rPr>
               <a:t>三分布模板</a:t>
             </a:r>
-            <a:endParaRPr lang="en-US" sz="800" dirty="0"/>
+            <a:endParaRPr lang="en-US" sz="700" dirty="0"/>
           </a:p>
           <a:p>
             <a:pPr marL="342900" indent="-342900">
@@ -7515,7 +7198,7 @@
               <a:buChar char="•"/>
             </a:pPr>
             <a:r>
-              <a:rPr lang="en-US" sz="800" dirty="0">
+              <a:rPr lang="en-US" sz="700" dirty="0">
                 <a:solidFill>
                   <a:srgbClr val="1E293B"/>
                 </a:solidFill>
@@ -7525,7 +7208,7 @@
               </a:rPr>
               <a:t>区间/数字期权</a:t>
             </a:r>
-            <a:endParaRPr lang="en-US" sz="800" dirty="0"/>
+            <a:endParaRPr lang="en-US" sz="700" dirty="0"/>
           </a:p>
           <a:p>
             <a:pPr marL="342900" indent="-342900">
@@ -7533,7 +7216,7 @@
               <a:buChar char="•"/>
             </a:pPr>
             <a:r>
-              <a:rPr lang="en-US" sz="800" dirty="0">
+              <a:rPr lang="en-US" sz="700" dirty="0">
                 <a:solidFill>
                   <a:srgbClr val="1E293B"/>
                 </a:solidFill>
@@ -7543,7 +7226,7 @@
               </a:rPr>
               <a:t>Max-Loss</a:t>
             </a:r>
-            <a:endParaRPr lang="en-US" sz="800" dirty="0"/>
+            <a:endParaRPr lang="en-US" sz="700" dirty="0"/>
           </a:p>
           <a:p>
             <a:pPr marL="342900" indent="-342900">
@@ -7551,7 +7234,7 @@
               <a:buChar char="•"/>
             </a:pPr>
             <a:r>
-              <a:rPr lang="en-US" sz="800" dirty="0">
+              <a:rPr lang="en-US" sz="700" dirty="0">
                 <a:solidFill>
                   <a:srgbClr val="1E293B"/>
                 </a:solidFill>
@@ -7561,7 +7244,7 @@
               </a:rPr>
               <a:t>USDC Vault</a:t>
             </a:r>
-            <a:endParaRPr lang="en-US" sz="800" dirty="0"/>
+            <a:endParaRPr lang="en-US" sz="700" dirty="0"/>
           </a:p>
         </p:txBody>
       </p:sp>
@@ -7573,8 +7256,8 @@
         </p:nvSpPr>
         <p:spPr>
           <a:xfrm>
-            <a:off x="2468880" y="1234440"/>
-            <a:ext cx="1965960" cy="3337560"/>
+            <a:off x="1980590" y="1097280"/>
+            <a:ext cx="1678838" cy="3607308"/>
           </a:xfrm>
           <a:prstGeom prst="rect">
             <a:avLst/>
@@ -7605,8 +7288,8 @@
         </p:nvSpPr>
         <p:spPr>
           <a:xfrm>
-            <a:off x="2468880" y="1371600"/>
-            <a:ext cx="1965960" cy="365760"/>
+            <a:off x="1980590" y="1207008"/>
+            <a:ext cx="1678838" cy="292608"/>
           </a:xfrm>
           <a:prstGeom prst="rect">
             <a:avLst/>
@@ -7622,7 +7305,7 @@
               <a:buNone/>
             </a:pPr>
             <a:r>
-              <a:rPr lang="en-US" sz="1100" b="1" dirty="0">
+              <a:rPr lang="en-US" sz="900" b="1" dirty="0">
                 <a:solidFill>
                   <a:srgbClr val="065A82"/>
                 </a:solidFill>
@@ -7632,7 +7315,7 @@
               </a:rPr>
               <a:t>Phase 1.5</a:t>
             </a:r>
-            <a:endParaRPr lang="en-US" sz="1100" dirty="0"/>
+            <a:endParaRPr lang="en-US" sz="900" dirty="0"/>
           </a:p>
         </p:txBody>
       </p:sp>
@@ -7644,8 +7327,8 @@
         </p:nvSpPr>
         <p:spPr>
           <a:xfrm>
-            <a:off x="2468880" y="1737360"/>
-            <a:ext cx="1965960" cy="274320"/>
+            <a:off x="1980590" y="1481328"/>
+            <a:ext cx="1678838" cy="237744"/>
           </a:xfrm>
           <a:prstGeom prst="rect">
             <a:avLst/>
@@ -7661,7 +7344,7 @@
               <a:buNone/>
             </a:pPr>
             <a:r>
-              <a:rPr lang="en-US" sz="900" dirty="0">
+              <a:rPr lang="en-US" sz="750" dirty="0">
                 <a:solidFill>
                   <a:srgbClr val="16A34A"/>
                 </a:solidFill>
@@ -7671,7 +7354,7 @@
               </a:rPr>
               <a:t>✅ 已完成</a:t>
             </a:r>
-            <a:endParaRPr lang="en-US" sz="900" dirty="0"/>
+            <a:endParaRPr lang="en-US" sz="750" dirty="0"/>
           </a:p>
         </p:txBody>
       </p:sp>
@@ -7683,8 +7366,8 @@
         </p:nvSpPr>
         <p:spPr>
           <a:xfrm>
-            <a:off x="2560320" y="2103120"/>
-            <a:ext cx="1783080" cy="2286000"/>
+            <a:off x="2035454" y="1755648"/>
+            <a:ext cx="1569110" cy="2857500"/>
           </a:xfrm>
           <a:prstGeom prst="rect">
             <a:avLst/>
@@ -7693,7 +7376,7 @@
           <a:ln/>
         </p:spPr>
         <p:txBody>
-          <a:bodyPr wrap="square" rtlCol="0" anchor="t"/>
+          <a:bodyPr wrap="square" lIns="0" tIns="0" rIns="0" bIns="0" rtlCol="0" anchor="t"/>
           <a:lstStyle/>
           <a:p>
             <a:pPr marL="342900" indent="-342900">
@@ -7701,7 +7384,7 @@
               <a:buChar char="•"/>
             </a:pPr>
             <a:r>
-              <a:rPr lang="en-US" sz="800" dirty="0">
+              <a:rPr lang="en-US" sz="700" dirty="0">
                 <a:solidFill>
                   <a:srgbClr val="1E293B"/>
                 </a:solidFill>
@@ -7711,7 +7394,7 @@
               </a:rPr>
               <a:t>Opening Auction</a:t>
             </a:r>
-            <a:endParaRPr lang="en-US" sz="800" dirty="0"/>
+            <a:endParaRPr lang="en-US" sz="700" dirty="0"/>
           </a:p>
           <a:p>
             <a:pPr marL="342900" indent="-342900">
@@ -7719,7 +7402,7 @@
               <a:buChar char="•"/>
             </a:pPr>
             <a:r>
-              <a:rPr lang="en-US" sz="800" dirty="0">
+              <a:rPr lang="en-US" sz="700" dirty="0">
                 <a:solidFill>
                   <a:srgbClr val="1E293B"/>
                 </a:solidFill>
@@ -7729,7 +7412,7 @@
               </a:rPr>
               <a:t>LP Token + NAV</a:t>
             </a:r>
-            <a:endParaRPr lang="en-US" sz="800" dirty="0"/>
+            <a:endParaRPr lang="en-US" sz="700" dirty="0"/>
           </a:p>
           <a:p>
             <a:pPr marL="342900" indent="-342900">
@@ -7737,7 +7420,7 @@
               <a:buChar char="•"/>
             </a:pPr>
             <a:r>
-              <a:rPr lang="en-US" sz="800" dirty="0">
+              <a:rPr lang="en-US" sz="700" dirty="0">
                 <a:solidFill>
                   <a:srgbClr val="1E293B"/>
                 </a:solidFill>
@@ -7747,7 +7430,7 @@
               </a:rPr>
               <a:t>市场状态机</a:t>
             </a:r>
-            <a:endParaRPr lang="en-US" sz="800" dirty="0"/>
+            <a:endParaRPr lang="en-US" sz="700" dirty="0"/>
           </a:p>
           <a:p>
             <a:pPr marL="342900" indent="-342900">
@@ -7755,7 +7438,7 @@
               <a:buChar char="•"/>
             </a:pPr>
             <a:r>
-              <a:rPr lang="en-US" sz="800" dirty="0">
+              <a:rPr lang="en-US" sz="700" dirty="0">
                 <a:solidFill>
                   <a:srgbClr val="1E293B"/>
                 </a:solidFill>
@@ -7765,7 +7448,7 @@
               </a:rPr>
               <a:t>冷启动定标</a:t>
             </a:r>
-            <a:endParaRPr lang="en-US" sz="800" dirty="0"/>
+            <a:endParaRPr lang="en-US" sz="700" dirty="0"/>
           </a:p>
         </p:txBody>
       </p:sp>
@@ -7777,8 +7460,8 @@
         </p:nvSpPr>
         <p:spPr>
           <a:xfrm>
-            <a:off x="4617720" y="1234440"/>
-            <a:ext cx="1965960" cy="3337560"/>
+            <a:off x="3732581" y="1097280"/>
+            <a:ext cx="1678838" cy="3607308"/>
           </a:xfrm>
           <a:prstGeom prst="rect">
             <a:avLst/>
@@ -7809,8 +7492,8 @@
         </p:nvSpPr>
         <p:spPr>
           <a:xfrm>
-            <a:off x="4617720" y="1371600"/>
-            <a:ext cx="1965960" cy="365760"/>
+            <a:off x="3732581" y="1207008"/>
+            <a:ext cx="1678838" cy="292608"/>
           </a:xfrm>
           <a:prstGeom prst="rect">
             <a:avLst/>
@@ -7826,7 +7509,7 @@
               <a:buNone/>
             </a:pPr>
             <a:r>
-              <a:rPr lang="en-US" sz="1100" b="1" dirty="0">
+              <a:rPr lang="en-US" sz="900" b="1" dirty="0">
                 <a:solidFill>
                   <a:srgbClr val="065A82"/>
                 </a:solidFill>
@@ -7836,7 +7519,7 @@
               </a:rPr>
               <a:t>Phase 2</a:t>
             </a:r>
-            <a:endParaRPr lang="en-US" sz="1100" dirty="0"/>
+            <a:endParaRPr lang="en-US" sz="900" dirty="0"/>
           </a:p>
         </p:txBody>
       </p:sp>
@@ -7848,8 +7531,8 @@
         </p:nvSpPr>
         <p:spPr>
           <a:xfrm>
-            <a:off x="4617720" y="1737360"/>
-            <a:ext cx="1965960" cy="274320"/>
+            <a:off x="3732581" y="1481328"/>
+            <a:ext cx="1678838" cy="237744"/>
           </a:xfrm>
           <a:prstGeom prst="rect">
             <a:avLst/>
@@ -7865,7 +7548,7 @@
               <a:buNone/>
             </a:pPr>
             <a:r>
-              <a:rPr lang="en-US" sz="900" dirty="0">
+              <a:rPr lang="en-US" sz="750" dirty="0">
                 <a:solidFill>
                   <a:srgbClr val="16A34A"/>
                 </a:solidFill>
@@ -7875,7 +7558,7 @@
               </a:rPr>
               <a:t>✅ 已完成</a:t>
             </a:r>
-            <a:endParaRPr lang="en-US" sz="900" dirty="0"/>
+            <a:endParaRPr lang="en-US" sz="750" dirty="0"/>
           </a:p>
         </p:txBody>
       </p:sp>
@@ -7887,8 +7570,8 @@
         </p:nvSpPr>
         <p:spPr>
           <a:xfrm>
-            <a:off x="4709160" y="2103120"/>
-            <a:ext cx="1783080" cy="2286000"/>
+            <a:off x="3787445" y="1755648"/>
+            <a:ext cx="1569110" cy="2857500"/>
           </a:xfrm>
           <a:prstGeom prst="rect">
             <a:avLst/>
@@ -7897,7 +7580,7 @@
           <a:ln/>
         </p:spPr>
         <p:txBody>
-          <a:bodyPr wrap="square" rtlCol="0" anchor="t"/>
+          <a:bodyPr wrap="square" lIns="0" tIns="0" rIns="0" bIns="0" rtlCol="0" anchor="t"/>
           <a:lstStyle/>
           <a:p>
             <a:pPr marL="342900" indent="-342900">
@@ -7905,7 +7588,7 @@
               <a:buChar char="•"/>
             </a:pPr>
             <a:r>
-              <a:rPr lang="en-US" sz="800" dirty="0">
+              <a:rPr lang="en-US" sz="700" dirty="0">
                 <a:solidFill>
                   <a:srgbClr val="1E293B"/>
                 </a:solidFill>
@@ -7915,7 +7598,7 @@
               </a:rPr>
               <a:t>线性期权 · Straddle</a:t>
             </a:r>
-            <a:endParaRPr lang="en-US" sz="800" dirty="0"/>
+            <a:endParaRPr lang="en-US" sz="700" dirty="0"/>
           </a:p>
           <a:p>
             <a:pPr marL="342900" indent="-342900">
@@ -7923,7 +7606,7 @@
               <a:buChar char="•"/>
             </a:pPr>
             <a:r>
-              <a:rPr lang="en-US" sz="800" dirty="0">
+              <a:rPr lang="en-US" sz="700" dirty="0">
                 <a:solidFill>
                   <a:srgbClr val="1E293B"/>
                 </a:solidFill>
@@ -7933,7 +7616,7 @@
               </a:rPr>
               <a:t>LP Guard 动态费率</a:t>
             </a:r>
-            <a:endParaRPr lang="en-US" sz="800" dirty="0"/>
+            <a:endParaRPr lang="en-US" sz="700" dirty="0"/>
           </a:p>
           <a:p>
             <a:pPr marL="342900" indent="-342900">
@@ -7941,7 +7624,7 @@
               <a:buChar char="•"/>
             </a:pPr>
             <a:r>
-              <a:rPr lang="en-US" sz="800" dirty="0">
+              <a:rPr lang="en-US" sz="700" dirty="0">
                 <a:solidFill>
                   <a:srgbClr val="1E293B"/>
                 </a:solidFill>
@@ -7951,7 +7634,7 @@
               </a:rPr>
               <a:t>NAV 赎回</a:t>
             </a:r>
-            <a:endParaRPr lang="en-US" sz="800" dirty="0"/>
+            <a:endParaRPr lang="en-US" sz="700" dirty="0"/>
           </a:p>
           <a:p>
             <a:pPr marL="342900" indent="-342900">
@@ -7959,7 +7642,7 @@
               <a:buChar char="•"/>
             </a:pPr>
             <a:r>
-              <a:rPr lang="en-US" sz="800" dirty="0">
+              <a:rPr lang="en-US" sz="700" dirty="0">
                 <a:solidFill>
                   <a:srgbClr val="1E293B"/>
                 </a:solidFill>
@@ -7969,7 +7652,7 @@
               </a:rPr>
               <a:t>IV 面板</a:t>
             </a:r>
-            <a:endParaRPr lang="en-US" sz="800" dirty="0"/>
+            <a:endParaRPr lang="en-US" sz="700" dirty="0"/>
           </a:p>
         </p:txBody>
       </p:sp>
@@ -7981,8 +7664,8 @@
         </p:nvSpPr>
         <p:spPr>
           <a:xfrm>
-            <a:off x="6766560" y="1234440"/>
-            <a:ext cx="1965960" cy="3337560"/>
+            <a:off x="5484571" y="1097280"/>
+            <a:ext cx="1678838" cy="3607308"/>
           </a:xfrm>
           <a:prstGeom prst="rect">
             <a:avLst/>
@@ -8013,8 +7696,8 @@
         </p:nvSpPr>
         <p:spPr>
           <a:xfrm>
-            <a:off x="6766560" y="1371600"/>
-            <a:ext cx="1965960" cy="365760"/>
+            <a:off x="5484571" y="1207008"/>
+            <a:ext cx="1678838" cy="292608"/>
           </a:xfrm>
           <a:prstGeom prst="rect">
             <a:avLst/>
@@ -8030,7 +7713,7 @@
               <a:buNone/>
             </a:pPr>
             <a:r>
-              <a:rPr lang="en-US" sz="1100" b="1" dirty="0">
+              <a:rPr lang="en-US" sz="900" b="1" dirty="0">
                 <a:solidFill>
                   <a:srgbClr val="065A82"/>
                 </a:solidFill>
@@ -8040,7 +7723,7 @@
               </a:rPr>
               <a:t>Phase 3</a:t>
             </a:r>
-            <a:endParaRPr lang="en-US" sz="1100" dirty="0"/>
+            <a:endParaRPr lang="en-US" sz="900" dirty="0"/>
           </a:p>
         </p:txBody>
       </p:sp>
@@ -8052,8 +7735,8 @@
         </p:nvSpPr>
         <p:spPr>
           <a:xfrm>
-            <a:off x="6766560" y="1737360"/>
-            <a:ext cx="1965960" cy="274320"/>
+            <a:off x="5484571" y="1481328"/>
+            <a:ext cx="1678838" cy="237744"/>
           </a:xfrm>
           <a:prstGeom prst="rect">
             <a:avLst/>
@@ -8069,7 +7752,7 @@
               <a:buNone/>
             </a:pPr>
             <a:r>
-              <a:rPr lang="en-US" sz="900" dirty="0">
+              <a:rPr lang="en-US" sz="750" dirty="0">
                 <a:solidFill>
                   <a:srgbClr val="1C7293"/>
                 </a:solidFill>
@@ -8079,7 +7762,7 @@
               </a:rPr>
               <a:t>🔵 收尾中</a:t>
             </a:r>
-            <a:endParaRPr lang="en-US" sz="900" dirty="0"/>
+            <a:endParaRPr lang="en-US" sz="750" dirty="0"/>
           </a:p>
         </p:txBody>
       </p:sp>
@@ -8091,8 +7774,8 @@
         </p:nvSpPr>
         <p:spPr>
           <a:xfrm>
-            <a:off x="6858000" y="2103120"/>
-            <a:ext cx="1783080" cy="2286000"/>
+            <a:off x="5539435" y="1755648"/>
+            <a:ext cx="1569110" cy="2857500"/>
           </a:xfrm>
           <a:prstGeom prst="rect">
             <a:avLst/>
@@ -8101,7 +7784,7 @@
           <a:ln/>
         </p:spPr>
         <p:txBody>
-          <a:bodyPr wrap="square" rtlCol="0" anchor="t"/>
+          <a:bodyPr wrap="square" lIns="0" tIns="0" rIns="0" bIns="0" rtlCol="0" anchor="t"/>
           <a:lstStyle/>
           <a:p>
             <a:pPr marL="342900" indent="-342900">
@@ -8109,7 +7792,7 @@
               <a:buChar char="•"/>
             </a:pPr>
             <a:r>
-              <a:rPr lang="en-US" sz="800" dirty="0">
+              <a:rPr lang="en-US" sz="700" dirty="0">
                 <a:solidFill>
                   <a:srgbClr val="1E293B"/>
                 </a:solidFill>
@@ -8119,7 +7802,7 @@
               </a:rPr>
               <a:t>Variance Swap + 结构化票据</a:t>
             </a:r>
-            <a:endParaRPr lang="en-US" sz="800" dirty="0"/>
+            <a:endParaRPr lang="en-US" sz="700" dirty="0"/>
           </a:p>
           <a:p>
             <a:pPr marL="342900" indent="-342900">
@@ -8127,7 +7810,7 @@
               <a:buChar char="•"/>
             </a:pPr>
             <a:r>
-              <a:rPr lang="en-US" sz="800" dirty="0">
+              <a:rPr lang="en-US" sz="700" dirty="0">
                 <a:solidFill>
                   <a:srgbClr val="1E293B"/>
                 </a:solidFill>
@@ -8137,7 +7820,7 @@
               </a:rPr>
               <a:t>Slash 治理 · ZK 冷路径见证</a:t>
             </a:r>
-            <a:endParaRPr lang="en-US" sz="800" dirty="0"/>
+            <a:endParaRPr lang="en-US" sz="700" dirty="0"/>
           </a:p>
           <a:p>
             <a:pPr marL="342900" indent="-342900">
@@ -8145,7 +7828,7 @@
               <a:buChar char="•"/>
             </a:pPr>
             <a:r>
-              <a:rPr lang="en-US" sz="800" dirty="0">
+              <a:rPr lang="en-US" sz="700" dirty="0">
                 <a:solidFill>
                   <a:srgbClr val="1E293B"/>
                 </a:solidFill>
@@ -8155,7 +7838,7 @@
               </a:rPr>
               <a:t>Beta 分布 · UMA DVM</a:t>
             </a:r>
-            <a:endParaRPr lang="en-US" sz="800" dirty="0"/>
+            <a:endParaRPr lang="en-US" sz="700" dirty="0"/>
           </a:p>
           <a:p>
             <a:pPr marL="342900" indent="-342900">
@@ -8163,7 +7846,7 @@
               <a:buChar char="•"/>
             </a:pPr>
             <a:r>
-              <a:rPr lang="en-US" sz="800" dirty="0">
+              <a:rPr lang="en-US" sz="700" dirty="0">
                 <a:solidFill>
                   <a:srgbClr val="1E293B"/>
                 </a:solidFill>
@@ -8173,7 +7856,7 @@
               </a:rPr>
               <a:t>外部审计 → Mainnet</a:t>
             </a:r>
-            <a:endParaRPr lang="en-US" sz="800" dirty="0"/>
+            <a:endParaRPr lang="en-US" sz="700" dirty="0"/>
           </a:p>
         </p:txBody>
       </p:sp>
@@ -8185,8 +7868,8 @@
         </p:nvSpPr>
         <p:spPr>
           <a:xfrm>
-            <a:off x="8915400" y="1234440"/>
-            <a:ext cx="1965960" cy="3337560"/>
+            <a:off x="7236562" y="1097280"/>
+            <a:ext cx="1678838" cy="3607308"/>
           </a:xfrm>
           <a:prstGeom prst="rect">
             <a:avLst/>
@@ -8217,8 +7900,8 @@
         </p:nvSpPr>
         <p:spPr>
           <a:xfrm>
-            <a:off x="8915400" y="1371600"/>
-            <a:ext cx="1965960" cy="365760"/>
+            <a:off x="7236562" y="1207008"/>
+            <a:ext cx="1678838" cy="292608"/>
           </a:xfrm>
           <a:prstGeom prst="rect">
             <a:avLst/>
@@ -8234,7 +7917,7 @@
               <a:buNone/>
             </a:pPr>
             <a:r>
-              <a:rPr lang="en-US" sz="1100" b="1" dirty="0">
+              <a:rPr lang="en-US" sz="900" b="1" dirty="0">
                 <a:solidFill>
                   <a:srgbClr val="065A82"/>
                 </a:solidFill>
@@ -8244,7 +7927,7 @@
               </a:rPr>
               <a:t>Phase 4</a:t>
             </a:r>
-            <a:endParaRPr lang="en-US" sz="1100" dirty="0"/>
+            <a:endParaRPr lang="en-US" sz="900" dirty="0"/>
           </a:p>
         </p:txBody>
       </p:sp>
@@ -8256,8 +7939,8 @@
         </p:nvSpPr>
         <p:spPr>
           <a:xfrm>
-            <a:off x="8915400" y="1737360"/>
-            <a:ext cx="1965960" cy="274320"/>
+            <a:off x="7236562" y="1481328"/>
+            <a:ext cx="1678838" cy="237744"/>
           </a:xfrm>
           <a:prstGeom prst="rect">
             <a:avLst/>
@@ -8273,7 +7956,7 @@
               <a:buNone/>
             </a:pPr>
             <a:r>
-              <a:rPr lang="en-US" sz="900" dirty="0">
+              <a:rPr lang="en-US" sz="750" dirty="0">
                 <a:solidFill>
                   <a:srgbClr val="1C7293"/>
                 </a:solidFill>
@@ -8283,7 +7966,7 @@
               </a:rPr>
               <a:t>🔵 规模化</a:t>
             </a:r>
-            <a:endParaRPr lang="en-US" sz="900" dirty="0"/>
+            <a:endParaRPr lang="en-US" sz="750" dirty="0"/>
           </a:p>
         </p:txBody>
       </p:sp>
@@ -8295,8 +7978,8 @@
         </p:nvSpPr>
         <p:spPr>
           <a:xfrm>
-            <a:off x="9006840" y="2103120"/>
-            <a:ext cx="1783080" cy="2286000"/>
+            <a:off x="7291426" y="1755648"/>
+            <a:ext cx="1569110" cy="2857500"/>
           </a:xfrm>
           <a:prstGeom prst="rect">
             <a:avLst/>
@@ -8305,7 +7988,7 @@
           <a:ln/>
         </p:spPr>
         <p:txBody>
-          <a:bodyPr wrap="square" rtlCol="0" anchor="t"/>
+          <a:bodyPr wrap="square" lIns="0" tIns="0" rIns="0" bIns="0" rtlCol="0" anchor="t"/>
           <a:lstStyle/>
           <a:p>
             <a:pPr marL="342900" indent="-342900">
@@ -8313,7 +7996,7 @@
               <a:buChar char="•"/>
             </a:pPr>
             <a:r>
-              <a:rPr lang="en-US" sz="800" dirty="0">
+              <a:rPr lang="en-US" sz="700" dirty="0">
                 <a:solidFill>
                   <a:srgbClr val="1E293B"/>
                 </a:solidFill>
@@ -8323,7 +8006,7 @@
               </a:rPr>
               <a:t>EventRoot 全量迁移</a:t>
             </a:r>
-            <a:endParaRPr lang="en-US" sz="800" dirty="0"/>
+            <a:endParaRPr lang="en-US" sz="700" dirty="0"/>
           </a:p>
           <a:p>
             <a:pPr marL="342900" indent="-342900">
@@ -8331,7 +8014,7 @@
               <a:buChar char="•"/>
             </a:pPr>
             <a:r>
-              <a:rPr lang="en-US" sz="800" dirty="0">
+              <a:rPr lang="en-US" sz="700" dirty="0">
                 <a:solidFill>
                   <a:srgbClr val="1E293B"/>
                 </a:solidFill>
@@ -8341,7 +8024,7 @@
               </a:rPr>
               <a:t>Prophet Audit Keeper 自动化</a:t>
             </a:r>
-            <a:endParaRPr lang="en-US" sz="800" dirty="0"/>
+            <a:endParaRPr lang="en-US" sz="700" dirty="0"/>
           </a:p>
           <a:p>
             <a:pPr marL="342900" indent="-342900">
@@ -8349,7 +8032,7 @@
               <a:buChar char="•"/>
             </a:pPr>
             <a:r>
-              <a:rPr lang="en-US" sz="800" dirty="0">
+              <a:rPr lang="en-US" sz="700" dirty="0">
                 <a:solidFill>
                   <a:srgbClr val="1E293B"/>
                 </a:solidFill>
@@ -8359,7 +8042,7 @@
               </a:rPr>
               <a:t>订阅者 ROI · GMV 指标</a:t>
             </a:r>
-            <a:endParaRPr lang="en-US" sz="800" dirty="0"/>
+            <a:endParaRPr lang="en-US" sz="700" dirty="0"/>
           </a:p>
           <a:p>
             <a:pPr marL="342900" indent="-342900">
@@ -8367,7 +8050,7 @@
               <a:buChar char="•"/>
             </a:pPr>
             <a:r>
-              <a:rPr lang="en-US" sz="800" dirty="0">
+              <a:rPr lang="en-US" sz="700" dirty="0">
                 <a:solidFill>
                   <a:srgbClr val="1E293B"/>
                 </a:solidFill>
@@ -8377,7 +8060,7 @@
               </a:rPr>
               <a:t>SDK / Quant API 开放</a:t>
             </a:r>
-            <a:endParaRPr lang="en-US" sz="800" dirty="0"/>
+            <a:endParaRPr lang="en-US" sz="700" dirty="0"/>
           </a:p>
         </p:txBody>
       </p:sp>
@@ -8389,8 +8072,8 @@
         </p:nvSpPr>
         <p:spPr>
           <a:xfrm>
-            <a:off x="365760" y="4663440"/>
-            <a:ext cx="8412480" cy="320040"/>
+            <a:off x="228600" y="4759452"/>
+            <a:ext cx="8686800" cy="274320"/>
           </a:xfrm>
           <a:prstGeom prst="rect">
             <a:avLst/>
@@ -8406,7 +8089,7 @@
               <a:buNone/>
             </a:pPr>
             <a:r>
-              <a:rPr lang="en-US" sz="900" i="1" dirty="0">
+              <a:rPr lang="en-US" sz="750" i="1" dirty="0">
                 <a:solidFill>
                   <a:srgbClr val="64748B"/>
                 </a:solidFill>
@@ -8416,7 +8099,7 @@
               </a:rPr>
               <a:t>Tier 2 联合 PDF 模型：主网后 6–12 个月内不上线，优先 Tier 1 + 结构化票据 + SuiProphet 生态</a:t>
             </a:r>
-            <a:endParaRPr lang="en-US" sz="900" dirty="0"/>
+            <a:endParaRPr lang="en-US" sz="750" dirty="0"/>
           </a:p>
         </p:txBody>
       </p:sp>
@@ -10237,1643 +9920,6 @@
 </p:sld>
 </file>
 
-<file path=ppt/slides/slide17.xml><?xml version="1.0" encoding="utf-8"?>
-<p:sld xmlns:a="http://schemas.openxmlformats.org/drawingml/2006/main" xmlns:r="http://schemas.openxmlformats.org/officeDocument/2006/relationships" xmlns:p="http://schemas.openxmlformats.org/presentationml/2006/main">
-  <p:cSld name="Slide 17">
-    <p:bg>
-      <p:bgPr>
-        <a:solidFill>
-          <a:srgbClr val="F0F7FA"/>
-        </a:solidFill>
-      </p:bgPr>
-    </p:bg>
-    <p:spTree>
-      <p:nvGrpSpPr>
-        <p:cNvPr id="1" name=""/>
-        <p:cNvGrpSpPr/>
-        <p:nvPr/>
-      </p:nvGrpSpPr>
-      <p:grpSpPr>
-        <a:xfrm>
-          <a:off x="0" y="0"/>
-          <a:ext cx="0" cy="0"/>
-          <a:chOff x="0" y="0"/>
-          <a:chExt cx="0" cy="0"/>
-        </a:xfrm>
-      </p:grpSpPr>
-      <p:sp>
-        <p:nvSpPr>
-          <p:cNvPr id="2" name="Shape 0"/>
-          <p:cNvSpPr/>
-          <p:nvPr/>
-        </p:nvSpPr>
-        <p:spPr>
-          <a:xfrm>
-            <a:off x="0" y="0"/>
-            <a:ext cx="9144000" cy="960120"/>
-          </a:xfrm>
-          <a:prstGeom prst="rect">
-            <a:avLst/>
-          </a:prstGeom>
-          <a:solidFill>
-            <a:srgbClr val="065A82"/>
-          </a:solidFill>
-          <a:ln/>
-        </p:spPr>
-      </p:sp>
-      <p:sp>
-        <p:nvSpPr>
-          <p:cNvPr id="3" name="Shape 1"/>
-          <p:cNvSpPr/>
-          <p:nvPr/>
-        </p:nvSpPr>
-        <p:spPr>
-          <a:xfrm>
-            <a:off x="0" y="960120"/>
-            <a:ext cx="9144000" cy="54864"/>
-          </a:xfrm>
-          <a:prstGeom prst="rect">
-            <a:avLst/>
-          </a:prstGeom>
-          <a:solidFill>
-            <a:srgbClr val="02C39A"/>
-          </a:solidFill>
-          <a:ln/>
-        </p:spPr>
-      </p:sp>
-      <p:sp>
-        <p:nvSpPr>
-          <p:cNvPr id="4" name="Text 2"/>
-          <p:cNvSpPr/>
-          <p:nvPr/>
-        </p:nvSpPr>
-        <p:spPr>
-          <a:xfrm>
-            <a:off x="457200" y="164592"/>
-            <a:ext cx="8229600" cy="502920"/>
-          </a:xfrm>
-          <a:prstGeom prst="rect">
-            <a:avLst/>
-          </a:prstGeom>
-          <a:noFill/>
-          <a:ln/>
-        </p:spPr>
-        <p:txBody>
-          <a:bodyPr wrap="square" lIns="0" tIns="0" rIns="0" bIns="0" rtlCol="0" anchor="ctr"/>
-          <a:lstStyle/>
-          <a:p>
-            <a:pPr indent="0" marL="0">
-              <a:buNone/>
-            </a:pPr>
-            <a:r>
-              <a:rPr lang="en-US" sz="2800" b="1" dirty="0">
-                <a:solidFill>
-                  <a:srgbClr val="FFFFFF"/>
-                </a:solidFill>
-                <a:latin typeface="Arial" pitchFamily="34" charset="0"/>
-                <a:ea typeface="Arial" pitchFamily="34" charset="-122"/>
-                <a:cs typeface="Arial" pitchFamily="34" charset="-120"/>
-              </a:rPr>
-              <a:t>问题概览</a:t>
-            </a:r>
-            <a:endParaRPr lang="en-US" sz="2800" dirty="0"/>
-          </a:p>
-        </p:txBody>
-      </p:sp>
-      <p:sp>
-        <p:nvSpPr>
-          <p:cNvPr id="5" name="Text 3"/>
-          <p:cNvSpPr/>
-          <p:nvPr/>
-        </p:nvSpPr>
-        <p:spPr>
-          <a:xfrm>
-            <a:off x="457200" y="621792"/>
-            <a:ext cx="8229600" cy="274320"/>
-          </a:xfrm>
-          <a:prstGeom prst="rect">
-            <a:avLst/>
-          </a:prstGeom>
-          <a:noFill/>
-          <a:ln/>
-        </p:spPr>
-        <p:txBody>
-          <a:bodyPr wrap="square" lIns="0" tIns="0" rIns="0" bIns="0" rtlCol="0" anchor="ctr"/>
-          <a:lstStyle/>
-          <a:p>
-            <a:pPr indent="0" marL="0">
-              <a:buNone/>
-            </a:pPr>
-            <a:r>
-              <a:rPr lang="en-US" sz="1200" dirty="0">
-                <a:solidFill>
-                  <a:srgbClr val="CADCFC"/>
-                </a:solidFill>
-                <a:latin typeface="Arial" pitchFamily="34" charset="0"/>
-                <a:ea typeface="Arial" pitchFamily="34" charset="-122"/>
-                <a:cs typeface="Arial" pitchFamily="34" charset="-120"/>
-              </a:rPr>
-              <a:t>预测市场无法成为真正金融基础设施的三大缺口 · 约 30–60 秒</a:t>
-            </a:r>
-            <a:endParaRPr lang="en-US" sz="1200" dirty="0"/>
-          </a:p>
-        </p:txBody>
-      </p:sp>
-      <p:sp>
-        <p:nvSpPr>
-          <p:cNvPr id="6" name="Shape 4"/>
-          <p:cNvSpPr/>
-          <p:nvPr/>
-        </p:nvSpPr>
-        <p:spPr>
-          <a:xfrm>
-            <a:off x="365760" y="1234440"/>
-            <a:ext cx="73152" cy="914400"/>
-          </a:xfrm>
-          <a:prstGeom prst="rect">
-            <a:avLst/>
-          </a:prstGeom>
-          <a:solidFill>
-            <a:srgbClr val="F96167"/>
-          </a:solidFill>
-          <a:ln/>
-        </p:spPr>
-      </p:sp>
-      <p:sp>
-        <p:nvSpPr>
-          <p:cNvPr id="7" name="Text 5"/>
-          <p:cNvSpPr/>
-          <p:nvPr/>
-        </p:nvSpPr>
-        <p:spPr>
-          <a:xfrm>
-            <a:off x="594360" y="1280160"/>
-            <a:ext cx="8046720" cy="320040"/>
-          </a:xfrm>
-          <a:prstGeom prst="rect">
-            <a:avLst/>
-          </a:prstGeom>
-          <a:noFill/>
-          <a:ln/>
-        </p:spPr>
-        <p:txBody>
-          <a:bodyPr wrap="square" lIns="0" tIns="0" rIns="0" bIns="0" rtlCol="0" anchor="ctr"/>
-          <a:lstStyle/>
-          <a:p>
-            <a:pPr indent="0" marL="0">
-              <a:buNone/>
-            </a:pPr>
-            <a:r>
-              <a:rPr lang="en-US" sz="1400" b="1" dirty="0">
-                <a:solidFill>
-                  <a:srgbClr val="065A82"/>
-                </a:solidFill>
-                <a:latin typeface="Arial" pitchFamily="34" charset="0"/>
-                <a:ea typeface="Arial" pitchFamily="34" charset="-122"/>
-                <a:cs typeface="Arial" pitchFamily="34" charset="-120"/>
-              </a:rPr>
-              <a:t>二元碎片化 — 无法表达连续概率</a:t>
-            </a:r>
-            <a:endParaRPr lang="en-US" sz="1400" dirty="0"/>
-          </a:p>
-        </p:txBody>
-      </p:sp>
-      <p:sp>
-        <p:nvSpPr>
-          <p:cNvPr id="8" name="Text 6"/>
-          <p:cNvSpPr/>
-          <p:nvPr/>
-        </p:nvSpPr>
-        <p:spPr>
-          <a:xfrm>
-            <a:off x="594360" y="1618488"/>
-            <a:ext cx="8046720" cy="502920"/>
-          </a:xfrm>
-          <a:prstGeom prst="rect">
-            <a:avLst/>
-          </a:prstGeom>
-          <a:noFill/>
-          <a:ln/>
-        </p:spPr>
-        <p:txBody>
-          <a:bodyPr wrap="square" lIns="0" tIns="0" rIns="0" bIns="0" rtlCol="0" anchor="ctr"/>
-          <a:lstStyle/>
-          <a:p>
-            <a:pPr indent="0" marL="0">
-              <a:buNone/>
-            </a:pPr>
-            <a:r>
-              <a:rPr lang="en-US" sz="1100" dirty="0">
-                <a:solidFill>
-                  <a:srgbClr val="1E293B"/>
-                </a:solidFill>
-                <a:latin typeface="Arial" pitchFamily="34" charset="0"/>
-                <a:ea typeface="Arial" pitchFamily="34" charset="-122"/>
-                <a:cs typeface="Arial" pitchFamily="34" charset="-120"/>
-              </a:rPr>
-              <a:t>Yes/No 无法为 CPI 区间、选举份额、进球数定价 — 机构无法对冲区间风险</a:t>
-            </a:r>
-            <a:endParaRPr lang="en-US" sz="1100" dirty="0"/>
-          </a:p>
-        </p:txBody>
-      </p:sp>
-      <p:sp>
-        <p:nvSpPr>
-          <p:cNvPr id="9" name="Shape 7"/>
-          <p:cNvSpPr/>
-          <p:nvPr/>
-        </p:nvSpPr>
-        <p:spPr>
-          <a:xfrm>
-            <a:off x="365760" y="2377440"/>
-            <a:ext cx="73152" cy="914400"/>
-          </a:xfrm>
-          <a:prstGeom prst="rect">
-            <a:avLst/>
-          </a:prstGeom>
-          <a:solidFill>
-            <a:srgbClr val="F96167"/>
-          </a:solidFill>
-          <a:ln/>
-        </p:spPr>
-      </p:sp>
-      <p:sp>
-        <p:nvSpPr>
-          <p:cNvPr id="10" name="Text 8"/>
-          <p:cNvSpPr/>
-          <p:nvPr/>
-        </p:nvSpPr>
-        <p:spPr>
-          <a:xfrm>
-            <a:off x="594360" y="2423160"/>
-            <a:ext cx="8046720" cy="320040"/>
-          </a:xfrm>
-          <a:prstGeom prst="rect">
-            <a:avLst/>
-          </a:prstGeom>
-          <a:noFill/>
-          <a:ln/>
-        </p:spPr>
-        <p:txBody>
-          <a:bodyPr wrap="square" lIns="0" tIns="0" rIns="0" bIns="0" rtlCol="0" anchor="ctr"/>
-          <a:lstStyle/>
-          <a:p>
-            <a:pPr indent="0" marL="0">
-              <a:buNone/>
-            </a:pPr>
-            <a:r>
-              <a:rPr lang="en-US" sz="1400" b="1" dirty="0">
-                <a:solidFill>
-                  <a:srgbClr val="065A82"/>
-                </a:solidFill>
-                <a:latin typeface="Arial" pitchFamily="34" charset="0"/>
-                <a:ea typeface="Arial" pitchFamily="34" charset="-122"/>
-                <a:cs typeface="Arial" pitchFamily="34" charset="-120"/>
-              </a:rPr>
-              <a:t>带单无审计 — KOL 战绩可伪造</a:t>
-            </a:r>
-            <a:endParaRPr lang="en-US" sz="1400" dirty="0"/>
-          </a:p>
-        </p:txBody>
-      </p:sp>
-      <p:sp>
-        <p:nvSpPr>
-          <p:cNvPr id="11" name="Text 9"/>
-          <p:cNvSpPr/>
-          <p:nvPr/>
-        </p:nvSpPr>
-        <p:spPr>
-          <a:xfrm>
-            <a:off x="594360" y="2761488"/>
-            <a:ext cx="8046720" cy="502920"/>
-          </a:xfrm>
-          <a:prstGeom prst="rect">
-            <a:avLst/>
-          </a:prstGeom>
-          <a:noFill/>
-          <a:ln/>
-        </p:spPr>
-        <p:txBody>
-          <a:bodyPr wrap="square" lIns="0" tIns="0" rIns="0" bIns="0" rtlCol="0" anchor="ctr"/>
-          <a:lstStyle/>
-          <a:p>
-            <a:pPr indent="0" marL="0">
-              <a:buNone/>
-            </a:pPr>
-            <a:r>
-              <a:rPr lang="en-US" sz="1100" dirty="0">
-                <a:solidFill>
-                  <a:srgbClr val="1E293B"/>
-                </a:solidFill>
-                <a:latin typeface="Arial" pitchFamily="34" charset="0"/>
-                <a:ea typeface="Arial" pitchFamily="34" charset="-122"/>
-                <a:cs typeface="Arial" pitchFamily="34" charset="-120"/>
-              </a:rPr>
-              <a:t>KOL 战绩可伪造 — 订阅者无法事后验证付费信号</a:t>
-            </a:r>
-            <a:endParaRPr lang="en-US" sz="1100" dirty="0"/>
-          </a:p>
-        </p:txBody>
-      </p:sp>
-      <p:sp>
-        <p:nvSpPr>
-          <p:cNvPr id="12" name="Shape 10"/>
-          <p:cNvSpPr/>
-          <p:nvPr/>
-        </p:nvSpPr>
-        <p:spPr>
-          <a:xfrm>
-            <a:off x="365760" y="3520440"/>
-            <a:ext cx="73152" cy="914400"/>
-          </a:xfrm>
-          <a:prstGeom prst="rect">
-            <a:avLst/>
-          </a:prstGeom>
-          <a:solidFill>
-            <a:srgbClr val="F96167"/>
-          </a:solidFill>
-          <a:ln/>
-        </p:spPr>
-      </p:sp>
-      <p:sp>
-        <p:nvSpPr>
-          <p:cNvPr id="13" name="Text 11"/>
-          <p:cNvSpPr/>
-          <p:nvPr/>
-        </p:nvSpPr>
-        <p:spPr>
-          <a:xfrm>
-            <a:off x="594360" y="3566160"/>
-            <a:ext cx="8046720" cy="320040"/>
-          </a:xfrm>
-          <a:prstGeom prst="rect">
-            <a:avLst/>
-          </a:prstGeom>
-          <a:noFill/>
-          <a:ln/>
-        </p:spPr>
-        <p:txBody>
-          <a:bodyPr wrap="square" lIns="0" tIns="0" rIns="0" bIns="0" rtlCol="0" anchor="ctr"/>
-          <a:lstStyle/>
-          <a:p>
-            <a:pPr indent="0" marL="0">
-              <a:buNone/>
-            </a:pPr>
-            <a:r>
-              <a:rPr lang="en-US" sz="1400" b="1" dirty="0">
-                <a:solidFill>
-                  <a:srgbClr val="065A82"/>
-                </a:solidFill>
-                <a:latin typeface="Arial" pitchFamily="34" charset="0"/>
-                <a:ea typeface="Arial" pitchFamily="34" charset="-122"/>
-                <a:cs typeface="Arial" pitchFamily="34" charset="-120"/>
-              </a:rPr>
-              <a:t>结算割裂 — 博弈与洞察缺乏单一真相源</a:t>
-            </a:r>
-            <a:endParaRPr lang="en-US" sz="1400" dirty="0"/>
-          </a:p>
-        </p:txBody>
-      </p:sp>
-      <p:sp>
-        <p:nvSpPr>
-          <p:cNvPr id="14" name="Text 12"/>
-          <p:cNvSpPr/>
-          <p:nvPr/>
-        </p:nvSpPr>
-        <p:spPr>
-          <a:xfrm>
-            <a:off x="594360" y="3904488"/>
-            <a:ext cx="8046720" cy="502920"/>
-          </a:xfrm>
-          <a:prstGeom prst="rect">
-            <a:avLst/>
-          </a:prstGeom>
-          <a:noFill/>
-          <a:ln/>
-        </p:spPr>
-        <p:txBody>
-          <a:bodyPr wrap="square" lIns="0" tIns="0" rIns="0" bIns="0" rtlCol="0" anchor="ctr"/>
-          <a:lstStyle/>
-          <a:p>
-            <a:pPr indent="0" marL="0">
-              <a:buNone/>
-            </a:pPr>
-            <a:r>
-              <a:rPr lang="en-US" sz="1100" dirty="0">
-                <a:solidFill>
-                  <a:srgbClr val="1E293B"/>
-                </a:solidFill>
-                <a:latin typeface="Arial" pitchFamily="34" charset="0"/>
-                <a:ea typeface="Arial" pitchFamily="34" charset="-122"/>
-                <a:cs typeface="Arial" pitchFamily="34" charset="-120"/>
-              </a:rPr>
-              <a:t>下注与付费分析使用不同 Oracle — 同一事件无法聚合到单一根节点</a:t>
-            </a:r>
-            <a:endParaRPr lang="en-US" sz="1100" dirty="0"/>
-          </a:p>
-        </p:txBody>
-      </p:sp>
-      <p:sp>
-        <p:nvSpPr>
-          <p:cNvPr id="15" name="Shape 13"/>
-          <p:cNvSpPr/>
-          <p:nvPr/>
-        </p:nvSpPr>
-        <p:spPr>
-          <a:xfrm>
-            <a:off x="365760" y="4663440"/>
-            <a:ext cx="73152" cy="914400"/>
-          </a:xfrm>
-          <a:prstGeom prst="rect">
-            <a:avLst/>
-          </a:prstGeom>
-          <a:solidFill>
-            <a:srgbClr val="F96167">
-              <a:alpha val="0"/>
-            </a:srgbClr>
-          </a:solidFill>
-          <a:ln/>
-        </p:spPr>
-      </p:sp>
-      <p:sp>
-        <p:nvSpPr>
-          <p:cNvPr id="16" name="Text 14"/>
-          <p:cNvSpPr/>
-          <p:nvPr/>
-        </p:nvSpPr>
-        <p:spPr>
-          <a:xfrm>
-            <a:off x="594360" y="4709160"/>
-            <a:ext cx="8046720" cy="320040"/>
-          </a:xfrm>
-          <a:prstGeom prst="rect">
-            <a:avLst/>
-          </a:prstGeom>
-          <a:noFill/>
-          <a:ln/>
-        </p:spPr>
-        <p:txBody>
-          <a:bodyPr wrap="square" lIns="0" tIns="0" rIns="0" bIns="0" rtlCol="0" anchor="ctr"/>
-          <a:lstStyle/>
-          <a:p>
-            <a:pPr indent="0" marL="0">
-              <a:buNone/>
-            </a:pPr>
-            <a:r>
-              <a:rPr lang="en-US" sz="1400" b="1" dirty="0">
-                <a:solidFill>
-                  <a:srgbClr val="065A82"/>
-                </a:solidFill>
-                <a:latin typeface="Arial" pitchFamily="34" charset="0"/>
-                <a:ea typeface="Arial" pitchFamily="34" charset="-122"/>
-                <a:cs typeface="Arial" pitchFamily="34" charset="-120"/>
-              </a:rPr>
-              <a:t/>
-            </a:r>
-            <a:endParaRPr lang="en-US" sz="1400" dirty="0"/>
-          </a:p>
-        </p:txBody>
-      </p:sp>
-      <p:sp>
-        <p:nvSpPr>
-          <p:cNvPr id="17" name="Text 15"/>
-          <p:cNvSpPr/>
-          <p:nvPr/>
-        </p:nvSpPr>
-        <p:spPr>
-          <a:xfrm>
-            <a:off x="594360" y="5047488"/>
-            <a:ext cx="8046720" cy="502920"/>
-          </a:xfrm>
-          <a:prstGeom prst="rect">
-            <a:avLst/>
-          </a:prstGeom>
-          <a:noFill/>
-          <a:ln/>
-        </p:spPr>
-        <p:txBody>
-          <a:bodyPr wrap="square" lIns="0" tIns="0" rIns="0" bIns="0" rtlCol="0" anchor="ctr"/>
-          <a:lstStyle/>
-          <a:p>
-            <a:pPr indent="0" marL="0">
-              <a:buNone/>
-            </a:pPr>
-            <a:r>
-              <a:rPr lang="en-US" sz="1100" dirty="0">
-                <a:solidFill>
-                  <a:srgbClr val="1E293B"/>
-                </a:solidFill>
-                <a:latin typeface="Arial" pitchFamily="34" charset="0"/>
-                <a:ea typeface="Arial" pitchFamily="34" charset="-122"/>
-                <a:cs typeface="Arial" pitchFamily="34" charset="-120"/>
-              </a:rPr>
-              <a:t/>
-            </a:r>
-            <a:endParaRPr lang="en-US" sz="1100" dirty="0"/>
-          </a:p>
-        </p:txBody>
-      </p:sp>
-      <p:sp>
-        <p:nvSpPr>
-          <p:cNvPr id="18" name="Shape 16"/>
-          <p:cNvSpPr/>
-          <p:nvPr/>
-        </p:nvSpPr>
-        <p:spPr>
-          <a:xfrm>
-            <a:off x="365760" y="4434840"/>
-            <a:ext cx="8412480" cy="502920"/>
-          </a:xfrm>
-          <a:prstGeom prst="rect">
-            <a:avLst/>
-          </a:prstGeom>
-          <a:solidFill>
-            <a:srgbClr val="21295C"/>
-          </a:solidFill>
-          <a:ln/>
-        </p:spPr>
-      </p:sp>
-      <p:sp>
-        <p:nvSpPr>
-          <p:cNvPr id="19" name="Text 17"/>
-          <p:cNvSpPr/>
-          <p:nvPr/>
-        </p:nvSpPr>
-        <p:spPr>
-          <a:xfrm>
-            <a:off x="502920" y="4526280"/>
-            <a:ext cx="8138160" cy="365760"/>
-          </a:xfrm>
-          <a:prstGeom prst="rect">
-            <a:avLst/>
-          </a:prstGeom>
-          <a:noFill/>
-          <a:ln/>
-        </p:spPr>
-        <p:txBody>
-          <a:bodyPr wrap="square" lIns="0" tIns="0" rIns="0" bIns="0" rtlCol="0" anchor="ctr"/>
-          <a:lstStyle/>
-          <a:p>
-            <a:pPr indent="0" marL="0">
-              <a:buNone/>
-            </a:pPr>
-            <a:r>
-              <a:rPr lang="en-US" sz="1100" b="1" dirty="0">
-                <a:solidFill>
-                  <a:srgbClr val="02C39A"/>
-                </a:solidFill>
-                <a:latin typeface="Arial" pitchFamily="34" charset="0"/>
-                <a:ea typeface="Arial" pitchFamily="34" charset="-122"/>
-                <a:cs typeface="Arial" pitchFamily="34" charset="-120"/>
-              </a:rPr>
-              <a:t>视频引导：预测市场需从「结果博彩」升级为「概率分布衍生品」— X-Market 在 Sui 上重建这一范式</a:t>
-            </a:r>
-            <a:endParaRPr lang="en-US" sz="1100" dirty="0"/>
-          </a:p>
-        </p:txBody>
-      </p:sp>
-    </p:spTree>
-  </p:cSld>
-  <p:clrMapOvr>
-    <a:masterClrMapping/>
-  </p:clrMapOvr>
-</p:sld>
-</file>
-
-<file path=ppt/slides/slide18.xml><?xml version="1.0" encoding="utf-8"?>
-<p:sld xmlns:a="http://schemas.openxmlformats.org/drawingml/2006/main" xmlns:r="http://schemas.openxmlformats.org/officeDocument/2006/relationships" xmlns:p="http://schemas.openxmlformats.org/presentationml/2006/main">
-  <p:cSld name="Slide 13">
-    <p:bg>
-      <p:bgPr>
-        <a:solidFill>
-          <a:srgbClr val="F0F7FA"/>
-        </a:solidFill>
-      </p:bgPr>
-    </p:bg>
-    <p:spTree>
-      <p:nvGrpSpPr>
-        <p:cNvPr id="1" name=""/>
-        <p:cNvGrpSpPr/>
-        <p:nvPr/>
-      </p:nvGrpSpPr>
-      <p:grpSpPr>
-        <a:xfrm>
-          <a:off x="0" y="0"/>
-          <a:ext cx="0" cy="0"/>
-          <a:chOff x="0" y="0"/>
-          <a:chExt cx="0" cy="0"/>
-        </a:xfrm>
-      </p:grpSpPr>
-      <p:sp>
-        <p:nvSpPr>
-          <p:cNvPr id="2" name="Shape 0"/>
-          <p:cNvSpPr/>
-          <p:nvPr/>
-        </p:nvSpPr>
-        <p:spPr>
-          <a:xfrm>
-            <a:off x="0" y="0"/>
-            <a:ext cx="9144000" cy="960120"/>
-          </a:xfrm>
-          <a:prstGeom prst="rect">
-            <a:avLst/>
-          </a:prstGeom>
-          <a:solidFill>
-            <a:srgbClr val="065A82"/>
-          </a:solidFill>
-          <a:ln/>
-        </p:spPr>
-      </p:sp>
-      <p:sp>
-        <p:nvSpPr>
-          <p:cNvPr id="3" name="Shape 1"/>
-          <p:cNvSpPr/>
-          <p:nvPr/>
-        </p:nvSpPr>
-        <p:spPr>
-          <a:xfrm>
-            <a:off x="0" y="960120"/>
-            <a:ext cx="9144000" cy="54864"/>
-          </a:xfrm>
-          <a:prstGeom prst="rect">
-            <a:avLst/>
-          </a:prstGeom>
-          <a:solidFill>
-            <a:srgbClr val="02C39A"/>
-          </a:solidFill>
-          <a:ln/>
-        </p:spPr>
-      </p:sp>
-      <p:sp>
-        <p:nvSpPr>
-          <p:cNvPr id="4" name="Text 2"/>
-          <p:cNvSpPr/>
-          <p:nvPr/>
-        </p:nvSpPr>
-        <p:spPr>
-          <a:xfrm>
-            <a:off x="457200" y="164592"/>
-            <a:ext cx="8229600" cy="502920"/>
-          </a:xfrm>
-          <a:prstGeom prst="rect">
-            <a:avLst/>
-          </a:prstGeom>
-          <a:noFill/>
-          <a:ln/>
-        </p:spPr>
-        <p:txBody>
-          <a:bodyPr wrap="square" lIns="0" tIns="0" rIns="0" bIns="0" rtlCol="0" anchor="ctr"/>
-          <a:lstStyle/>
-          <a:p>
-            <a:pPr indent="0" marL="0">
-              <a:buNone/>
-            </a:pPr>
-            <a:r>
-              <a:rPr lang="en-US" sz="2800" b="1" dirty="0">
-                <a:solidFill>
-                  <a:srgbClr val="FFFFFF"/>
-                </a:solidFill>
-                <a:latin typeface="Arial" pitchFamily="34" charset="0"/>
-                <a:ea typeface="Arial" pitchFamily="34" charset="-122"/>
-                <a:cs typeface="Arial" pitchFamily="34" charset="-120"/>
-              </a:rPr>
-              <a:t>结论与展望</a:t>
-            </a:r>
-            <a:endParaRPr lang="en-US" sz="2800" dirty="0"/>
-          </a:p>
-        </p:txBody>
-      </p:sp>
-      <p:sp>
-        <p:nvSpPr>
-          <p:cNvPr id="5" name="Text 3"/>
-          <p:cNvSpPr/>
-          <p:nvPr/>
-        </p:nvSpPr>
-        <p:spPr>
-          <a:xfrm>
-            <a:off x="457200" y="621792"/>
-            <a:ext cx="8229600" cy="274320"/>
-          </a:xfrm>
-          <a:prstGeom prst="rect">
-            <a:avLst/>
-          </a:prstGeom>
-          <a:noFill/>
-          <a:ln/>
-        </p:spPr>
-        <p:txBody>
-          <a:bodyPr wrap="square" lIns="0" tIns="0" rIns="0" bIns="0" rtlCol="0" anchor="ctr"/>
-          <a:lstStyle/>
-          <a:p>
-            <a:pPr indent="0" marL="0">
-              <a:buNone/>
-            </a:pPr>
-            <a:r>
-              <a:rPr lang="en-US" sz="1200" dirty="0">
-                <a:solidFill>
-                  <a:srgbClr val="CADCFC"/>
-                </a:solidFill>
-                <a:latin typeface="Arial" pitchFamily="34" charset="0"/>
-                <a:ea typeface="Arial" pitchFamily="34" charset="-122"/>
-                <a:cs typeface="Arial" pitchFamily="34" charset="-120"/>
-              </a:rPr>
-              <a:t>从 Testnet 验证到主网基础设施 · 约 60–90 秒</a:t>
-            </a:r>
-            <a:endParaRPr lang="en-US" sz="1200" dirty="0"/>
-          </a:p>
-        </p:txBody>
-      </p:sp>
-      <p:sp>
-        <p:nvSpPr>
-          <p:cNvPr id="6" name="Shape 4"/>
-          <p:cNvSpPr/>
-          <p:nvPr/>
-        </p:nvSpPr>
-        <p:spPr>
-          <a:xfrm>
-            <a:off x="365760" y="1188720"/>
-            <a:ext cx="4023360" cy="1691640"/>
-          </a:xfrm>
-          <a:prstGeom prst="rect">
-            <a:avLst/>
-          </a:prstGeom>
-          <a:solidFill>
-            <a:srgbClr val="FFFFFF"/>
-          </a:solidFill>
-          <a:ln w="12700">
-            <a:solidFill>
-              <a:srgbClr val="E2E8F0"/>
-            </a:solidFill>
-            <a:prstDash val="solid"/>
-          </a:ln>
-          <a:effectLst>
-            <a:outerShdw sx="100000" sy="100000" kx="0" ky="0" algn="bl" rotWithShape="0" blurRad="50800" dist="25400" dir="8100000">
-              <a:srgbClr val="000000">
-                <a:alpha val="12000"/>
-              </a:srgbClr>
-            </a:outerShdw>
-          </a:effectLst>
-        </p:spPr>
-      </p:sp>
-      <p:sp>
-        <p:nvSpPr>
-          <p:cNvPr id="7" name="Shape 5"/>
-          <p:cNvSpPr/>
-          <p:nvPr/>
-        </p:nvSpPr>
-        <p:spPr>
-          <a:xfrm>
-            <a:off x="548640" y="1371600"/>
-            <a:ext cx="502920" cy="502920"/>
-          </a:xfrm>
-          <a:prstGeom prst="ellipse">
-            <a:avLst/>
-          </a:prstGeom>
-          <a:solidFill>
-            <a:srgbClr val="02C39A"/>
-          </a:solidFill>
-          <a:ln/>
-        </p:spPr>
-      </p:sp>
-      <p:sp>
-        <p:nvSpPr>
-          <p:cNvPr id="8" name="Text 6"/>
-          <p:cNvSpPr/>
-          <p:nvPr/>
-        </p:nvSpPr>
-        <p:spPr>
-          <a:xfrm>
-            <a:off x="548640" y="1371600"/>
-            <a:ext cx="502920" cy="502920"/>
-          </a:xfrm>
-          <a:prstGeom prst="rect">
-            <a:avLst/>
-          </a:prstGeom>
-          <a:noFill/>
-          <a:ln/>
-        </p:spPr>
-        <p:txBody>
-          <a:bodyPr wrap="square" lIns="0" tIns="0" rIns="0" bIns="0" rtlCol="0" anchor="ctr"/>
-          <a:lstStyle/>
-          <a:p>
-            <a:pPr algn="ctr" indent="0" marL="0">
-              <a:buNone/>
-            </a:pPr>
-            <a:r>
-              <a:rPr lang="en-US" sz="1600" dirty="0">
-                <a:solidFill>
-                  <a:srgbClr val="000000"/>
-                </a:solidFill>
-              </a:rPr>
-              <a:t>✅</a:t>
-            </a:r>
-            <a:endParaRPr lang="en-US" sz="1600" dirty="0"/>
-          </a:p>
-        </p:txBody>
-      </p:sp>
-      <p:sp>
-        <p:nvSpPr>
-          <p:cNvPr id="9" name="Text 7"/>
-          <p:cNvSpPr/>
-          <p:nvPr/>
-        </p:nvSpPr>
-        <p:spPr>
-          <a:xfrm>
-            <a:off x="1143000" y="1353312"/>
-            <a:ext cx="3108960" cy="365760"/>
-          </a:xfrm>
-          <a:prstGeom prst="rect">
-            <a:avLst/>
-          </a:prstGeom>
-          <a:noFill/>
-          <a:ln/>
-        </p:spPr>
-        <p:txBody>
-          <a:bodyPr wrap="square" lIns="0" tIns="0" rIns="0" bIns="0" rtlCol="0" anchor="ctr"/>
-          <a:lstStyle/>
-          <a:p>
-            <a:pPr indent="0" marL="0">
-              <a:buNone/>
-            </a:pPr>
-            <a:r>
-              <a:rPr lang="en-US" sz="1400" b="1" dirty="0">
-                <a:solidFill>
-                  <a:srgbClr val="065A82"/>
-                </a:solidFill>
-                <a:latin typeface="Arial" pitchFamily="34" charset="0"/>
-                <a:ea typeface="Arial" pitchFamily="34" charset="-122"/>
-                <a:cs typeface="Arial" pitchFamily="34" charset="-120"/>
-              </a:rPr>
-              <a:t>核心结论</a:t>
-            </a:r>
-            <a:endParaRPr lang="en-US" sz="1400" dirty="0"/>
-          </a:p>
-        </p:txBody>
-      </p:sp>
-      <p:sp>
-        <p:nvSpPr>
-          <p:cNvPr id="10" name="Text 8"/>
-          <p:cNvSpPr/>
-          <p:nvPr/>
-        </p:nvSpPr>
-        <p:spPr>
-          <a:xfrm>
-            <a:off x="548640" y="1874520"/>
-            <a:ext cx="3657600" cy="914400"/>
-          </a:xfrm>
-          <a:prstGeom prst="rect">
-            <a:avLst/>
-          </a:prstGeom>
-          <a:noFill/>
-          <a:ln/>
-        </p:spPr>
-        <p:txBody>
-          <a:bodyPr wrap="square" rtlCol="0" anchor="t"/>
-          <a:lstStyle/>
-          <a:p>
-            <a:pPr marL="342900" indent="-342900">
-              <a:buSzPct val="100000"/>
-              <a:buChar char="•"/>
-            </a:pPr>
-            <a:r>
-              <a:rPr lang="en-US" sz="1000" dirty="0">
-                <a:solidFill>
-                  <a:srgbClr val="1E293B"/>
-                </a:solidFill>
-                <a:latin typeface="Arial" pitchFamily="34" charset="0"/>
-                <a:ea typeface="Arial" pitchFamily="34" charset="-122"/>
-                <a:cs typeface="Arial" pitchFamily="34" charset="-120"/>
-              </a:rPr>
-              <a:t>预测市场需从博彩升级为 PDF 概率衍生品</a:t>
-            </a:r>
-            <a:endParaRPr lang="en-US" sz="1000" dirty="0"/>
-          </a:p>
-          <a:p>
-            <a:pPr marL="342900" indent="-342900">
-              <a:buSzPct val="100000"/>
-              <a:buChar char="•"/>
-            </a:pPr>
-            <a:r>
-              <a:rPr lang="en-US" sz="1000" dirty="0">
-                <a:solidFill>
-                  <a:srgbClr val="1E293B"/>
-                </a:solidFill>
-                <a:latin typeface="Arial" pitchFamily="34" charset="0"/>
-                <a:ea typeface="Arial" pitchFamily="34" charset="-122"/>
-                <a:cs typeface="Arial" pitchFamily="34" charset="-120"/>
-              </a:rPr>
-              <a:t>双模块共用 EventRoot · 统一 Oracle 结算真相</a:t>
-            </a:r>
-            <a:endParaRPr lang="en-US" sz="1000" dirty="0"/>
-          </a:p>
-          <a:p>
-            <a:pPr marL="342900" indent="-342900">
-              <a:buSzPct val="100000"/>
-              <a:buChar char="•"/>
-            </a:pPr>
-            <a:r>
-              <a:rPr lang="en-US" sz="1000" dirty="0">
-                <a:solidFill>
-                  <a:srgbClr val="1E293B"/>
-                </a:solidFill>
-                <a:latin typeface="Arial" pitchFamily="34" charset="0"/>
-                <a:ea typeface="Arial" pitchFamily="34" charset="-122"/>
-                <a:cs typeface="Arial" pitchFamily="34" charset="-120"/>
-              </a:rPr>
-              <a:t>链上 PDF 定价 + Seal 强制审计 · 四方共赢生态</a:t>
-            </a:r>
-            <a:endParaRPr lang="en-US" sz="1000" dirty="0"/>
-          </a:p>
-          <a:p>
-            <a:pPr marL="342900" indent="-342900">
-              <a:buSzPct val="100000"/>
-              <a:buChar char="•"/>
-            </a:pPr>
-            <a:r>
-              <a:rPr lang="en-US" sz="1000" dirty="0">
-                <a:solidFill>
-                  <a:srgbClr val="1E293B"/>
-                </a:solidFill>
-                <a:latin typeface="Arial" pitchFamily="34" charset="0"/>
-                <a:ea typeface="Arial" pitchFamily="34" charset="-122"/>
-                <a:cs typeface="Arial" pitchFamily="34" charset="-120"/>
-              </a:rPr>
-              <a:t>Testnet v2 全栈已验证，非概念阶段</a:t>
-            </a:r>
-            <a:endParaRPr lang="en-US" sz="1000" dirty="0"/>
-          </a:p>
-        </p:txBody>
-      </p:sp>
-      <p:sp>
-        <p:nvSpPr>
-          <p:cNvPr id="11" name="Shape 9"/>
-          <p:cNvSpPr/>
-          <p:nvPr/>
-        </p:nvSpPr>
-        <p:spPr>
-          <a:xfrm>
-            <a:off x="4754880" y="1188720"/>
-            <a:ext cx="4023360" cy="1691640"/>
-          </a:xfrm>
-          <a:prstGeom prst="rect">
-            <a:avLst/>
-          </a:prstGeom>
-          <a:solidFill>
-            <a:srgbClr val="FFFFFF"/>
-          </a:solidFill>
-          <a:ln w="12700">
-            <a:solidFill>
-              <a:srgbClr val="E2E8F0"/>
-            </a:solidFill>
-            <a:prstDash val="solid"/>
-          </a:ln>
-          <a:effectLst>
-            <a:outerShdw sx="100000" sy="100000" kx="0" ky="0" algn="bl" rotWithShape="0" blurRad="50800" dist="25400" dir="8100000">
-              <a:srgbClr val="000000">
-                <a:alpha val="12000"/>
-              </a:srgbClr>
-            </a:outerShdw>
-          </a:effectLst>
-        </p:spPr>
-      </p:sp>
-      <p:sp>
-        <p:nvSpPr>
-          <p:cNvPr id="12" name="Shape 10"/>
-          <p:cNvSpPr/>
-          <p:nvPr/>
-        </p:nvSpPr>
-        <p:spPr>
-          <a:xfrm>
-            <a:off x="4937760" y="1371600"/>
-            <a:ext cx="502920" cy="502920"/>
-          </a:xfrm>
-          <a:prstGeom prst="ellipse">
-            <a:avLst/>
-          </a:prstGeom>
-          <a:solidFill>
-            <a:srgbClr val="1C7293"/>
-          </a:solidFill>
-          <a:ln/>
-        </p:spPr>
-      </p:sp>
-      <p:sp>
-        <p:nvSpPr>
-          <p:cNvPr id="13" name="Text 11"/>
-          <p:cNvSpPr/>
-          <p:nvPr/>
-        </p:nvSpPr>
-        <p:spPr>
-          <a:xfrm>
-            <a:off x="4937760" y="1371600"/>
-            <a:ext cx="502920" cy="502920"/>
-          </a:xfrm>
-          <a:prstGeom prst="rect">
-            <a:avLst/>
-          </a:prstGeom>
-          <a:noFill/>
-          <a:ln/>
-        </p:spPr>
-        <p:txBody>
-          <a:bodyPr wrap="square" lIns="0" tIns="0" rIns="0" bIns="0" rtlCol="0" anchor="ctr"/>
-          <a:lstStyle/>
-          <a:p>
-            <a:pPr algn="ctr" indent="0" marL="0">
-              <a:buNone/>
-            </a:pPr>
-            <a:r>
-              <a:rPr lang="en-US" sz="1600" dirty="0">
-                <a:solidFill>
-                  <a:srgbClr val="000000"/>
-                </a:solidFill>
-              </a:rPr>
-              <a:t>🔬</a:t>
-            </a:r>
-            <a:endParaRPr lang="en-US" sz="1600" dirty="0"/>
-          </a:p>
-        </p:txBody>
-      </p:sp>
-      <p:sp>
-        <p:nvSpPr>
-          <p:cNvPr id="14" name="Text 12"/>
-          <p:cNvSpPr/>
-          <p:nvPr/>
-        </p:nvSpPr>
-        <p:spPr>
-          <a:xfrm>
-            <a:off x="5532120" y="1353312"/>
-            <a:ext cx="3108960" cy="365760"/>
-          </a:xfrm>
-          <a:prstGeom prst="rect">
-            <a:avLst/>
-          </a:prstGeom>
-          <a:noFill/>
-          <a:ln/>
-        </p:spPr>
-        <p:txBody>
-          <a:bodyPr wrap="square" lIns="0" tIns="0" rIns="0" bIns="0" rtlCol="0" anchor="ctr"/>
-          <a:lstStyle/>
-          <a:p>
-            <a:pPr indent="0" marL="0">
-              <a:buNone/>
-            </a:pPr>
-            <a:r>
-              <a:rPr lang="en-US" sz="1400" b="1" dirty="0">
-                <a:solidFill>
-                  <a:srgbClr val="065A82"/>
-                </a:solidFill>
-                <a:latin typeface="Arial" pitchFamily="34" charset="0"/>
-                <a:ea typeface="Arial" pitchFamily="34" charset="-122"/>
-                <a:cs typeface="Arial" pitchFamily="34" charset="-120"/>
-              </a:rPr>
-              <a:t>已验证能力</a:t>
-            </a:r>
-            <a:endParaRPr lang="en-US" sz="1400" dirty="0"/>
-          </a:p>
-        </p:txBody>
-      </p:sp>
-      <p:sp>
-        <p:nvSpPr>
-          <p:cNvPr id="15" name="Text 13"/>
-          <p:cNvSpPr/>
-          <p:nvPr/>
-        </p:nvSpPr>
-        <p:spPr>
-          <a:xfrm>
-            <a:off x="4937760" y="1874520"/>
-            <a:ext cx="3657600" cy="914400"/>
-          </a:xfrm>
-          <a:prstGeom prst="rect">
-            <a:avLst/>
-          </a:prstGeom>
-          <a:noFill/>
-          <a:ln/>
-        </p:spPr>
-        <p:txBody>
-          <a:bodyPr wrap="square" rtlCol="0" anchor="t"/>
-          <a:lstStyle/>
-          <a:p>
-            <a:pPr marL="342900" indent="-342900">
-              <a:buSzPct val="100000"/>
-              <a:buChar char="•"/>
-            </a:pPr>
-            <a:r>
-              <a:rPr lang="en-US" sz="1000" dirty="0">
-                <a:solidFill>
-                  <a:srgbClr val="1E293B"/>
-                </a:solidFill>
-                <a:latin typeface="Arial" pitchFamily="34" charset="0"/>
-                <a:ea typeface="Arial" pitchFamily="34" charset="-122"/>
-                <a:cs typeface="Arial" pitchFamily="34" charset="-120"/>
-              </a:rPr>
-              <a:t>30+ Move 模块 · 三分布模板已部署</a:t>
-            </a:r>
-            <a:endParaRPr lang="en-US" sz="1000" dirty="0"/>
-          </a:p>
-          <a:p>
-            <a:pPr marL="342900" indent="-342900">
-              <a:buSzPct val="100000"/>
-              <a:buChar char="•"/>
-            </a:pPr>
-            <a:r>
-              <a:rPr lang="en-US" sz="1000" dirty="0">
-                <a:solidFill>
-                  <a:srgbClr val="1E293B"/>
-                </a:solidFill>
-                <a:latin typeface="Arial" pitchFamily="34" charset="0"/>
-                <a:ea typeface="Arial" pitchFamily="34" charset="-122"/>
-                <a:cs typeface="Arial" pitchFamily="34" charset="-120"/>
-              </a:rPr>
-              <a:t>Opening Auction 冷启动 · Max-Loss 全路径覆盖</a:t>
-            </a:r>
-            <a:endParaRPr lang="en-US" sz="1000" dirty="0"/>
-          </a:p>
-          <a:p>
-            <a:pPr marL="342900" indent="-342900">
-              <a:buSzPct val="100000"/>
-              <a:buChar char="•"/>
-            </a:pPr>
-            <a:r>
-              <a:rPr lang="en-US" sz="1000" dirty="0">
-                <a:solidFill>
-                  <a:srgbClr val="1E293B"/>
-                </a:solidFill>
-                <a:latin typeface="Arial" pitchFamily="34" charset="0"/>
-                <a:ea typeface="Arial" pitchFamily="34" charset="-122"/>
-                <a:cs typeface="Arial" pitchFamily="34" charset="-120"/>
-              </a:rPr>
-              <a:t>SuiProphet + Indexer + Flutter 端到端打通</a:t>
-            </a:r>
-            <a:endParaRPr lang="en-US" sz="1000" dirty="0"/>
-          </a:p>
-          <a:p>
-            <a:pPr marL="342900" indent="-342900">
-              <a:buSzPct val="100000"/>
-              <a:buChar char="•"/>
-            </a:pPr>
-            <a:r>
-              <a:rPr lang="en-US" sz="1000" dirty="0">
-                <a:solidFill>
-                  <a:srgbClr val="1E293B"/>
-                </a:solidFill>
-                <a:latin typeface="Arial" pitchFamily="34" charset="0"/>
-                <a:ea typeface="Arial" pitchFamily="34" charset="-122"/>
-                <a:cs typeface="Arial" pitchFamily="34" charset="-120"/>
-              </a:rPr>
-              <a:t>8+ 链下微服务 · Docker 编排生产就绪</a:t>
-            </a:r>
-            <a:endParaRPr lang="en-US" sz="1000" dirty="0"/>
-          </a:p>
-        </p:txBody>
-      </p:sp>
-      <p:sp>
-        <p:nvSpPr>
-          <p:cNvPr id="16" name="Shape 14"/>
-          <p:cNvSpPr/>
-          <p:nvPr/>
-        </p:nvSpPr>
-        <p:spPr>
-          <a:xfrm>
-            <a:off x="365760" y="3063240"/>
-            <a:ext cx="4023360" cy="1691640"/>
-          </a:xfrm>
-          <a:prstGeom prst="rect">
-            <a:avLst/>
-          </a:prstGeom>
-          <a:solidFill>
-            <a:srgbClr val="FFFFFF"/>
-          </a:solidFill>
-          <a:ln w="12700">
-            <a:solidFill>
-              <a:srgbClr val="E2E8F0"/>
-            </a:solidFill>
-            <a:prstDash val="solid"/>
-          </a:ln>
-          <a:effectLst>
-            <a:outerShdw sx="100000" sy="100000" kx="0" ky="0" algn="bl" rotWithShape="0" blurRad="50800" dist="25400" dir="8100000">
-              <a:srgbClr val="000000">
-                <a:alpha val="12000"/>
-              </a:srgbClr>
-            </a:outerShdw>
-          </a:effectLst>
-        </p:spPr>
-      </p:sp>
-      <p:sp>
-        <p:nvSpPr>
-          <p:cNvPr id="17" name="Shape 15"/>
-          <p:cNvSpPr/>
-          <p:nvPr/>
-        </p:nvSpPr>
-        <p:spPr>
-          <a:xfrm>
-            <a:off x="548640" y="3246120"/>
-            <a:ext cx="502920" cy="502920"/>
-          </a:xfrm>
-          <a:prstGeom prst="ellipse">
-            <a:avLst/>
-          </a:prstGeom>
-          <a:solidFill>
-            <a:srgbClr val="065A82"/>
-          </a:solidFill>
-          <a:ln/>
-        </p:spPr>
-      </p:sp>
-      <p:sp>
-        <p:nvSpPr>
-          <p:cNvPr id="18" name="Text 16"/>
-          <p:cNvSpPr/>
-          <p:nvPr/>
-        </p:nvSpPr>
-        <p:spPr>
-          <a:xfrm>
-            <a:off x="548640" y="3246120"/>
-            <a:ext cx="502920" cy="502920"/>
-          </a:xfrm>
-          <a:prstGeom prst="rect">
-            <a:avLst/>
-          </a:prstGeom>
-          <a:noFill/>
-          <a:ln/>
-        </p:spPr>
-        <p:txBody>
-          <a:bodyPr wrap="square" lIns="0" tIns="0" rIns="0" bIns="0" rtlCol="0" anchor="ctr"/>
-          <a:lstStyle/>
-          <a:p>
-            <a:pPr algn="ctr" indent="0" marL="0">
-              <a:buNone/>
-            </a:pPr>
-            <a:r>
-              <a:rPr lang="en-US" sz="1600" dirty="0">
-                <a:solidFill>
-                  <a:srgbClr val="000000"/>
-                </a:solidFill>
-              </a:rPr>
-              <a:t>🚀</a:t>
-            </a:r>
-            <a:endParaRPr lang="en-US" sz="1600" dirty="0"/>
-          </a:p>
-        </p:txBody>
-      </p:sp>
-      <p:sp>
-        <p:nvSpPr>
-          <p:cNvPr id="19" name="Text 17"/>
-          <p:cNvSpPr/>
-          <p:nvPr/>
-        </p:nvSpPr>
-        <p:spPr>
-          <a:xfrm>
-            <a:off x="1143000" y="3227832"/>
-            <a:ext cx="3108960" cy="365760"/>
-          </a:xfrm>
-          <a:prstGeom prst="rect">
-            <a:avLst/>
-          </a:prstGeom>
-          <a:noFill/>
-          <a:ln/>
-        </p:spPr>
-        <p:txBody>
-          <a:bodyPr wrap="square" lIns="0" tIns="0" rIns="0" bIns="0" rtlCol="0" anchor="ctr"/>
-          <a:lstStyle/>
-          <a:p>
-            <a:pPr indent="0" marL="0">
-              <a:buNone/>
-            </a:pPr>
-            <a:r>
-              <a:rPr lang="en-US" sz="1400" b="1" dirty="0">
-                <a:solidFill>
-                  <a:srgbClr val="065A82"/>
-                </a:solidFill>
-                <a:latin typeface="Arial" pitchFamily="34" charset="0"/>
-                <a:ea typeface="Arial" pitchFamily="34" charset="-122"/>
-                <a:cs typeface="Arial" pitchFamily="34" charset="-120"/>
-              </a:rPr>
-              <a:t>近期展望</a:t>
-            </a:r>
-            <a:endParaRPr lang="en-US" sz="1400" dirty="0"/>
-          </a:p>
-        </p:txBody>
-      </p:sp>
-      <p:sp>
-        <p:nvSpPr>
-          <p:cNvPr id="20" name="Text 18"/>
-          <p:cNvSpPr/>
-          <p:nvPr/>
-        </p:nvSpPr>
-        <p:spPr>
-          <a:xfrm>
-            <a:off x="548640" y="3749040"/>
-            <a:ext cx="3657600" cy="914400"/>
-          </a:xfrm>
-          <a:prstGeom prst="rect">
-            <a:avLst/>
-          </a:prstGeom>
-          <a:noFill/>
-          <a:ln/>
-        </p:spPr>
-        <p:txBody>
-          <a:bodyPr wrap="square" rtlCol="0" anchor="t"/>
-          <a:lstStyle/>
-          <a:p>
-            <a:pPr marL="342900" indent="-342900">
-              <a:buSzPct val="100000"/>
-              <a:buChar char="•"/>
-            </a:pPr>
-            <a:r>
-              <a:rPr lang="en-US" sz="1000" dirty="0">
-                <a:solidFill>
-                  <a:srgbClr val="1E293B"/>
-                </a:solidFill>
-                <a:latin typeface="Arial" pitchFamily="34" charset="0"/>
-                <a:ea typeface="Arial" pitchFamily="34" charset="-122"/>
-                <a:cs typeface="Arial" pitchFamily="34" charset="-120"/>
-              </a:rPr>
-              <a:t>Phase 3：Variance Swap · Slash 治理 · ZK 冷路径完善</a:t>
-            </a:r>
-            <a:endParaRPr lang="en-US" sz="1000" dirty="0"/>
-          </a:p>
-          <a:p>
-            <a:pPr marL="342900" indent="-342900">
-              <a:buSzPct val="100000"/>
-              <a:buChar char="•"/>
-            </a:pPr>
-            <a:r>
-              <a:rPr lang="en-US" sz="1000" dirty="0">
-                <a:solidFill>
-                  <a:srgbClr val="1E293B"/>
-                </a:solidFill>
-                <a:latin typeface="Arial" pitchFamily="34" charset="0"/>
-                <a:ea typeface="Arial" pitchFamily="34" charset="-122"/>
-                <a:cs typeface="Arial" pitchFamily="34" charset="-120"/>
-              </a:rPr>
-              <a:t>Beta 分布 · 独立双池联合概率 · 更多垂直 PDF 市场</a:t>
-            </a:r>
-            <a:endParaRPr lang="en-US" sz="1000" dirty="0"/>
-          </a:p>
-          <a:p>
-            <a:pPr marL="342900" indent="-342900">
-              <a:buSzPct val="100000"/>
-              <a:buChar char="•"/>
-            </a:pPr>
-            <a:r>
-              <a:rPr lang="en-US" sz="1000" dirty="0">
-                <a:solidFill>
-                  <a:srgbClr val="1E293B"/>
-                </a:solidFill>
-                <a:latin typeface="Arial" pitchFamily="34" charset="0"/>
-                <a:ea typeface="Arial" pitchFamily="34" charset="-122"/>
-                <a:cs typeface="Arial" pitchFamily="34" charset="-120"/>
-              </a:rPr>
-              <a:t>Attestation + Brevis Prover：mock → live 监督线</a:t>
-            </a:r>
-            <a:endParaRPr lang="en-US" sz="1000" dirty="0"/>
-          </a:p>
-          <a:p>
-            <a:pPr marL="342900" indent="-342900">
-              <a:buSzPct val="100000"/>
-              <a:buChar char="•"/>
-            </a:pPr>
-            <a:r>
-              <a:rPr lang="en-US" sz="1000" dirty="0">
-                <a:solidFill>
-                  <a:srgbClr val="1E293B"/>
-                </a:solidFill>
-                <a:latin typeface="Arial" pitchFamily="34" charset="0"/>
-                <a:ea typeface="Arial" pitchFamily="34" charset="-122"/>
-                <a:cs typeface="Arial" pitchFamily="34" charset="-120"/>
-              </a:rPr>
-              <a:t>外部审计 → Mainnet · Circle USDC · GeoBlock（前端合规）</a:t>
-            </a:r>
-            <a:endParaRPr lang="en-US" sz="1000" dirty="0"/>
-          </a:p>
-        </p:txBody>
-      </p:sp>
-      <p:sp>
-        <p:nvSpPr>
-          <p:cNvPr id="21" name="Shape 19"/>
-          <p:cNvSpPr/>
-          <p:nvPr/>
-        </p:nvSpPr>
-        <p:spPr>
-          <a:xfrm>
-            <a:off x="4754880" y="3063240"/>
-            <a:ext cx="4023360" cy="1691640"/>
-          </a:xfrm>
-          <a:prstGeom prst="rect">
-            <a:avLst/>
-          </a:prstGeom>
-          <a:solidFill>
-            <a:srgbClr val="FFFFFF"/>
-          </a:solidFill>
-          <a:ln w="12700">
-            <a:solidFill>
-              <a:srgbClr val="E2E8F0"/>
-            </a:solidFill>
-            <a:prstDash val="solid"/>
-          </a:ln>
-          <a:effectLst>
-            <a:outerShdw sx="100000" sy="100000" kx="0" ky="0" algn="bl" rotWithShape="0" blurRad="50800" dist="25400" dir="8100000">
-              <a:srgbClr val="000000">
-                <a:alpha val="12000"/>
-              </a:srgbClr>
-            </a:outerShdw>
-          </a:effectLst>
-        </p:spPr>
-      </p:sp>
-      <p:sp>
-        <p:nvSpPr>
-          <p:cNvPr id="22" name="Shape 20"/>
-          <p:cNvSpPr/>
-          <p:nvPr/>
-        </p:nvSpPr>
-        <p:spPr>
-          <a:xfrm>
-            <a:off x="4937760" y="3246120"/>
-            <a:ext cx="502920" cy="502920"/>
-          </a:xfrm>
-          <a:prstGeom prst="ellipse">
-            <a:avLst/>
-          </a:prstGeom>
-          <a:solidFill>
-            <a:srgbClr val="21295C"/>
-          </a:solidFill>
-          <a:ln/>
-        </p:spPr>
-      </p:sp>
-      <p:sp>
-        <p:nvSpPr>
-          <p:cNvPr id="23" name="Text 21"/>
-          <p:cNvSpPr/>
-          <p:nvPr/>
-        </p:nvSpPr>
-        <p:spPr>
-          <a:xfrm>
-            <a:off x="4937760" y="3246120"/>
-            <a:ext cx="502920" cy="502920"/>
-          </a:xfrm>
-          <a:prstGeom prst="rect">
-            <a:avLst/>
-          </a:prstGeom>
-          <a:noFill/>
-          <a:ln/>
-        </p:spPr>
-        <p:txBody>
-          <a:bodyPr wrap="square" lIns="0" tIns="0" rIns="0" bIns="0" rtlCol="0" anchor="ctr"/>
-          <a:lstStyle/>
-          <a:p>
-            <a:pPr algn="ctr" indent="0" marL="0">
-              <a:buNone/>
-            </a:pPr>
-            <a:r>
-              <a:rPr lang="en-US" sz="1600" dirty="0">
-                <a:solidFill>
-                  <a:srgbClr val="000000"/>
-                </a:solidFill>
-              </a:rPr>
-              <a:t>🎯</a:t>
-            </a:r>
-            <a:endParaRPr lang="en-US" sz="1600" dirty="0"/>
-          </a:p>
-        </p:txBody>
-      </p:sp>
-      <p:sp>
-        <p:nvSpPr>
-          <p:cNvPr id="24" name="Text 22"/>
-          <p:cNvSpPr/>
-          <p:nvPr/>
-        </p:nvSpPr>
-        <p:spPr>
-          <a:xfrm>
-            <a:off x="5532120" y="3227832"/>
-            <a:ext cx="3108960" cy="365760"/>
-          </a:xfrm>
-          <a:prstGeom prst="rect">
-            <a:avLst/>
-          </a:prstGeom>
-          <a:noFill/>
-          <a:ln/>
-        </p:spPr>
-        <p:txBody>
-          <a:bodyPr wrap="square" lIns="0" tIns="0" rIns="0" bIns="0" rtlCol="0" anchor="ctr"/>
-          <a:lstStyle/>
-          <a:p>
-            <a:pPr indent="0" marL="0">
-              <a:buNone/>
-            </a:pPr>
-            <a:r>
-              <a:rPr lang="en-US" sz="1400" b="1" dirty="0">
-                <a:solidFill>
-                  <a:srgbClr val="065A82"/>
-                </a:solidFill>
-                <a:latin typeface="Arial" pitchFamily="34" charset="0"/>
-                <a:ea typeface="Arial" pitchFamily="34" charset="-122"/>
-                <a:cs typeface="Arial" pitchFamily="34" charset="-120"/>
-              </a:rPr>
-              <a:t>长期愿景</a:t>
-            </a:r>
-            <a:endParaRPr lang="en-US" sz="1400" dirty="0"/>
-          </a:p>
-        </p:txBody>
-      </p:sp>
-      <p:sp>
-        <p:nvSpPr>
-          <p:cNvPr id="25" name="Text 23"/>
-          <p:cNvSpPr/>
-          <p:nvPr/>
-        </p:nvSpPr>
-        <p:spPr>
-          <a:xfrm>
-            <a:off x="4937760" y="3749040"/>
-            <a:ext cx="3657600" cy="914400"/>
-          </a:xfrm>
-          <a:prstGeom prst="rect">
-            <a:avLst/>
-          </a:prstGeom>
-          <a:noFill/>
-          <a:ln/>
-        </p:spPr>
-        <p:txBody>
-          <a:bodyPr wrap="square" rtlCol="0" anchor="t"/>
-          <a:lstStyle/>
-          <a:p>
-            <a:pPr marL="342900" indent="-342900">
-              <a:buSzPct val="100000"/>
-              <a:buChar char="•"/>
-            </a:pPr>
-            <a:r>
-              <a:rPr lang="en-US" sz="1000" dirty="0">
-                <a:solidFill>
-                  <a:srgbClr val="1E293B"/>
-                </a:solidFill>
-                <a:latin typeface="Arial" pitchFamily="34" charset="0"/>
-                <a:ea typeface="Arial" pitchFamily="34" charset="-122"/>
-                <a:cs typeface="Arial" pitchFamily="34" charset="-120"/>
-              </a:rPr>
-              <a:t>成为 Sui 链上「概率衍生品 + 知识付费」基础设施层</a:t>
-            </a:r>
-            <a:endParaRPr lang="en-US" sz="1000" dirty="0"/>
-          </a:p>
-          <a:p>
-            <a:pPr marL="342900" indent="-342900">
-              <a:buSzPct val="100000"/>
-              <a:buChar char="•"/>
-            </a:pPr>
-            <a:r>
-              <a:rPr lang="en-US" sz="1000" dirty="0">
-                <a:solidFill>
-                  <a:srgbClr val="1E293B"/>
-                </a:solidFill>
-                <a:latin typeface="Arial" pitchFamily="34" charset="0"/>
-                <a:ea typeface="Arial" pitchFamily="34" charset="-122"/>
-                <a:cs typeface="Arial" pitchFamily="34" charset="-120"/>
-              </a:rPr>
-              <a:t>服务零售交易者、LP、预言家与量化机构四类参与者</a:t>
-            </a:r>
-            <a:endParaRPr lang="en-US" sz="1000" dirty="0"/>
-          </a:p>
-          <a:p>
-            <a:pPr marL="342900" indent="-342900">
-              <a:buSzPct val="100000"/>
-              <a:buChar char="•"/>
-            </a:pPr>
-            <a:r>
-              <a:rPr lang="en-US" sz="1000" dirty="0">
-                <a:solidFill>
-                  <a:srgbClr val="1E293B"/>
-                </a:solidFill>
-                <a:latin typeface="Arial" pitchFamily="34" charset="0"/>
-                <a:ea typeface="Arial" pitchFamily="34" charset="-122"/>
-                <a:cs typeface="Arial" pitchFamily="34" charset="-120"/>
-              </a:rPr>
-              <a:t>EventRoot 全量迁移 · SDK / Quant API 开放</a:t>
-            </a:r>
-            <a:endParaRPr lang="en-US" sz="1000" dirty="0"/>
-          </a:p>
-          <a:p>
-            <a:pPr marL="342900" indent="-342900">
-              <a:buSzPct val="100000"/>
-              <a:buChar char="•"/>
-            </a:pPr>
-            <a:r>
-              <a:rPr lang="en-US" sz="1000" dirty="0">
-                <a:solidFill>
-                  <a:srgbClr val="1E293B"/>
-                </a:solidFill>
-                <a:latin typeface="Arial" pitchFamily="34" charset="0"/>
-                <a:ea typeface="Arial" pitchFamily="34" charset="-122"/>
-                <a:cs typeface="Arial" pitchFamily="34" charset="-120"/>
-              </a:rPr>
-              <a:t>以链上 PDF 定价取代碎片化 Yes/No · 以强制审计取代虚假带单</a:t>
-            </a:r>
-            <a:endParaRPr lang="en-US" sz="1000" dirty="0"/>
-          </a:p>
-        </p:txBody>
-      </p:sp>
-    </p:spTree>
-  </p:cSld>
-  <p:clrMapOvr>
-    <a:masterClrMapping/>
-  </p:clrMapOvr>
-</p:sld>
-</file>
-
 <file path=ppt/slides/slide2.xml><?xml version="1.0" encoding="utf-8"?>
 <p:sld xmlns:a="http://schemas.openxmlformats.org/drawingml/2006/main" xmlns:r="http://schemas.openxmlformats.org/officeDocument/2006/relationships" xmlns:p="http://schemas.openxmlformats.org/presentationml/2006/main">
   <p:cSld name="Slide 2">
@@ -13549,8 +11595,8 @@
         </p:nvSpPr>
         <p:spPr>
           <a:xfrm>
-            <a:off x="365760" y="1188720"/>
-            <a:ext cx="1645920" cy="960120"/>
+            <a:off x="320040" y="1078992"/>
+            <a:ext cx="1508760" cy="947547"/>
           </a:xfrm>
           <a:prstGeom prst="rect">
             <a:avLst/>
@@ -13569,8 +11615,8 @@
         </p:nvSpPr>
         <p:spPr>
           <a:xfrm>
-            <a:off x="365760" y="1463040"/>
-            <a:ext cx="1645920" cy="457200"/>
+            <a:off x="320040" y="1078992"/>
+            <a:ext cx="1508760" cy="947547"/>
           </a:xfrm>
           <a:prstGeom prst="rect">
             <a:avLst/>
@@ -13586,7 +11632,7 @@
               <a:buNone/>
             </a:pPr>
             <a:r>
-              <a:rPr lang="en-US" sz="1200" b="1" dirty="0">
+              <a:rPr lang="en-US" sz="1000" b="1" dirty="0">
                 <a:solidFill>
                   <a:srgbClr val="FFFFFF"/>
                 </a:solidFill>
@@ -13596,7 +11642,7 @@
               </a:rPr>
               <a:t>交易者</a:t>
             </a:r>
-            <a:endParaRPr lang="en-US" sz="1200" dirty="0"/>
+            <a:endParaRPr lang="en-US" sz="1000" dirty="0"/>
           </a:p>
         </p:txBody>
       </p:sp>
@@ -13608,8 +11654,8 @@
         </p:nvSpPr>
         <p:spPr>
           <a:xfrm>
-            <a:off x="2148840" y="1188720"/>
-            <a:ext cx="6629400" cy="960120"/>
+            <a:off x="1920240" y="1078992"/>
+            <a:ext cx="6903720" cy="947547"/>
           </a:xfrm>
           <a:prstGeom prst="rect">
             <a:avLst/>
@@ -13633,8 +11679,8 @@
         </p:nvSpPr>
         <p:spPr>
           <a:xfrm>
-            <a:off x="2286000" y="1298448"/>
-            <a:ext cx="3108960" cy="777240"/>
+            <a:off x="2011680" y="1133856"/>
+            <a:ext cx="6720840" cy="360068"/>
           </a:xfrm>
           <a:prstGeom prst="rect">
             <a:avLst/>
@@ -13643,14 +11689,14 @@
           <a:ln/>
         </p:spPr>
         <p:txBody>
-          <a:bodyPr wrap="square" lIns="0" tIns="0" rIns="0" bIns="0" rtlCol="0" anchor="ctr"/>
+          <a:bodyPr wrap="square" lIns="0" tIns="0" rIns="0" bIns="0" rtlCol="0" anchor="t"/>
           <a:lstStyle/>
           <a:p>
             <a:pPr indent="0" marL="0">
               <a:buNone/>
             </a:pPr>
             <a:r>
-              <a:rPr lang="en-US" sz="1100" b="1" dirty="0">
+              <a:rPr lang="en-US" sz="900" b="1" dirty="0">
                 <a:solidFill>
                   <a:srgbClr val="065A82"/>
                 </a:solidFill>
@@ -13660,7 +11706,7 @@
               </a:rPr>
               <a:t>交易概率曲线而非碎片代币</a:t>
             </a:r>
-            <a:endParaRPr lang="en-US" sz="1100" dirty="0"/>
+            <a:endParaRPr lang="en-US" sz="900" dirty="0"/>
           </a:p>
         </p:txBody>
       </p:sp>
@@ -13672,8 +11718,8 @@
         </p:nvSpPr>
         <p:spPr>
           <a:xfrm>
-            <a:off x="5394960" y="1298448"/>
-            <a:ext cx="3200400" cy="777240"/>
+            <a:off x="2011680" y="1493924"/>
+            <a:ext cx="6720840" cy="530626"/>
           </a:xfrm>
           <a:prstGeom prst="rect">
             <a:avLst/>
@@ -13682,14 +11728,14 @@
           <a:ln/>
         </p:spPr>
         <p:txBody>
-          <a:bodyPr wrap="square" lIns="0" tIns="0" rIns="0" bIns="0" rtlCol="0" anchor="ctr"/>
+          <a:bodyPr wrap="square" lIns="0" tIns="0" rIns="0" bIns="0" rtlCol="0" anchor="t"/>
           <a:lstStyle/>
           <a:p>
             <a:pPr indent="0" marL="0">
               <a:buNone/>
             </a:pPr>
             <a:r>
-              <a:rPr lang="en-US" sz="1000" dirty="0">
+              <a:rPr lang="en-US" sz="750" dirty="0">
                 <a:solidFill>
                   <a:srgbClr val="64748B"/>
                 </a:solidFill>
@@ -13699,7 +11745,7 @@
               </a:rPr>
               <a:t>区间/数字期权 · 结构化票据 · Max-Loss 风控 · 透明 PDF 定价</a:t>
             </a:r>
-            <a:endParaRPr lang="en-US" sz="1000" dirty="0"/>
+            <a:endParaRPr lang="en-US" sz="750" dirty="0"/>
           </a:p>
         </p:txBody>
       </p:sp>
@@ -13711,8 +11757,8 @@
         </p:nvSpPr>
         <p:spPr>
           <a:xfrm>
-            <a:off x="365760" y="2331720"/>
-            <a:ext cx="1645920" cy="960120"/>
+            <a:off x="320040" y="2081403"/>
+            <a:ext cx="1508760" cy="947547"/>
           </a:xfrm>
           <a:prstGeom prst="rect">
             <a:avLst/>
@@ -13731,8 +11777,8 @@
         </p:nvSpPr>
         <p:spPr>
           <a:xfrm>
-            <a:off x="365760" y="2606040"/>
-            <a:ext cx="1645920" cy="457200"/>
+            <a:off x="320040" y="2081403"/>
+            <a:ext cx="1508760" cy="947547"/>
           </a:xfrm>
           <a:prstGeom prst="rect">
             <a:avLst/>
@@ -13748,7 +11794,7 @@
               <a:buNone/>
             </a:pPr>
             <a:r>
-              <a:rPr lang="en-US" sz="1200" b="1" dirty="0">
+              <a:rPr lang="en-US" sz="1000" b="1" dirty="0">
                 <a:solidFill>
                   <a:srgbClr val="FFFFFF"/>
                 </a:solidFill>
@@ -13758,7 +11804,7 @@
               </a:rPr>
               <a:t>LP 承销商</a:t>
             </a:r>
-            <a:endParaRPr lang="en-US" sz="1200" dirty="0"/>
+            <a:endParaRPr lang="en-US" sz="1000" dirty="0"/>
           </a:p>
         </p:txBody>
       </p:sp>
@@ -13770,8 +11816,8 @@
         </p:nvSpPr>
         <p:spPr>
           <a:xfrm>
-            <a:off x="2148840" y="2331720"/>
-            <a:ext cx="6629400" cy="960120"/>
+            <a:off x="1920240" y="2081403"/>
+            <a:ext cx="6903720" cy="947547"/>
           </a:xfrm>
           <a:prstGeom prst="rect">
             <a:avLst/>
@@ -13795,8 +11841,8 @@
         </p:nvSpPr>
         <p:spPr>
           <a:xfrm>
-            <a:off x="2286000" y="2441448"/>
-            <a:ext cx="3108960" cy="777240"/>
+            <a:off x="2011680" y="2136267"/>
+            <a:ext cx="6720840" cy="360068"/>
           </a:xfrm>
           <a:prstGeom prst="rect">
             <a:avLst/>
@@ -13805,14 +11851,14 @@
           <a:ln/>
         </p:spPr>
         <p:txBody>
-          <a:bodyPr wrap="square" lIns="0" tIns="0" rIns="0" bIns="0" rtlCol="0" anchor="ctr"/>
+          <a:bodyPr wrap="square" lIns="0" tIns="0" rIns="0" bIns="0" rtlCol="0" anchor="t"/>
           <a:lstStyle/>
           <a:p>
             <a:pPr indent="0" marL="0">
               <a:buNone/>
             </a:pPr>
             <a:r>
-              <a:rPr lang="en-US" sz="1100" b="1" dirty="0">
+              <a:rPr lang="en-US" sz="900" b="1" dirty="0">
                 <a:solidFill>
                   <a:srgbClr val="065A82"/>
                 </a:solidFill>
@@ -13822,7 +11868,7 @@
               </a:rPr>
               <a:t>赚滑点 + Theta + 错误定价本金</a:t>
             </a:r>
-            <a:endParaRPr lang="en-US" sz="1100" dirty="0"/>
+            <a:endParaRPr lang="en-US" sz="900" dirty="0"/>
           </a:p>
         </p:txBody>
       </p:sp>
@@ -13834,8 +11880,8 @@
         </p:nvSpPr>
         <p:spPr>
           <a:xfrm>
-            <a:off x="5394960" y="2441448"/>
-            <a:ext cx="3200400" cy="777240"/>
+            <a:off x="2011680" y="2496335"/>
+            <a:ext cx="6720840" cy="530626"/>
           </a:xfrm>
           <a:prstGeom prst="rect">
             <a:avLst/>
@@ -13844,14 +11890,14 @@
           <a:ln/>
         </p:spPr>
         <p:txBody>
-          <a:bodyPr wrap="square" lIns="0" tIns="0" rIns="0" bIns="0" rtlCol="0" anchor="ctr"/>
+          <a:bodyPr wrap="square" lIns="0" tIns="0" rIns="0" bIns="0" rtlCol="0" anchor="t"/>
           <a:lstStyle/>
           <a:p>
             <a:pPr indent="0" marL="0">
               <a:buNone/>
             </a:pPr>
             <a:r>
-              <a:rPr lang="en-US" sz="1000" dirty="0">
+              <a:rPr lang="en-US" sz="750" dirty="0">
                 <a:solidFill>
                   <a:srgbClr val="64748B"/>
                 </a:solidFill>
@@ -13861,7 +11907,7 @@
               </a:rPr>
               <a:t>NAV 申购赎回 · Opening Auction 内生流动性 · LP Guard 动态费率保护</a:t>
             </a:r>
-            <a:endParaRPr lang="en-US" sz="1000" dirty="0"/>
+            <a:endParaRPr lang="en-US" sz="750" dirty="0"/>
           </a:p>
         </p:txBody>
       </p:sp>
@@ -13873,8 +11919,8 @@
         </p:nvSpPr>
         <p:spPr>
           <a:xfrm>
-            <a:off x="365760" y="3474720"/>
-            <a:ext cx="1645920" cy="960120"/>
+            <a:off x="320040" y="3083814"/>
+            <a:ext cx="1508760" cy="947547"/>
           </a:xfrm>
           <a:prstGeom prst="rect">
             <a:avLst/>
@@ -13893,8 +11939,8 @@
         </p:nvSpPr>
         <p:spPr>
           <a:xfrm>
-            <a:off x="365760" y="3749040"/>
-            <a:ext cx="1645920" cy="457200"/>
+            <a:off x="320040" y="3083814"/>
+            <a:ext cx="1508760" cy="947547"/>
           </a:xfrm>
           <a:prstGeom prst="rect">
             <a:avLst/>
@@ -13910,7 +11956,7 @@
               <a:buNone/>
             </a:pPr>
             <a:r>
-              <a:rPr lang="en-US" sz="1200" b="1" dirty="0">
+              <a:rPr lang="en-US" sz="1000" b="1" dirty="0">
                 <a:solidFill>
                   <a:srgbClr val="FFFFFF"/>
                 </a:solidFill>
@@ -13920,7 +11966,7 @@
               </a:rPr>
               <a:t>预言家</a:t>
             </a:r>
-            <a:endParaRPr lang="en-US" sz="1200" dirty="0"/>
+            <a:endParaRPr lang="en-US" sz="1000" dirty="0"/>
           </a:p>
         </p:txBody>
       </p:sp>
@@ -13932,8 +11978,8 @@
         </p:nvSpPr>
         <p:spPr>
           <a:xfrm>
-            <a:off x="2148840" y="3474720"/>
-            <a:ext cx="6629400" cy="960120"/>
+            <a:off x="1920240" y="3083814"/>
+            <a:ext cx="6903720" cy="947547"/>
           </a:xfrm>
           <a:prstGeom prst="rect">
             <a:avLst/>
@@ -13957,8 +12003,8 @@
         </p:nvSpPr>
         <p:spPr>
           <a:xfrm>
-            <a:off x="2286000" y="3584448"/>
-            <a:ext cx="3108960" cy="777240"/>
+            <a:off x="2011680" y="3138678"/>
+            <a:ext cx="6720840" cy="360068"/>
           </a:xfrm>
           <a:prstGeom prst="rect">
             <a:avLst/>
@@ -13967,14 +12013,14 @@
           <a:ln/>
         </p:spPr>
         <p:txBody>
-          <a:bodyPr wrap="square" lIns="0" tIns="0" rIns="0" bIns="0" rtlCol="0" anchor="ctr"/>
+          <a:bodyPr wrap="square" lIns="0" tIns="0" rIns="0" bIns="0" rtlCol="0" anchor="t"/>
           <a:lstStyle/>
           <a:p>
             <a:pPr indent="0" marL="0">
               <a:buNone/>
             </a:pPr>
             <a:r>
-              <a:rPr lang="en-US" sz="1100" b="1" dirty="0">
+              <a:rPr lang="en-US" sz="900" b="1" dirty="0">
                 <a:solidFill>
                   <a:srgbClr val="065A82"/>
                 </a:solidFill>
@@ -13984,7 +12030,7 @@
               </a:rPr>
               <a:t>全链胜率背书 + 付费解锁收入</a:t>
             </a:r>
-            <a:endParaRPr lang="en-US" sz="1100" dirty="0"/>
+            <a:endParaRPr lang="en-US" sz="900" dirty="0"/>
           </a:p>
         </p:txBody>
       </p:sp>
@@ -13996,8 +12042,8 @@
         </p:nvSpPr>
         <p:spPr>
           <a:xfrm>
-            <a:off x="5394960" y="3584448"/>
-            <a:ext cx="3200400" cy="777240"/>
+            <a:off x="2011680" y="3498746"/>
+            <a:ext cx="6720840" cy="530626"/>
           </a:xfrm>
           <a:prstGeom prst="rect">
             <a:avLst/>
@@ -14006,14 +12052,14 @@
           <a:ln/>
         </p:spPr>
         <p:txBody>
-          <a:bodyPr wrap="square" lIns="0" tIns="0" rIns="0" bIns="0" rtlCol="0" anchor="ctr"/>
+          <a:bodyPr wrap="square" lIns="0" tIns="0" rIns="0" bIns="0" rtlCol="0" anchor="t"/>
           <a:lstStyle/>
           <a:p>
             <a:pPr indent="0" marL="0">
               <a:buNone/>
             </a:pPr>
             <a:r>
-              <a:rPr lang="en-US" sz="1000" dirty="0">
+              <a:rPr lang="en-US" sz="750" dirty="0">
                 <a:solidFill>
                   <a:srgbClr val="64748B"/>
                 </a:solidFill>
@@ -14023,7 +12069,7 @@
               </a:rPr>
               <a:t>Seal 私密分析 · 链上战绩积累 · 链上门槛校验后开通付费</a:t>
             </a:r>
-            <a:endParaRPr lang="en-US" sz="1000" dirty="0"/>
+            <a:endParaRPr lang="en-US" sz="750" dirty="0"/>
           </a:p>
         </p:txBody>
       </p:sp>
@@ -14035,8 +12081,8 @@
         </p:nvSpPr>
         <p:spPr>
           <a:xfrm>
-            <a:off x="365760" y="4617720"/>
-            <a:ext cx="1645920" cy="960120"/>
+            <a:off x="320040" y="4086225"/>
+            <a:ext cx="1508760" cy="947547"/>
           </a:xfrm>
           <a:prstGeom prst="rect">
             <a:avLst/>
@@ -14055,8 +12101,8 @@
         </p:nvSpPr>
         <p:spPr>
           <a:xfrm>
-            <a:off x="365760" y="4892040"/>
-            <a:ext cx="1645920" cy="457200"/>
+            <a:off x="320040" y="4086225"/>
+            <a:ext cx="1508760" cy="947547"/>
           </a:xfrm>
           <a:prstGeom prst="rect">
             <a:avLst/>
@@ -14072,7 +12118,7 @@
               <a:buNone/>
             </a:pPr>
             <a:r>
-              <a:rPr lang="en-US" sz="1200" b="1" dirty="0">
+              <a:rPr lang="en-US" sz="1000" b="1" dirty="0">
                 <a:solidFill>
                   <a:srgbClr val="FFFFFF"/>
                 </a:solidFill>
@@ -14082,7 +12128,7 @@
               </a:rPr>
               <a:t>协议 / 平台</a:t>
             </a:r>
-            <a:endParaRPr lang="en-US" sz="1200" dirty="0"/>
+            <a:endParaRPr lang="en-US" sz="1000" dirty="0"/>
           </a:p>
         </p:txBody>
       </p:sp>
@@ -14094,8 +12140,8 @@
         </p:nvSpPr>
         <p:spPr>
           <a:xfrm>
-            <a:off x="2148840" y="4617720"/>
-            <a:ext cx="6629400" cy="960120"/>
+            <a:off x="1920240" y="4086225"/>
+            <a:ext cx="6903720" cy="947547"/>
           </a:xfrm>
           <a:prstGeom prst="rect">
             <a:avLst/>
@@ -14119,8 +12165,8 @@
         </p:nvSpPr>
         <p:spPr>
           <a:xfrm>
-            <a:off x="2286000" y="4727448"/>
-            <a:ext cx="3108960" cy="777240"/>
+            <a:off x="2011680" y="4141089"/>
+            <a:ext cx="6720840" cy="360068"/>
           </a:xfrm>
           <a:prstGeom prst="rect">
             <a:avLst/>
@@ -14129,14 +12175,14 @@
           <a:ln/>
         </p:spPr>
         <p:txBody>
-          <a:bodyPr wrap="square" lIns="0" tIns="0" rIns="0" bIns="0" rtlCol="0" anchor="ctr"/>
+          <a:bodyPr wrap="square" lIns="0" tIns="0" rIns="0" bIns="0" rtlCol="0" anchor="t"/>
           <a:lstStyle/>
           <a:p>
             <a:pPr indent="0" marL="0">
               <a:buNone/>
             </a:pPr>
             <a:r>
-              <a:rPr lang="en-US" sz="1100" b="1" dirty="0">
+              <a:rPr lang="en-US" sz="900" b="1" dirty="0">
                 <a:solidFill>
                   <a:srgbClr val="065A82"/>
                 </a:solidFill>
@@ -14146,7 +12192,7 @@
               </a:rPr>
               <a:t>解锁费抽成 + 交易费率 + 生态网络效应</a:t>
             </a:r>
-            <a:endParaRPr lang="en-US" sz="1100" dirty="0"/>
+            <a:endParaRPr lang="en-US" sz="900" dirty="0"/>
           </a:p>
         </p:txBody>
       </p:sp>
@@ -14158,8 +12204,8 @@
         </p:nvSpPr>
         <p:spPr>
           <a:xfrm>
-            <a:off x="5394960" y="4727448"/>
-            <a:ext cx="3200400" cy="777240"/>
+            <a:off x="2011680" y="4501157"/>
+            <a:ext cx="6720840" cy="530626"/>
           </a:xfrm>
           <a:prstGeom prst="rect">
             <a:avLst/>
@@ -14168,14 +12214,14 @@
           <a:ln/>
         </p:spPr>
         <p:txBody>
-          <a:bodyPr wrap="square" lIns="0" tIns="0" rIns="0" bIns="0" rtlCol="0" anchor="ctr"/>
+          <a:bodyPr wrap="square" lIns="0" tIns="0" rIns="0" bIns="0" rtlCol="0" anchor="t"/>
           <a:lstStyle/>
           <a:p>
             <a:pPr indent="0" marL="0">
               <a:buNone/>
             </a:pPr>
             <a:r>
-              <a:rPr lang="en-US" sz="1000" dirty="0">
+              <a:rPr lang="en-US" sz="750" dirty="0">
                 <a:solidFill>
                   <a:srgbClr val="64748B"/>
                 </a:solidFill>
@@ -14185,7 +12231,7 @@
               </a:rPr>
               <a:t>Crank 自动结算 · 排行榜驱动流量 · 多市场并行扩展</a:t>
             </a:r>
-            <a:endParaRPr lang="en-US" sz="1000" dirty="0"/>
+            <a:endParaRPr lang="en-US" sz="750" dirty="0"/>
           </a:p>
         </p:txBody>
       </p:sp>
@@ -16975,8 +15021,8 @@
         </p:nvSpPr>
         <p:spPr>
           <a:xfrm>
-            <a:off x="365760" y="1188720"/>
-            <a:ext cx="4023360" cy="1691640"/>
+            <a:off x="365760" y="1078992"/>
+            <a:ext cx="4023360" cy="1940814"/>
           </a:xfrm>
           <a:prstGeom prst="rect">
             <a:avLst/>
@@ -17007,8 +15053,8 @@
         </p:nvSpPr>
         <p:spPr>
           <a:xfrm>
-            <a:off x="548640" y="1371600"/>
-            <a:ext cx="502920" cy="502920"/>
+            <a:off x="530352" y="1225296"/>
+            <a:ext cx="457200" cy="457200"/>
           </a:xfrm>
           <a:prstGeom prst="ellipse">
             <a:avLst/>
@@ -17027,8 +15073,8 @@
         </p:nvSpPr>
         <p:spPr>
           <a:xfrm>
-            <a:off x="548640" y="1371600"/>
-            <a:ext cx="502920" cy="502920"/>
+            <a:off x="530352" y="1225296"/>
+            <a:ext cx="457200" cy="457200"/>
           </a:xfrm>
           <a:prstGeom prst="rect">
             <a:avLst/>
@@ -17044,14 +15090,14 @@
               <a:buNone/>
             </a:pPr>
             <a:r>
-              <a:rPr lang="en-US" sz="1600" dirty="0">
+              <a:rPr lang="en-US" sz="1400" dirty="0">
                 <a:solidFill>
                   <a:srgbClr val="000000"/>
                 </a:solidFill>
               </a:rPr>
               <a:t>⚡</a:t>
             </a:r>
-            <a:endParaRPr lang="en-US" sz="1600" dirty="0"/>
+            <a:endParaRPr lang="en-US" sz="1400" dirty="0"/>
           </a:p>
         </p:txBody>
       </p:sp>
@@ -17063,8 +15109,8 @@
         </p:nvSpPr>
         <p:spPr>
           <a:xfrm>
-            <a:off x="1143000" y="1353312"/>
-            <a:ext cx="3108960" cy="365760"/>
+            <a:off x="1078992" y="1188720"/>
+            <a:ext cx="3218688" cy="329184"/>
           </a:xfrm>
           <a:prstGeom prst="rect">
             <a:avLst/>
@@ -17073,7 +15119,7 @@
           <a:ln/>
         </p:spPr>
         <p:txBody>
-          <a:bodyPr wrap="square" lIns="0" tIns="0" rIns="0" bIns="0" rtlCol="0" anchor="ctr"/>
+          <a:bodyPr wrap="square" lIns="0" tIns="0" rIns="0" bIns="0" rtlCol="0" anchor="t"/>
           <a:lstStyle/>
           <a:p>
             <a:pPr indent="0" marL="0">
@@ -17102,8 +15148,8 @@
         </p:nvSpPr>
         <p:spPr>
           <a:xfrm>
-            <a:off x="548640" y="1874520"/>
-            <a:ext cx="3657600" cy="914400"/>
+            <a:off x="512064" y="1591056"/>
+            <a:ext cx="3767328" cy="1355598"/>
           </a:xfrm>
           <a:prstGeom prst="rect">
             <a:avLst/>
@@ -17112,7 +15158,7 @@
           <a:ln/>
         </p:spPr>
         <p:txBody>
-          <a:bodyPr wrap="square" rtlCol="0" anchor="t"/>
+          <a:bodyPr wrap="square" lIns="0" tIns="0" rIns="0" bIns="0" rtlCol="0" anchor="t"/>
           <a:lstStyle/>
           <a:p>
             <a:pPr marL="342900" indent="-342900">
@@ -17178,8 +15224,8 @@
         </p:nvSpPr>
         <p:spPr>
           <a:xfrm>
-            <a:off x="4754880" y="1188720"/>
-            <a:ext cx="4023360" cy="1691640"/>
+            <a:off x="4754880" y="1078992"/>
+            <a:ext cx="4023360" cy="1940814"/>
           </a:xfrm>
           <a:prstGeom prst="rect">
             <a:avLst/>
@@ -17210,8 +15256,8 @@
         </p:nvSpPr>
         <p:spPr>
           <a:xfrm>
-            <a:off x="4937760" y="1371600"/>
-            <a:ext cx="502920" cy="502920"/>
+            <a:off x="4919472" y="1225296"/>
+            <a:ext cx="457200" cy="457200"/>
           </a:xfrm>
           <a:prstGeom prst="ellipse">
             <a:avLst/>
@@ -17230,8 +15276,8 @@
         </p:nvSpPr>
         <p:spPr>
           <a:xfrm>
-            <a:off x="4937760" y="1371600"/>
-            <a:ext cx="502920" cy="502920"/>
+            <a:off x="4919472" y="1225296"/>
+            <a:ext cx="457200" cy="457200"/>
           </a:xfrm>
           <a:prstGeom prst="rect">
             <a:avLst/>
@@ -17247,14 +15293,14 @@
               <a:buNone/>
             </a:pPr>
             <a:r>
-              <a:rPr lang="en-US" sz="1600" dirty="0">
+              <a:rPr lang="en-US" sz="1400" dirty="0">
                 <a:solidFill>
                   <a:srgbClr val="000000"/>
                 </a:solidFill>
               </a:rPr>
               <a:t>📊</a:t>
             </a:r>
-            <a:endParaRPr lang="en-US" sz="1600" dirty="0"/>
+            <a:endParaRPr lang="en-US" sz="1400" dirty="0"/>
           </a:p>
         </p:txBody>
       </p:sp>
@@ -17266,8 +15312,8 @@
         </p:nvSpPr>
         <p:spPr>
           <a:xfrm>
-            <a:off x="5532120" y="1353312"/>
-            <a:ext cx="3108960" cy="365760"/>
+            <a:off x="5468112" y="1188720"/>
+            <a:ext cx="3218688" cy="329184"/>
           </a:xfrm>
           <a:prstGeom prst="rect">
             <a:avLst/>
@@ -17276,7 +15322,7 @@
           <a:ln/>
         </p:spPr>
         <p:txBody>
-          <a:bodyPr wrap="square" lIns="0" tIns="0" rIns="0" bIns="0" rtlCol="0" anchor="ctr"/>
+          <a:bodyPr wrap="square" lIns="0" tIns="0" rIns="0" bIns="0" rtlCol="0" anchor="t"/>
           <a:lstStyle/>
           <a:p>
             <a:pPr indent="0" marL="0">
@@ -17305,8 +15351,8 @@
         </p:nvSpPr>
         <p:spPr>
           <a:xfrm>
-            <a:off x="4937760" y="1874520"/>
-            <a:ext cx="3657600" cy="914400"/>
+            <a:off x="4901184" y="1591056"/>
+            <a:ext cx="3767328" cy="1355598"/>
           </a:xfrm>
           <a:prstGeom prst="rect">
             <a:avLst/>
@@ -17315,7 +15361,7 @@
           <a:ln/>
         </p:spPr>
         <p:txBody>
-          <a:bodyPr wrap="square" rtlCol="0" anchor="t"/>
+          <a:bodyPr wrap="square" lIns="0" tIns="0" rIns="0" bIns="0" rtlCol="0" anchor="t"/>
           <a:lstStyle/>
           <a:p>
             <a:pPr marL="342900" indent="-342900">
@@ -17381,8 +15427,8 @@
         </p:nvSpPr>
         <p:spPr>
           <a:xfrm>
-            <a:off x="365760" y="3063240"/>
-            <a:ext cx="4023360" cy="1691640"/>
+            <a:off x="365760" y="3092958"/>
+            <a:ext cx="4023360" cy="1940814"/>
           </a:xfrm>
           <a:prstGeom prst="rect">
             <a:avLst/>
@@ -17413,8 +15459,8 @@
         </p:nvSpPr>
         <p:spPr>
           <a:xfrm>
-            <a:off x="548640" y="3246120"/>
-            <a:ext cx="502920" cy="502920"/>
+            <a:off x="530352" y="3239262"/>
+            <a:ext cx="457200" cy="457200"/>
           </a:xfrm>
           <a:prstGeom prst="ellipse">
             <a:avLst/>
@@ -17433,8 +15479,8 @@
         </p:nvSpPr>
         <p:spPr>
           <a:xfrm>
-            <a:off x="548640" y="3246120"/>
-            <a:ext cx="502920" cy="502920"/>
+            <a:off x="530352" y="3239262"/>
+            <a:ext cx="457200" cy="457200"/>
           </a:xfrm>
           <a:prstGeom prst="rect">
             <a:avLst/>
@@ -17450,14 +15496,14 @@
               <a:buNone/>
             </a:pPr>
             <a:r>
-              <a:rPr lang="en-US" sz="1600" dirty="0">
+              <a:rPr lang="en-US" sz="1400" dirty="0">
                 <a:solidFill>
                   <a:srgbClr val="000000"/>
                 </a:solidFill>
               </a:rPr>
               <a:t>🔄</a:t>
             </a:r>
-            <a:endParaRPr lang="en-US" sz="1600" dirty="0"/>
+            <a:endParaRPr lang="en-US" sz="1400" dirty="0"/>
           </a:p>
         </p:txBody>
       </p:sp>
@@ -17469,8 +15515,8 @@
         </p:nvSpPr>
         <p:spPr>
           <a:xfrm>
-            <a:off x="1143000" y="3227832"/>
-            <a:ext cx="3108960" cy="365760"/>
+            <a:off x="1078992" y="3202686"/>
+            <a:ext cx="3218688" cy="329184"/>
           </a:xfrm>
           <a:prstGeom prst="rect">
             <a:avLst/>
@@ -17479,7 +15525,7 @@
           <a:ln/>
         </p:spPr>
         <p:txBody>
-          <a:bodyPr wrap="square" lIns="0" tIns="0" rIns="0" bIns="0" rtlCol="0" anchor="ctr"/>
+          <a:bodyPr wrap="square" lIns="0" tIns="0" rIns="0" bIns="0" rtlCol="0" anchor="t"/>
           <a:lstStyle/>
           <a:p>
             <a:pPr indent="0" marL="0">
@@ -17508,8 +15554,8 @@
         </p:nvSpPr>
         <p:spPr>
           <a:xfrm>
-            <a:off x="548640" y="3749040"/>
-            <a:ext cx="3657600" cy="914400"/>
+            <a:off x="512064" y="3605022"/>
+            <a:ext cx="3767328" cy="1355598"/>
           </a:xfrm>
           <a:prstGeom prst="rect">
             <a:avLst/>
@@ -17518,7 +15564,7 @@
           <a:ln/>
         </p:spPr>
         <p:txBody>
-          <a:bodyPr wrap="square" rtlCol="0" anchor="t"/>
+          <a:bodyPr wrap="square" lIns="0" tIns="0" rIns="0" bIns="0" rtlCol="0" anchor="t"/>
           <a:lstStyle/>
           <a:p>
             <a:pPr marL="342900" indent="-342900">
@@ -17584,8 +15630,8 @@
         </p:nvSpPr>
         <p:spPr>
           <a:xfrm>
-            <a:off x="4754880" y="3063240"/>
-            <a:ext cx="4023360" cy="1691640"/>
+            <a:off x="4754880" y="3092958"/>
+            <a:ext cx="4023360" cy="1940814"/>
           </a:xfrm>
           <a:prstGeom prst="rect">
             <a:avLst/>
@@ -17616,8 +15662,8 @@
         </p:nvSpPr>
         <p:spPr>
           <a:xfrm>
-            <a:off x="4937760" y="3246120"/>
-            <a:ext cx="502920" cy="502920"/>
+            <a:off x="4919472" y="3239262"/>
+            <a:ext cx="457200" cy="457200"/>
           </a:xfrm>
           <a:prstGeom prst="ellipse">
             <a:avLst/>
@@ -17636,8 +15682,8 @@
         </p:nvSpPr>
         <p:spPr>
           <a:xfrm>
-            <a:off x="4937760" y="3246120"/>
-            <a:ext cx="502920" cy="502920"/>
+            <a:off x="4919472" y="3239262"/>
+            <a:ext cx="457200" cy="457200"/>
           </a:xfrm>
           <a:prstGeom prst="rect">
             <a:avLst/>
@@ -17653,14 +15699,14 @@
               <a:buNone/>
             </a:pPr>
             <a:r>
-              <a:rPr lang="en-US" sz="1600" dirty="0">
+              <a:rPr lang="en-US" sz="1400" dirty="0">
                 <a:solidFill>
                   <a:srgbClr val="000000"/>
                 </a:solidFill>
               </a:rPr>
               <a:t>📱</a:t>
             </a:r>
-            <a:endParaRPr lang="en-US" sz="1600" dirty="0"/>
+            <a:endParaRPr lang="en-US" sz="1400" dirty="0"/>
           </a:p>
         </p:txBody>
       </p:sp>
@@ -17672,8 +15718,8 @@
         </p:nvSpPr>
         <p:spPr>
           <a:xfrm>
-            <a:off x="5532120" y="3227832"/>
-            <a:ext cx="3108960" cy="365760"/>
+            <a:off x="5468112" y="3202686"/>
+            <a:ext cx="3218688" cy="329184"/>
           </a:xfrm>
           <a:prstGeom prst="rect">
             <a:avLst/>
@@ -17682,7 +15728,7 @@
           <a:ln/>
         </p:spPr>
         <p:txBody>
-          <a:bodyPr wrap="square" lIns="0" tIns="0" rIns="0" bIns="0" rtlCol="0" anchor="ctr"/>
+          <a:bodyPr wrap="square" lIns="0" tIns="0" rIns="0" bIns="0" rtlCol="0" anchor="t"/>
           <a:lstStyle/>
           <a:p>
             <a:pPr indent="0" marL="0">
@@ -17711,8 +15757,8 @@
         </p:nvSpPr>
         <p:spPr>
           <a:xfrm>
-            <a:off x="4937760" y="3749040"/>
-            <a:ext cx="3657600" cy="914400"/>
+            <a:off x="4901184" y="3605022"/>
+            <a:ext cx="3767328" cy="1355598"/>
           </a:xfrm>
           <a:prstGeom prst="rect">
             <a:avLst/>
@@ -17721,7 +15767,7 @@
           <a:ln/>
         </p:spPr>
         <p:txBody>
-          <a:bodyPr wrap="square" rtlCol="0" anchor="t"/>
+          <a:bodyPr wrap="square" lIns="0" tIns="0" rIns="0" bIns="0" rtlCol="0" anchor="t"/>
           <a:lstStyle/>
           <a:p>
             <a:pPr marL="342900" indent="-342900">
@@ -17937,8 +15983,8 @@
         </p:nvSpPr>
         <p:spPr>
           <a:xfrm>
-            <a:off x="365760" y="1188720"/>
-            <a:ext cx="4023360" cy="1691640"/>
+            <a:off x="365760" y="1078992"/>
+            <a:ext cx="4023360" cy="1940814"/>
           </a:xfrm>
           <a:prstGeom prst="rect">
             <a:avLst/>
@@ -17969,8 +16015,8 @@
         </p:nvSpPr>
         <p:spPr>
           <a:xfrm>
-            <a:off x="548640" y="1371600"/>
-            <a:ext cx="502920" cy="502920"/>
+            <a:off x="530352" y="1225296"/>
+            <a:ext cx="457200" cy="457200"/>
           </a:xfrm>
           <a:prstGeom prst="ellipse">
             <a:avLst/>
@@ -17989,8 +16035,8 @@
         </p:nvSpPr>
         <p:spPr>
           <a:xfrm>
-            <a:off x="548640" y="1371600"/>
-            <a:ext cx="502920" cy="502920"/>
+            <a:off x="530352" y="1225296"/>
+            <a:ext cx="457200" cy="457200"/>
           </a:xfrm>
           <a:prstGeom prst="rect">
             <a:avLst/>
@@ -18006,14 +16052,14 @@
               <a:buNone/>
             </a:pPr>
             <a:r>
-              <a:rPr lang="en-US" sz="1600" dirty="0">
+              <a:rPr lang="en-US" sz="1400" dirty="0">
                 <a:solidFill>
                   <a:srgbClr val="000000"/>
                 </a:solidFill>
               </a:rPr>
               <a:t>🛡</a:t>
             </a:r>
-            <a:endParaRPr lang="en-US" sz="1600" dirty="0"/>
+            <a:endParaRPr lang="en-US" sz="1400" dirty="0"/>
           </a:p>
         </p:txBody>
       </p:sp>
@@ -18025,8 +16071,8 @@
         </p:nvSpPr>
         <p:spPr>
           <a:xfrm>
-            <a:off x="1143000" y="1353312"/>
-            <a:ext cx="3108960" cy="365760"/>
+            <a:off x="1078992" y="1188720"/>
+            <a:ext cx="3218688" cy="329184"/>
           </a:xfrm>
           <a:prstGeom prst="rect">
             <a:avLst/>
@@ -18035,7 +16081,7 @@
           <a:ln/>
         </p:spPr>
         <p:txBody>
-          <a:bodyPr wrap="square" lIns="0" tIns="0" rIns="0" bIns="0" rtlCol="0" anchor="ctr"/>
+          <a:bodyPr wrap="square" lIns="0" tIns="0" rIns="0" bIns="0" rtlCol="0" anchor="t"/>
           <a:lstStyle/>
           <a:p>
             <a:pPr indent="0" marL="0">
@@ -18064,8 +16110,8 @@
         </p:nvSpPr>
         <p:spPr>
           <a:xfrm>
-            <a:off x="548640" y="1874520"/>
-            <a:ext cx="3657600" cy="914400"/>
+            <a:off x="512064" y="1591056"/>
+            <a:ext cx="3767328" cy="1355598"/>
           </a:xfrm>
           <a:prstGeom prst="rect">
             <a:avLst/>
@@ -18074,7 +16120,7 @@
           <a:ln/>
         </p:spPr>
         <p:txBody>
-          <a:bodyPr wrap="square" rtlCol="0" anchor="t"/>
+          <a:bodyPr wrap="square" lIns="0" tIns="0" rIns="0" bIns="0" rtlCol="0" anchor="t"/>
           <a:lstStyle/>
           <a:p>
             <a:pPr marL="342900" indent="-342900">
@@ -18140,8 +16186,8 @@
         </p:nvSpPr>
         <p:spPr>
           <a:xfrm>
-            <a:off x="4754880" y="1188720"/>
-            <a:ext cx="4023360" cy="1691640"/>
+            <a:off x="4754880" y="1078992"/>
+            <a:ext cx="4023360" cy="1940814"/>
           </a:xfrm>
           <a:prstGeom prst="rect">
             <a:avLst/>
@@ -18172,8 +16218,8 @@
         </p:nvSpPr>
         <p:spPr>
           <a:xfrm>
-            <a:off x="4937760" y="1371600"/>
-            <a:ext cx="502920" cy="502920"/>
+            <a:off x="4919472" y="1225296"/>
+            <a:ext cx="457200" cy="457200"/>
           </a:xfrm>
           <a:prstGeom prst="ellipse">
             <a:avLst/>
@@ -18192,8 +16238,8 @@
         </p:nvSpPr>
         <p:spPr>
           <a:xfrm>
-            <a:off x="4937760" y="1371600"/>
-            <a:ext cx="502920" cy="502920"/>
+            <a:off x="4919472" y="1225296"/>
+            <a:ext cx="457200" cy="457200"/>
           </a:xfrm>
           <a:prstGeom prst="rect">
             <a:avLst/>
@@ -18209,14 +16255,14 @@
               <a:buNone/>
             </a:pPr>
             <a:r>
-              <a:rPr lang="en-US" sz="1600" dirty="0">
+              <a:rPr lang="en-US" sz="1400" dirty="0">
                 <a:solidFill>
                   <a:srgbClr val="000000"/>
                 </a:solidFill>
               </a:rPr>
               <a:t>⚖</a:t>
             </a:r>
-            <a:endParaRPr lang="en-US" sz="1600" dirty="0"/>
+            <a:endParaRPr lang="en-US" sz="1400" dirty="0"/>
           </a:p>
         </p:txBody>
       </p:sp>
@@ -18228,8 +16274,8 @@
         </p:nvSpPr>
         <p:spPr>
           <a:xfrm>
-            <a:off x="5532120" y="1353312"/>
-            <a:ext cx="3108960" cy="365760"/>
+            <a:off x="5468112" y="1188720"/>
+            <a:ext cx="3218688" cy="329184"/>
           </a:xfrm>
           <a:prstGeom prst="rect">
             <a:avLst/>
@@ -18238,7 +16284,7 @@
           <a:ln/>
         </p:spPr>
         <p:txBody>
-          <a:bodyPr wrap="square" lIns="0" tIns="0" rIns="0" bIns="0" rtlCol="0" anchor="ctr"/>
+          <a:bodyPr wrap="square" lIns="0" tIns="0" rIns="0" bIns="0" rtlCol="0" anchor="t"/>
           <a:lstStyle/>
           <a:p>
             <a:pPr indent="0" marL="0">
@@ -18267,8 +16313,8 @@
         </p:nvSpPr>
         <p:spPr>
           <a:xfrm>
-            <a:off x="4937760" y="1874520"/>
-            <a:ext cx="3657600" cy="914400"/>
+            <a:off x="4901184" y="1591056"/>
+            <a:ext cx="3767328" cy="1355598"/>
           </a:xfrm>
           <a:prstGeom prst="rect">
             <a:avLst/>
@@ -18277,7 +16323,7 @@
           <a:ln/>
         </p:spPr>
         <p:txBody>
-          <a:bodyPr wrap="square" rtlCol="0" anchor="t"/>
+          <a:bodyPr wrap="square" lIns="0" tIns="0" rIns="0" bIns="0" rtlCol="0" anchor="t"/>
           <a:lstStyle/>
           <a:p>
             <a:pPr marL="342900" indent="-342900">
@@ -18343,8 +16389,8 @@
         </p:nvSpPr>
         <p:spPr>
           <a:xfrm>
-            <a:off x="365760" y="3063240"/>
-            <a:ext cx="4023360" cy="1691640"/>
+            <a:off x="365760" y="3092958"/>
+            <a:ext cx="4023360" cy="1940814"/>
           </a:xfrm>
           <a:prstGeom prst="rect">
             <a:avLst/>
@@ -18375,8 +16421,8 @@
         </p:nvSpPr>
         <p:spPr>
           <a:xfrm>
-            <a:off x="548640" y="3246120"/>
-            <a:ext cx="502920" cy="502920"/>
+            <a:off x="530352" y="3239262"/>
+            <a:ext cx="457200" cy="457200"/>
           </a:xfrm>
           <a:prstGeom prst="ellipse">
             <a:avLst/>
@@ -18395,8 +16441,8 @@
         </p:nvSpPr>
         <p:spPr>
           <a:xfrm>
-            <a:off x="548640" y="3246120"/>
-            <a:ext cx="502920" cy="502920"/>
+            <a:off x="530352" y="3239262"/>
+            <a:ext cx="457200" cy="457200"/>
           </a:xfrm>
           <a:prstGeom prst="rect">
             <a:avLst/>
@@ -18412,14 +16458,14 @@
               <a:buNone/>
             </a:pPr>
             <a:r>
-              <a:rPr lang="en-US" sz="1600" dirty="0">
+              <a:rPr lang="en-US" sz="1400" dirty="0">
                 <a:solidFill>
                   <a:srgbClr val="000000"/>
                 </a:solidFill>
               </a:rPr>
               <a:t>🔐</a:t>
             </a:r>
-            <a:endParaRPr lang="en-US" sz="1600" dirty="0"/>
+            <a:endParaRPr lang="en-US" sz="1400" dirty="0"/>
           </a:p>
         </p:txBody>
       </p:sp>
@@ -18431,8 +16477,8 @@
         </p:nvSpPr>
         <p:spPr>
           <a:xfrm>
-            <a:off x="1143000" y="3227832"/>
-            <a:ext cx="3108960" cy="365760"/>
+            <a:off x="1078992" y="3202686"/>
+            <a:ext cx="3218688" cy="329184"/>
           </a:xfrm>
           <a:prstGeom prst="rect">
             <a:avLst/>
@@ -18441,7 +16487,7 @@
           <a:ln/>
         </p:spPr>
         <p:txBody>
-          <a:bodyPr wrap="square" lIns="0" tIns="0" rIns="0" bIns="0" rtlCol="0" anchor="ctr"/>
+          <a:bodyPr wrap="square" lIns="0" tIns="0" rIns="0" bIns="0" rtlCol="0" anchor="t"/>
           <a:lstStyle/>
           <a:p>
             <a:pPr indent="0" marL="0">
@@ -18470,8 +16516,8 @@
         </p:nvSpPr>
         <p:spPr>
           <a:xfrm>
-            <a:off x="548640" y="3749040"/>
-            <a:ext cx="3657600" cy="914400"/>
+            <a:off x="512064" y="3605022"/>
+            <a:ext cx="3767328" cy="1355598"/>
           </a:xfrm>
           <a:prstGeom prst="rect">
             <a:avLst/>
@@ -18480,7 +16526,7 @@
           <a:ln/>
         </p:spPr>
         <p:txBody>
-          <a:bodyPr wrap="square" rtlCol="0" anchor="t"/>
+          <a:bodyPr wrap="square" lIns="0" tIns="0" rIns="0" bIns="0" rtlCol="0" anchor="t"/>
           <a:lstStyle/>
           <a:p>
             <a:pPr marL="342900" indent="-342900">
@@ -18546,8 +16592,8 @@
         </p:nvSpPr>
         <p:spPr>
           <a:xfrm>
-            <a:off x="4754880" y="3063240"/>
-            <a:ext cx="4023360" cy="1691640"/>
+            <a:off x="4754880" y="3092958"/>
+            <a:ext cx="4023360" cy="1940814"/>
           </a:xfrm>
           <a:prstGeom prst="rect">
             <a:avLst/>
@@ -18578,8 +16624,8 @@
         </p:nvSpPr>
         <p:spPr>
           <a:xfrm>
-            <a:off x="4937760" y="3246120"/>
-            <a:ext cx="502920" cy="502920"/>
+            <a:off x="4919472" y="3239262"/>
+            <a:ext cx="457200" cy="457200"/>
           </a:xfrm>
           <a:prstGeom prst="ellipse">
             <a:avLst/>
@@ -18598,8 +16644,8 @@
         </p:nvSpPr>
         <p:spPr>
           <a:xfrm>
-            <a:off x="4937760" y="3246120"/>
-            <a:ext cx="502920" cy="502920"/>
+            <a:off x="4919472" y="3239262"/>
+            <a:ext cx="457200" cy="457200"/>
           </a:xfrm>
           <a:prstGeom prst="rect">
             <a:avLst/>
@@ -18615,14 +16661,14 @@
               <a:buNone/>
             </a:pPr>
             <a:r>
-              <a:rPr lang="en-US" sz="1600" dirty="0">
+              <a:rPr lang="en-US" sz="1400" dirty="0">
                 <a:solidFill>
                   <a:srgbClr val="000000"/>
                 </a:solidFill>
               </a:rPr>
               <a:t>🔒</a:t>
             </a:r>
-            <a:endParaRPr lang="en-US" sz="1600" dirty="0"/>
+            <a:endParaRPr lang="en-US" sz="1400" dirty="0"/>
           </a:p>
         </p:txBody>
       </p:sp>
@@ -18634,8 +16680,8 @@
         </p:nvSpPr>
         <p:spPr>
           <a:xfrm>
-            <a:off x="5532120" y="3227832"/>
-            <a:ext cx="3108960" cy="365760"/>
+            <a:off x="5468112" y="3202686"/>
+            <a:ext cx="3218688" cy="329184"/>
           </a:xfrm>
           <a:prstGeom prst="rect">
             <a:avLst/>
@@ -18644,7 +16690,7 @@
           <a:ln/>
         </p:spPr>
         <p:txBody>
-          <a:bodyPr wrap="square" lIns="0" tIns="0" rIns="0" bIns="0" rtlCol="0" anchor="ctr"/>
+          <a:bodyPr wrap="square" lIns="0" tIns="0" rIns="0" bIns="0" rtlCol="0" anchor="t"/>
           <a:lstStyle/>
           <a:p>
             <a:pPr indent="0" marL="0">
@@ -18673,8 +16719,8 @@
         </p:nvSpPr>
         <p:spPr>
           <a:xfrm>
-            <a:off x="4937760" y="3749040"/>
-            <a:ext cx="3657600" cy="914400"/>
+            <a:off x="4901184" y="3605022"/>
+            <a:ext cx="3767328" cy="1355598"/>
           </a:xfrm>
           <a:prstGeom prst="rect">
             <a:avLst/>
@@ -18683,7 +16729,7 @@
           <a:ln/>
         </p:spPr>
         <p:txBody>
-          <a:bodyPr wrap="square" rtlCol="0" anchor="t"/>
+          <a:bodyPr wrap="square" lIns="0" tIns="0" rIns="0" bIns="0" rtlCol="0" anchor="t"/>
           <a:lstStyle/>
           <a:p>
             <a:pPr marL="342900" indent="-342900">
@@ -18899,8 +16945,8 @@
         </p:nvSpPr>
         <p:spPr>
           <a:xfrm>
-            <a:off x="365760" y="1188720"/>
-            <a:ext cx="4023360" cy="1691640"/>
+            <a:off x="365760" y="1078992"/>
+            <a:ext cx="4023360" cy="1940814"/>
           </a:xfrm>
           <a:prstGeom prst="rect">
             <a:avLst/>
@@ -18931,8 +16977,8 @@
         </p:nvSpPr>
         <p:spPr>
           <a:xfrm>
-            <a:off x="548640" y="1371600"/>
-            <a:ext cx="502920" cy="502920"/>
+            <a:off x="530352" y="1225296"/>
+            <a:ext cx="457200" cy="457200"/>
           </a:xfrm>
           <a:prstGeom prst="ellipse">
             <a:avLst/>
@@ -18951,8 +16997,8 @@
         </p:nvSpPr>
         <p:spPr>
           <a:xfrm>
-            <a:off x="548640" y="1371600"/>
-            <a:ext cx="502920" cy="502920"/>
+            <a:off x="530352" y="1225296"/>
+            <a:ext cx="457200" cy="457200"/>
           </a:xfrm>
           <a:prstGeom prst="rect">
             <a:avLst/>
@@ -18968,14 +17014,14 @@
               <a:buNone/>
             </a:pPr>
             <a:r>
-              <a:rPr lang="en-US" sz="1600" dirty="0">
+              <a:rPr lang="en-US" sz="1400" dirty="0">
                 <a:solidFill>
                   <a:srgbClr val="000000"/>
                 </a:solidFill>
               </a:rPr>
               <a:t>📡</a:t>
             </a:r>
-            <a:endParaRPr lang="en-US" sz="1600" dirty="0"/>
+            <a:endParaRPr lang="en-US" sz="1400" dirty="0"/>
           </a:p>
         </p:txBody>
       </p:sp>
@@ -18987,8 +17033,8 @@
         </p:nvSpPr>
         <p:spPr>
           <a:xfrm>
-            <a:off x="1143000" y="1353312"/>
-            <a:ext cx="3108960" cy="365760"/>
+            <a:off x="1078992" y="1188720"/>
+            <a:ext cx="3218688" cy="329184"/>
           </a:xfrm>
           <a:prstGeom prst="rect">
             <a:avLst/>
@@ -18997,7 +17043,7 @@
           <a:ln/>
         </p:spPr>
         <p:txBody>
-          <a:bodyPr wrap="square" lIns="0" tIns="0" rIns="0" bIns="0" rtlCol="0" anchor="ctr"/>
+          <a:bodyPr wrap="square" lIns="0" tIns="0" rIns="0" bIns="0" rtlCol="0" anchor="t"/>
           <a:lstStyle/>
           <a:p>
             <a:pPr indent="0" marL="0">
@@ -19026,8 +17072,8 @@
         </p:nvSpPr>
         <p:spPr>
           <a:xfrm>
-            <a:off x="548640" y="1874520"/>
-            <a:ext cx="3657600" cy="914400"/>
+            <a:off x="512064" y="1591056"/>
+            <a:ext cx="3767328" cy="1355598"/>
           </a:xfrm>
           <a:prstGeom prst="rect">
             <a:avLst/>
@@ -19036,7 +17082,7 @@
           <a:ln/>
         </p:spPr>
         <p:txBody>
-          <a:bodyPr wrap="square" rtlCol="0" anchor="t"/>
+          <a:bodyPr wrap="square" lIns="0" tIns="0" rIns="0" bIns="0" rtlCol="0" anchor="t"/>
           <a:lstStyle/>
           <a:p>
             <a:pPr marL="342900" indent="-342900">
@@ -19102,8 +17148,8 @@
         </p:nvSpPr>
         <p:spPr>
           <a:xfrm>
-            <a:off x="4754880" y="1188720"/>
-            <a:ext cx="4023360" cy="1691640"/>
+            <a:off x="4754880" y="1078992"/>
+            <a:ext cx="4023360" cy="1940814"/>
           </a:xfrm>
           <a:prstGeom prst="rect">
             <a:avLst/>
@@ -19134,8 +17180,8 @@
         </p:nvSpPr>
         <p:spPr>
           <a:xfrm>
-            <a:off x="4937760" y="1371600"/>
-            <a:ext cx="502920" cy="502920"/>
+            <a:off x="4919472" y="1225296"/>
+            <a:ext cx="457200" cy="457200"/>
           </a:xfrm>
           <a:prstGeom prst="ellipse">
             <a:avLst/>
@@ -19154,8 +17200,8 @@
         </p:nvSpPr>
         <p:spPr>
           <a:xfrm>
-            <a:off x="4937760" y="1371600"/>
-            <a:ext cx="502920" cy="502920"/>
+            <a:off x="4919472" y="1225296"/>
+            <a:ext cx="457200" cy="457200"/>
           </a:xfrm>
           <a:prstGeom prst="rect">
             <a:avLst/>
@@ -19171,14 +17217,14 @@
               <a:buNone/>
             </a:pPr>
             <a:r>
-              <a:rPr lang="en-US" sz="1600" dirty="0">
+              <a:rPr lang="en-US" sz="1400" dirty="0">
                 <a:solidFill>
                   <a:srgbClr val="000000"/>
                 </a:solidFill>
               </a:rPr>
               <a:t>🔁</a:t>
             </a:r>
-            <a:endParaRPr lang="en-US" sz="1600" dirty="0"/>
+            <a:endParaRPr lang="en-US" sz="1400" dirty="0"/>
           </a:p>
         </p:txBody>
       </p:sp>
@@ -19190,8 +17236,8 @@
         </p:nvSpPr>
         <p:spPr>
           <a:xfrm>
-            <a:off x="5532120" y="1353312"/>
-            <a:ext cx="3108960" cy="365760"/>
+            <a:off x="5468112" y="1188720"/>
+            <a:ext cx="3218688" cy="329184"/>
           </a:xfrm>
           <a:prstGeom prst="rect">
             <a:avLst/>
@@ -19200,7 +17246,7 @@
           <a:ln/>
         </p:spPr>
         <p:txBody>
-          <a:bodyPr wrap="square" lIns="0" tIns="0" rIns="0" bIns="0" rtlCol="0" anchor="ctr"/>
+          <a:bodyPr wrap="square" lIns="0" tIns="0" rIns="0" bIns="0" rtlCol="0" anchor="t"/>
           <a:lstStyle/>
           <a:p>
             <a:pPr indent="0" marL="0">
@@ -19229,8 +17275,8 @@
         </p:nvSpPr>
         <p:spPr>
           <a:xfrm>
-            <a:off x="4937760" y="1874520"/>
-            <a:ext cx="3657600" cy="914400"/>
+            <a:off x="4901184" y="1591056"/>
+            <a:ext cx="3767328" cy="1355598"/>
           </a:xfrm>
           <a:prstGeom prst="rect">
             <a:avLst/>
@@ -19239,7 +17285,7 @@
           <a:ln/>
         </p:spPr>
         <p:txBody>
-          <a:bodyPr wrap="square" rtlCol="0" anchor="t"/>
+          <a:bodyPr wrap="square" lIns="0" tIns="0" rIns="0" bIns="0" rtlCol="0" anchor="t"/>
           <a:lstStyle/>
           <a:p>
             <a:pPr marL="342900" indent="-342900">
@@ -19305,8 +17351,8 @@
         </p:nvSpPr>
         <p:spPr>
           <a:xfrm>
-            <a:off x="365760" y="3063240"/>
-            <a:ext cx="4023360" cy="1691640"/>
+            <a:off x="365760" y="3092958"/>
+            <a:ext cx="4023360" cy="1940814"/>
           </a:xfrm>
           <a:prstGeom prst="rect">
             <a:avLst/>
@@ -19337,8 +17383,8 @@
         </p:nvSpPr>
         <p:spPr>
           <a:xfrm>
-            <a:off x="548640" y="3246120"/>
-            <a:ext cx="502920" cy="502920"/>
+            <a:off x="530352" y="3239262"/>
+            <a:ext cx="457200" cy="457200"/>
           </a:xfrm>
           <a:prstGeom prst="ellipse">
             <a:avLst/>
@@ -19357,8 +17403,8 @@
         </p:nvSpPr>
         <p:spPr>
           <a:xfrm>
-            <a:off x="548640" y="3246120"/>
-            <a:ext cx="502920" cy="502920"/>
+            <a:off x="530352" y="3239262"/>
+            <a:ext cx="457200" cy="457200"/>
           </a:xfrm>
           <a:prstGeom prst="rect">
             <a:avLst/>
@@ -19374,14 +17420,14 @@
               <a:buNone/>
             </a:pPr>
             <a:r>
-              <a:rPr lang="en-US" sz="1600" dirty="0">
+              <a:rPr lang="en-US" sz="1400" dirty="0">
                 <a:solidFill>
                   <a:srgbClr val="000000"/>
                 </a:solidFill>
               </a:rPr>
               <a:t>🏗</a:t>
             </a:r>
-            <a:endParaRPr lang="en-US" sz="1600" dirty="0"/>
+            <a:endParaRPr lang="en-US" sz="1400" dirty="0"/>
           </a:p>
         </p:txBody>
       </p:sp>
@@ -19393,8 +17439,8 @@
         </p:nvSpPr>
         <p:spPr>
           <a:xfrm>
-            <a:off x="1143000" y="3227832"/>
-            <a:ext cx="3108960" cy="365760"/>
+            <a:off x="1078992" y="3202686"/>
+            <a:ext cx="3218688" cy="329184"/>
           </a:xfrm>
           <a:prstGeom prst="rect">
             <a:avLst/>
@@ -19403,7 +17449,7 @@
           <a:ln/>
         </p:spPr>
         <p:txBody>
-          <a:bodyPr wrap="square" lIns="0" tIns="0" rIns="0" bIns="0" rtlCol="0" anchor="ctr"/>
+          <a:bodyPr wrap="square" lIns="0" tIns="0" rIns="0" bIns="0" rtlCol="0" anchor="t"/>
           <a:lstStyle/>
           <a:p>
             <a:pPr indent="0" marL="0">
@@ -19432,8 +17478,8 @@
         </p:nvSpPr>
         <p:spPr>
           <a:xfrm>
-            <a:off x="548640" y="3749040"/>
-            <a:ext cx="3657600" cy="914400"/>
+            <a:off x="512064" y="3605022"/>
+            <a:ext cx="3767328" cy="1355598"/>
           </a:xfrm>
           <a:prstGeom prst="rect">
             <a:avLst/>
@@ -19442,7 +17488,7 @@
           <a:ln/>
         </p:spPr>
         <p:txBody>
-          <a:bodyPr wrap="square" rtlCol="0" anchor="t"/>
+          <a:bodyPr wrap="square" lIns="0" tIns="0" rIns="0" bIns="0" rtlCol="0" anchor="t"/>
           <a:lstStyle/>
           <a:p>
             <a:pPr marL="342900" indent="-342900">
@@ -19508,8 +17554,8 @@
         </p:nvSpPr>
         <p:spPr>
           <a:xfrm>
-            <a:off x="4754880" y="3063240"/>
-            <a:ext cx="4023360" cy="1691640"/>
+            <a:off x="4754880" y="3092958"/>
+            <a:ext cx="4023360" cy="1940814"/>
           </a:xfrm>
           <a:prstGeom prst="rect">
             <a:avLst/>
@@ -19540,8 +17586,8 @@
         </p:nvSpPr>
         <p:spPr>
           <a:xfrm>
-            <a:off x="4937760" y="3246120"/>
-            <a:ext cx="502920" cy="502920"/>
+            <a:off x="4919472" y="3239262"/>
+            <a:ext cx="457200" cy="457200"/>
           </a:xfrm>
           <a:prstGeom prst="ellipse">
             <a:avLst/>
@@ -19560,8 +17606,8 @@
         </p:nvSpPr>
         <p:spPr>
           <a:xfrm>
-            <a:off x="4937760" y="3246120"/>
-            <a:ext cx="502920" cy="502920"/>
+            <a:off x="4919472" y="3239262"/>
+            <a:ext cx="457200" cy="457200"/>
           </a:xfrm>
           <a:prstGeom prst="rect">
             <a:avLst/>
@@ -19577,14 +17623,14 @@
               <a:buNone/>
             </a:pPr>
             <a:r>
-              <a:rPr lang="en-US" sz="1600" dirty="0">
+              <a:rPr lang="en-US" sz="1400" dirty="0">
                 <a:solidFill>
                   <a:srgbClr val="000000"/>
                 </a:solidFill>
               </a:rPr>
               <a:t>✅</a:t>
             </a:r>
-            <a:endParaRPr lang="en-US" sz="1600" dirty="0"/>
+            <a:endParaRPr lang="en-US" sz="1400" dirty="0"/>
           </a:p>
         </p:txBody>
       </p:sp>
@@ -19596,8 +17642,8 @@
         </p:nvSpPr>
         <p:spPr>
           <a:xfrm>
-            <a:off x="5532120" y="3227832"/>
-            <a:ext cx="3108960" cy="365760"/>
+            <a:off x="5468112" y="3202686"/>
+            <a:ext cx="3218688" cy="329184"/>
           </a:xfrm>
           <a:prstGeom prst="rect">
             <a:avLst/>
@@ -19606,7 +17652,7 @@
           <a:ln/>
         </p:spPr>
         <p:txBody>
-          <a:bodyPr wrap="square" lIns="0" tIns="0" rIns="0" bIns="0" rtlCol="0" anchor="ctr"/>
+          <a:bodyPr wrap="square" lIns="0" tIns="0" rIns="0" bIns="0" rtlCol="0" anchor="t"/>
           <a:lstStyle/>
           <a:p>
             <a:pPr indent="0" marL="0">
@@ -19635,8 +17681,8 @@
         </p:nvSpPr>
         <p:spPr>
           <a:xfrm>
-            <a:off x="4937760" y="3749040"/>
-            <a:ext cx="3657600" cy="914400"/>
+            <a:off x="4901184" y="3605022"/>
+            <a:ext cx="3767328" cy="1355598"/>
           </a:xfrm>
           <a:prstGeom prst="rect">
             <a:avLst/>
@@ -19645,7 +17691,7 @@
           <a:ln/>
         </p:spPr>
         <p:txBody>
-          <a:bodyPr wrap="square" rtlCol="0" anchor="t"/>
+          <a:bodyPr wrap="square" lIns="0" tIns="0" rIns="0" bIns="0" rtlCol="0" anchor="t"/>
           <a:lstStyle/>
           <a:p>
             <a:pPr marL="342900" indent="-342900">
